--- a/docs/prezentare-aplicatie.pptx
+++ b/docs/prezentare-aplicatie.pptx
@@ -1836,7 +1836,7 @@
     <p:bg>
       <p:bgPr>
         <a:solidFill>
-          <a:srgbClr val="152A4E"/>
+          <a:srgbClr val="16263D"/>
         </a:solidFill>
       </p:bgPr>
     </p:bg>
@@ -1863,13 +1863,13 @@
         <p:spPr>
           <a:xfrm>
             <a:off x="0" y="0"/>
-            <a:ext cx="12191695" cy="201168"/>
-          </a:xfrm>
-          <a:prstGeom prst="rect">
-            <a:avLst/>
-          </a:prstGeom>
-          <a:solidFill>
-            <a:srgbClr val="D9A227"/>
+            <a:ext cx="4063898" cy="201168"/>
+          </a:xfrm>
+          <a:prstGeom prst="rect">
+            <a:avLst/>
+          </a:prstGeom>
+          <a:solidFill>
+            <a:srgbClr val="27408B"/>
           </a:solidFill>
           <a:ln/>
         </p:spPr>
@@ -1877,6 +1877,46 @@
       <p:sp>
         <p:nvSpPr>
           <p:cNvPr id="3" name="Shape 1"/>
+          <p:cNvSpPr/>
+          <p:nvPr/>
+        </p:nvSpPr>
+        <p:spPr>
+          <a:xfrm>
+            <a:off x="4063898" y="0"/>
+            <a:ext cx="4063898" cy="201168"/>
+          </a:xfrm>
+          <a:prstGeom prst="rect">
+            <a:avLst/>
+          </a:prstGeom>
+          <a:solidFill>
+            <a:srgbClr val="D7A92B"/>
+          </a:solidFill>
+          <a:ln/>
+        </p:spPr>
+      </p:sp>
+      <p:sp>
+        <p:nvSpPr>
+          <p:cNvPr id="4" name="Shape 2"/>
+          <p:cNvSpPr/>
+          <p:nvPr/>
+        </p:nvSpPr>
+        <p:spPr>
+          <a:xfrm>
+            <a:off x="8127797" y="0"/>
+            <a:ext cx="4063898" cy="201168"/>
+          </a:xfrm>
+          <a:prstGeom prst="rect">
+            <a:avLst/>
+          </a:prstGeom>
+          <a:solidFill>
+            <a:srgbClr val="A5301F"/>
+          </a:solidFill>
+          <a:ln/>
+        </p:spPr>
+      </p:sp>
+      <p:sp>
+        <p:nvSpPr>
+          <p:cNvPr id="5" name="Shape 3"/>
           <p:cNvSpPr/>
           <p:nvPr/>
         </p:nvSpPr>
@@ -1889,14 +1929,14 @@
             <a:avLst/>
           </a:prstGeom>
           <a:solidFill>
-            <a:srgbClr val="1E3A66"/>
-          </a:solidFill>
-          <a:ln/>
-        </p:spPr>
-      </p:sp>
-      <p:sp>
-        <p:nvSpPr>
-          <p:cNvPr id="4" name="Text 2"/>
+            <a:srgbClr val="21314E"/>
+          </a:solidFill>
+          <a:ln/>
+        </p:spPr>
+      </p:sp>
+      <p:sp>
+        <p:nvSpPr>
+          <p:cNvPr id="6" name="Text 4"/>
           <p:cNvSpPr/>
           <p:nvPr/>
         </p:nvSpPr>
@@ -1921,13 +1961,13 @@
             <a:r>
               <a:rPr lang="en-US" sz="1600" b="1" spc="400" kern="0" dirty="0">
                 <a:solidFill>
-                  <a:srgbClr val="D9A227"/>
-                </a:solidFill>
-                <a:latin typeface="Calibri" pitchFamily="34" charset="0"/>
-                <a:ea typeface="Calibri" pitchFamily="34" charset="-122"/>
-                <a:cs typeface="Calibri" pitchFamily="34" charset="-120"/>
-              </a:rPr>
-              <a:t>ASISTENT DE EVALUARE IMOBILIARA</a:t>
+                  <a:srgbClr val="D9C08A"/>
+                </a:solidFill>
+                <a:latin typeface="Segoe UI" pitchFamily="34" charset="0"/>
+                <a:ea typeface="Segoe UI" pitchFamily="34" charset="-122"/>
+                <a:cs typeface="Segoe UI" pitchFamily="34" charset="-120"/>
+              </a:rPr>
+              <a:t>REGISTRU DE EVALUARE · ANEVAR</a:t>
             </a:r>
             <a:endParaRPr lang="en-US" sz="1600" dirty="0"/>
           </a:p>
@@ -1935,7 +1975,7 @@
       </p:sp>
       <p:sp>
         <p:nvSpPr>
-          <p:cNvPr id="5" name="Text 3"/>
+          <p:cNvPr id="7" name="Text 5"/>
           <p:cNvSpPr/>
           <p:nvPr/>
         </p:nvSpPr>
@@ -1966,7 +2006,7 @@
                 <a:ea typeface="Georgia" pitchFamily="34" charset="-122"/>
                 <a:cs typeface="Georgia" pitchFamily="34" charset="-120"/>
               </a:rPr>
-              <a:t>Casa individuala + teren, pentru garantarea creditului</a:t>
+              <a:t>Asistent de evaluare imobiliară</a:t>
             </a:r>
             <a:endParaRPr lang="en-US" sz="4000" dirty="0"/>
           </a:p>
@@ -1974,14 +2014,14 @@
       </p:sp>
       <p:sp>
         <p:nvSpPr>
-          <p:cNvPr id="6" name="Text 4"/>
+          <p:cNvPr id="8" name="Text 6"/>
           <p:cNvSpPr/>
           <p:nvPr/>
         </p:nvSpPr>
         <p:spPr>
           <a:xfrm>
             <a:off x="822960" y="3794760"/>
-            <a:ext cx="10058400" cy="548640"/>
+            <a:ext cx="10424160" cy="822960"/>
           </a:xfrm>
           <a:prstGeom prst="rect">
             <a:avLst/>
@@ -1999,13 +2039,13 @@
             <a:r>
               <a:rPr lang="en-US" sz="1700" dirty="0">
                 <a:solidFill>
-                  <a:srgbClr val="CFE0F5"/>
-                </a:solidFill>
-                <a:latin typeface="Calibri" pitchFamily="34" charset="0"/>
-                <a:ea typeface="Calibri" pitchFamily="34" charset="-122"/>
-                <a:cs typeface="Calibri" pitchFamily="34" charset="-120"/>
-              </a:rPr>
-              <a:t>Document de prezentare pentru review — destinat unui evaluator autorizat ANEVAR</a:t>
+                  <a:srgbClr val="E9E0CC"/>
+                </a:solidFill>
+                <a:latin typeface="Segoe UI" pitchFamily="34" charset="0"/>
+                <a:ea typeface="Segoe UI" pitchFamily="34" charset="-122"/>
+                <a:cs typeface="Segoe UI" pitchFamily="34" charset="-120"/>
+              </a:rPr>
+              <a:t>Casă + teren, apartament, comercial, industrial, agricol — pentru garantare, IFRS, asigurare, impozitare, litigiu</a:t>
             </a:r>
             <a:endParaRPr lang="en-US" sz="1700" dirty="0"/>
           </a:p>
@@ -2013,7 +2053,7 @@
       </p:sp>
       <p:sp>
         <p:nvSpPr>
-          <p:cNvPr id="7" name="Text 5"/>
+          <p:cNvPr id="9" name="Text 7"/>
           <p:cNvSpPr/>
           <p:nvPr/>
         </p:nvSpPr>
@@ -2038,13 +2078,13 @@
             <a:r>
               <a:rPr lang="en-US" sz="1300" dirty="0">
                 <a:solidFill>
-                  <a:srgbClr val="CFE0F5"/>
-                </a:solidFill>
-                <a:latin typeface="Calibri" pitchFamily="34" charset="0"/>
-                <a:ea typeface="Calibri" pitchFamily="34" charset="-122"/>
-                <a:cs typeface="Calibri" pitchFamily="34" charset="-120"/>
-              </a:rPr>
-              <a:t>Ce face aplicatia · cum e gandita · ce metodologie aplica · ce e validat · ce urmeaza</a:t>
+                  <a:srgbClr val="E9E0CC"/>
+                </a:solidFill>
+                <a:latin typeface="Segoe UI" pitchFamily="34" charset="0"/>
+                <a:ea typeface="Segoe UI" pitchFamily="34" charset="-122"/>
+                <a:cs typeface="Segoe UI" pitchFamily="34" charset="-120"/>
+              </a:rPr>
+              <a:t>Ce face aplicația · cum e gândită · ce metodologie aplică · ce e validat · ce urmează</a:t>
             </a:r>
             <a:endParaRPr lang="en-US" sz="1300" dirty="0"/>
           </a:p>
@@ -2064,7 +2104,7 @@
     <p:bg>
       <p:bgPr>
         <a:solidFill>
-          <a:srgbClr val="F5F7FB"/>
+          <a:srgbClr val="F2EEE2"/>
         </a:solidFill>
       </p:bgPr>
     </p:bg>
@@ -2097,7 +2137,7 @@
             <a:avLst/>
           </a:prstGeom>
           <a:solidFill>
-            <a:srgbClr val="D9A227"/>
+            <a:srgbClr val="9D4A25"/>
           </a:solidFill>
           <a:ln/>
         </p:spPr>
@@ -2129,13 +2169,13 @@
             <a:r>
               <a:rPr lang="en-US" sz="1200" b="1" spc="300" kern="0" dirty="0">
                 <a:solidFill>
-                  <a:srgbClr val="D9A227"/>
-                </a:solidFill>
-                <a:latin typeface="Calibri" pitchFamily="34" charset="0"/>
-                <a:ea typeface="Calibri" pitchFamily="34" charset="-122"/>
-                <a:cs typeface="Calibri" pitchFamily="34" charset="-120"/>
-              </a:rPr>
-              <a:t>CONFIDENTIALITATE</a:t>
+                  <a:srgbClr val="9D4A25"/>
+                </a:solidFill>
+                <a:latin typeface="Segoe UI" pitchFamily="34" charset="0"/>
+                <a:ea typeface="Segoe UI" pitchFamily="34" charset="-122"/>
+                <a:cs typeface="Segoe UI" pitchFamily="34" charset="-120"/>
+              </a:rPr>
+              <a:t>CONFIDENȚIALITATE</a:t>
             </a:r>
             <a:endParaRPr lang="en-US" sz="1200" dirty="0"/>
           </a:p>
@@ -2168,7 +2208,7 @@
             <a:r>
               <a:rPr lang="en-US" sz="3000" b="1" dirty="0">
                 <a:solidFill>
-                  <a:srgbClr val="152A4E"/>
+                  <a:srgbClr val="16263D"/>
                 </a:solidFill>
                 <a:latin typeface="Georgia" pitchFamily="34" charset="0"/>
                 <a:ea typeface="Georgia" pitchFamily="34" charset="-122"/>
@@ -2188,6 +2228,26 @@
         </p:nvSpPr>
         <p:spPr>
           <a:xfrm>
+            <a:off x="777240" y="1335024"/>
+            <a:ext cx="10607040" cy="22860"/>
+          </a:xfrm>
+          <a:prstGeom prst="rect">
+            <a:avLst/>
+          </a:prstGeom>
+          <a:solidFill>
+            <a:srgbClr val="B08D57"/>
+          </a:solidFill>
+          <a:ln/>
+        </p:spPr>
+      </p:sp>
+      <p:sp>
+        <p:nvSpPr>
+          <p:cNvPr id="6" name="Shape 4"/>
+          <p:cNvSpPr/>
+          <p:nvPr/>
+        </p:nvSpPr>
+        <p:spPr>
+          <a:xfrm>
             <a:off x="777240" y="2011680"/>
             <a:ext cx="2468880" cy="2194560"/>
           </a:xfrm>
@@ -2195,18 +2255,18 @@
             <a:avLst/>
           </a:prstGeom>
           <a:solidFill>
-            <a:srgbClr val="FFFFFF"/>
+            <a:srgbClr val="FBF8F0"/>
           </a:solidFill>
           <a:ln w="12700">
             <a:solidFill>
-              <a:srgbClr val="DDE3EE"/>
+              <a:srgbClr val="D7CDB4"/>
             </a:solidFill>
             <a:prstDash val="solid"/>
           </a:ln>
           <a:effectLst>
             <a:outerShdw sx="100000" sy="100000" kx="0" ky="0" algn="bl" rotWithShape="0" blurRad="88900" dist="38100" dir="8100000">
-              <a:srgbClr val="000000">
-                <a:alpha val="13000"/>
+              <a:srgbClr val="16263D">
+                <a:alpha val="12000"/>
               </a:srgbClr>
             </a:outerShdw>
           </a:effectLst>
@@ -2214,7 +2274,7 @@
       </p:sp>
       <p:sp>
         <p:nvSpPr>
-          <p:cNvPr id="6" name="Shape 4"/>
+          <p:cNvPr id="7" name="Shape 5"/>
           <p:cNvSpPr/>
           <p:nvPr/>
         </p:nvSpPr>
@@ -2227,14 +2287,14 @@
             <a:avLst/>
           </a:prstGeom>
           <a:solidFill>
-            <a:srgbClr val="152A4E"/>
-          </a:solidFill>
-          <a:ln/>
-        </p:spPr>
-      </p:sp>
-      <p:sp>
-        <p:nvSpPr>
-          <p:cNvPr id="7" name="Text 5"/>
+            <a:srgbClr val="16263D"/>
+          </a:solidFill>
+          <a:ln/>
+        </p:spPr>
+      </p:sp>
+      <p:sp>
+        <p:nvSpPr>
+          <p:cNvPr id="8" name="Text 6"/>
           <p:cNvSpPr/>
           <p:nvPr/>
         </p:nvSpPr>
@@ -2259,7 +2319,7 @@
             <a:r>
               <a:rPr lang="en-US" sz="1600" b="1" dirty="0">
                 <a:solidFill>
-                  <a:srgbClr val="152A4E"/>
+                  <a:srgbClr val="16263D"/>
                 </a:solidFill>
                 <a:latin typeface="Georgia" pitchFamily="34" charset="0"/>
                 <a:ea typeface="Georgia" pitchFamily="34" charset="-122"/>
@@ -2273,7 +2333,7 @@
       </p:sp>
       <p:sp>
         <p:nvSpPr>
-          <p:cNvPr id="8" name="Text 6"/>
+          <p:cNvPr id="9" name="Text 7"/>
           <p:cNvSpPr/>
           <p:nvPr/>
         </p:nvSpPr>
@@ -2298,13 +2358,13 @@
             <a:r>
               <a:rPr lang="en-US" sz="1300" dirty="0">
                 <a:solidFill>
-                  <a:srgbClr val="1A2233"/>
-                </a:solidFill>
-                <a:latin typeface="Calibri" pitchFamily="34" charset="0"/>
-                <a:ea typeface="Calibri" pitchFamily="34" charset="-122"/>
-                <a:cs typeface="Calibri" pitchFamily="34" charset="-120"/>
-              </a:rPr>
-              <a:t>Nume, adresa, cadastral, CF, evaluator</a:t>
+                  <a:srgbClr val="1F2D45"/>
+                </a:solidFill>
+                <a:latin typeface="Segoe UI" pitchFamily="34" charset="0"/>
+                <a:ea typeface="Segoe UI" pitchFamily="34" charset="-122"/>
+                <a:cs typeface="Segoe UI" pitchFamily="34" charset="-120"/>
+              </a:rPr>
+              <a:t>Nume, adresă, cadastral, CF, evaluator</a:t>
             </a:r>
             <a:endParaRPr lang="en-US" sz="1300" dirty="0"/>
           </a:p>
@@ -2312,7 +2372,7 @@
       </p:sp>
       <p:sp>
         <p:nvSpPr>
-          <p:cNvPr id="9" name="Shape 7"/>
+          <p:cNvPr id="10" name="Shape 8"/>
           <p:cNvSpPr/>
           <p:nvPr/>
         </p:nvSpPr>
@@ -2327,7 +2387,7 @@
           <a:noFill/>
           <a:ln w="25400">
             <a:solidFill>
-              <a:srgbClr val="5C6679"/>
+              <a:srgbClr val="5A6270"/>
             </a:solidFill>
             <a:prstDash val="solid"/>
             <a:tailEnd type="triangle"/>
@@ -2336,7 +2396,7 @@
       </p:sp>
       <p:sp>
         <p:nvSpPr>
-          <p:cNvPr id="10" name="Shape 8"/>
+          <p:cNvPr id="11" name="Shape 9"/>
           <p:cNvSpPr/>
           <p:nvPr/>
         </p:nvSpPr>
@@ -2349,18 +2409,18 @@
             <a:avLst/>
           </a:prstGeom>
           <a:solidFill>
-            <a:srgbClr val="FFFFFF"/>
+            <a:srgbClr val="FBF8F0"/>
           </a:solidFill>
           <a:ln w="12700">
             <a:solidFill>
-              <a:srgbClr val="DDE3EE"/>
+              <a:srgbClr val="D7CDB4"/>
             </a:solidFill>
             <a:prstDash val="solid"/>
           </a:ln>
           <a:effectLst>
             <a:outerShdw sx="100000" sy="100000" kx="0" ky="0" algn="bl" rotWithShape="0" blurRad="88900" dist="38100" dir="8100000">
-              <a:srgbClr val="000000">
-                <a:alpha val="13000"/>
+              <a:srgbClr val="16263D">
+                <a:alpha val="12000"/>
               </a:srgbClr>
             </a:outerShdw>
           </a:effectLst>
@@ -2368,7 +2428,7 @@
       </p:sp>
       <p:sp>
         <p:nvSpPr>
-          <p:cNvPr id="11" name="Shape 9"/>
+          <p:cNvPr id="12" name="Shape 10"/>
           <p:cNvSpPr/>
           <p:nvPr/>
         </p:nvSpPr>
@@ -2381,14 +2441,14 @@
             <a:avLst/>
           </a:prstGeom>
           <a:solidFill>
-            <a:srgbClr val="D9A227"/>
-          </a:solidFill>
-          <a:ln/>
-        </p:spPr>
-      </p:sp>
-      <p:sp>
-        <p:nvSpPr>
-          <p:cNvPr id="12" name="Text 10"/>
+            <a:srgbClr val="9D4A25"/>
+          </a:solidFill>
+          <a:ln/>
+        </p:spPr>
+      </p:sp>
+      <p:sp>
+        <p:nvSpPr>
+          <p:cNvPr id="13" name="Text 11"/>
           <p:cNvSpPr/>
           <p:nvPr/>
         </p:nvSpPr>
@@ -2413,7 +2473,7 @@
             <a:r>
               <a:rPr lang="en-US" sz="1600" b="1" dirty="0">
                 <a:solidFill>
-                  <a:srgbClr val="152A4E"/>
+                  <a:srgbClr val="16263D"/>
                 </a:solidFill>
                 <a:latin typeface="Georgia" pitchFamily="34" charset="0"/>
                 <a:ea typeface="Georgia" pitchFamily="34" charset="-122"/>
@@ -2427,7 +2487,7 @@
       </p:sp>
       <p:sp>
         <p:nvSpPr>
-          <p:cNvPr id="13" name="Text 11"/>
+          <p:cNvPr id="14" name="Text 12"/>
           <p:cNvSpPr/>
           <p:nvPr/>
         </p:nvSpPr>
@@ -2452,13 +2512,13 @@
             <a:r>
               <a:rPr lang="en-US" sz="1300" dirty="0">
                 <a:solidFill>
-                  <a:srgbClr val="1A2233"/>
-                </a:solidFill>
-                <a:latin typeface="Calibri" pitchFamily="34" charset="0"/>
-                <a:ea typeface="Calibri" pitchFamily="34" charset="-122"/>
-                <a:cs typeface="Calibri" pitchFamily="34" charset="-120"/>
-              </a:rPr>
-              <a:t>Inlocuite cu marcaje: [CLIENT], [ADRESA]...</a:t>
+                  <a:srgbClr val="1F2D45"/>
+                </a:solidFill>
+                <a:latin typeface="Segoe UI" pitchFamily="34" charset="0"/>
+                <a:ea typeface="Segoe UI" pitchFamily="34" charset="-122"/>
+                <a:cs typeface="Segoe UI" pitchFamily="34" charset="-120"/>
+              </a:rPr>
+              <a:t>Înlocuite cu marcaje: [CLIENT], [ADRESA]...</a:t>
             </a:r>
             <a:endParaRPr lang="en-US" sz="1300" dirty="0"/>
           </a:p>
@@ -2466,7 +2526,7 @@
       </p:sp>
       <p:sp>
         <p:nvSpPr>
-          <p:cNvPr id="14" name="Shape 12"/>
+          <p:cNvPr id="15" name="Shape 13"/>
           <p:cNvSpPr/>
           <p:nvPr/>
         </p:nvSpPr>
@@ -2481,7 +2541,7 @@
           <a:noFill/>
           <a:ln w="25400">
             <a:solidFill>
-              <a:srgbClr val="5C6679"/>
+              <a:srgbClr val="5A6270"/>
             </a:solidFill>
             <a:prstDash val="solid"/>
             <a:tailEnd type="triangle"/>
@@ -2490,7 +2550,7 @@
       </p:sp>
       <p:sp>
         <p:nvSpPr>
-          <p:cNvPr id="15" name="Shape 13"/>
+          <p:cNvPr id="16" name="Shape 14"/>
           <p:cNvSpPr/>
           <p:nvPr/>
         </p:nvSpPr>
@@ -2503,18 +2563,18 @@
             <a:avLst/>
           </a:prstGeom>
           <a:solidFill>
-            <a:srgbClr val="FFFFFF"/>
+            <a:srgbClr val="FBF8F0"/>
           </a:solidFill>
           <a:ln w="12700">
             <a:solidFill>
-              <a:srgbClr val="DDE3EE"/>
+              <a:srgbClr val="D7CDB4"/>
             </a:solidFill>
             <a:prstDash val="solid"/>
           </a:ln>
           <a:effectLst>
             <a:outerShdw sx="100000" sy="100000" kx="0" ky="0" algn="bl" rotWithShape="0" blurRad="88900" dist="38100" dir="8100000">
-              <a:srgbClr val="000000">
-                <a:alpha val="13000"/>
+              <a:srgbClr val="16263D">
+                <a:alpha val="12000"/>
               </a:srgbClr>
             </a:outerShdw>
           </a:effectLst>
@@ -2522,7 +2582,7 @@
       </p:sp>
       <p:sp>
         <p:nvSpPr>
-          <p:cNvPr id="16" name="Shape 14"/>
+          <p:cNvPr id="17" name="Shape 15"/>
           <p:cNvSpPr/>
           <p:nvPr/>
         </p:nvSpPr>
@@ -2535,14 +2595,14 @@
             <a:avLst/>
           </a:prstGeom>
           <a:solidFill>
-            <a:srgbClr val="2A9D8F"/>
-          </a:solidFill>
-          <a:ln/>
-        </p:spPr>
-      </p:sp>
-      <p:sp>
-        <p:nvSpPr>
-          <p:cNvPr id="17" name="Text 15"/>
+            <a:srgbClr val="2F6B4F"/>
+          </a:solidFill>
+          <a:ln/>
+        </p:spPr>
+      </p:sp>
+      <p:sp>
+        <p:nvSpPr>
+          <p:cNvPr id="18" name="Text 16"/>
           <p:cNvSpPr/>
           <p:nvPr/>
         </p:nvSpPr>
@@ -2567,7 +2627,7 @@
             <a:r>
               <a:rPr lang="en-US" sz="1600" b="1" dirty="0">
                 <a:solidFill>
-                  <a:srgbClr val="152A4E"/>
+                  <a:srgbClr val="16263D"/>
                 </a:solidFill>
                 <a:latin typeface="Georgia" pitchFamily="34" charset="0"/>
                 <a:ea typeface="Georgia" pitchFamily="34" charset="-122"/>
@@ -2581,7 +2641,7 @@
       </p:sp>
       <p:sp>
         <p:nvSpPr>
-          <p:cNvPr id="18" name="Text 16"/>
+          <p:cNvPr id="19" name="Text 17"/>
           <p:cNvSpPr/>
           <p:nvPr/>
         </p:nvSpPr>
@@ -2606,13 +2666,13 @@
             <a:r>
               <a:rPr lang="en-US" sz="1300" dirty="0">
                 <a:solidFill>
-                  <a:srgbClr val="1A2233"/>
-                </a:solidFill>
-                <a:latin typeface="Calibri" pitchFamily="34" charset="0"/>
-                <a:ea typeface="Calibri" pitchFamily="34" charset="-122"/>
-                <a:cs typeface="Calibri" pitchFamily="34" charset="-120"/>
-              </a:rPr>
-              <a:t>Primeste DOAR text anonimizat</a:t>
+                  <a:srgbClr val="1F2D45"/>
+                </a:solidFill>
+                <a:latin typeface="Segoe UI" pitchFamily="34" charset="0"/>
+                <a:ea typeface="Segoe UI" pitchFamily="34" charset="-122"/>
+                <a:cs typeface="Segoe UI" pitchFamily="34" charset="-120"/>
+              </a:rPr>
+              <a:t>Primește DOAR text anonimizat</a:t>
             </a:r>
             <a:endParaRPr lang="en-US" sz="1300" dirty="0"/>
           </a:p>
@@ -2620,7 +2680,7 @@
       </p:sp>
       <p:sp>
         <p:nvSpPr>
-          <p:cNvPr id="19" name="Shape 17"/>
+          <p:cNvPr id="20" name="Shape 18"/>
           <p:cNvSpPr/>
           <p:nvPr/>
         </p:nvSpPr>
@@ -2635,7 +2695,7 @@
           <a:noFill/>
           <a:ln w="25400">
             <a:solidFill>
-              <a:srgbClr val="5C6679"/>
+              <a:srgbClr val="5A6270"/>
             </a:solidFill>
             <a:prstDash val="solid"/>
             <a:tailEnd type="triangle"/>
@@ -2644,7 +2704,7 @@
       </p:sp>
       <p:sp>
         <p:nvSpPr>
-          <p:cNvPr id="20" name="Shape 18"/>
+          <p:cNvPr id="21" name="Shape 19"/>
           <p:cNvSpPr/>
           <p:nvPr/>
         </p:nvSpPr>
@@ -2657,18 +2717,18 @@
             <a:avLst/>
           </a:prstGeom>
           <a:solidFill>
-            <a:srgbClr val="FFFFFF"/>
+            <a:srgbClr val="FBF8F0"/>
           </a:solidFill>
           <a:ln w="12700">
             <a:solidFill>
-              <a:srgbClr val="DDE3EE"/>
+              <a:srgbClr val="D7CDB4"/>
             </a:solidFill>
             <a:prstDash val="solid"/>
           </a:ln>
           <a:effectLst>
             <a:outerShdw sx="100000" sy="100000" kx="0" ky="0" algn="bl" rotWithShape="0" blurRad="88900" dist="38100" dir="8100000">
-              <a:srgbClr val="000000">
-                <a:alpha val="13000"/>
+              <a:srgbClr val="16263D">
+                <a:alpha val="12000"/>
               </a:srgbClr>
             </a:outerShdw>
           </a:effectLst>
@@ -2676,7 +2736,7 @@
       </p:sp>
       <p:sp>
         <p:nvSpPr>
-          <p:cNvPr id="21" name="Shape 19"/>
+          <p:cNvPr id="22" name="Shape 20"/>
           <p:cNvSpPr/>
           <p:nvPr/>
         </p:nvSpPr>
@@ -2689,14 +2749,14 @@
             <a:avLst/>
           </a:prstGeom>
           <a:solidFill>
-            <a:srgbClr val="2E7D5B"/>
-          </a:solidFill>
-          <a:ln/>
-        </p:spPr>
-      </p:sp>
-      <p:sp>
-        <p:nvSpPr>
-          <p:cNvPr id="22" name="Text 20"/>
+            <a:srgbClr val="2F6B4F"/>
+          </a:solidFill>
+          <a:ln/>
+        </p:spPr>
+      </p:sp>
+      <p:sp>
+        <p:nvSpPr>
+          <p:cNvPr id="23" name="Text 21"/>
           <p:cNvSpPr/>
           <p:nvPr/>
         </p:nvSpPr>
@@ -2721,13 +2781,13 @@
             <a:r>
               <a:rPr lang="en-US" sz="1600" b="1" dirty="0">
                 <a:solidFill>
-                  <a:srgbClr val="152A4E"/>
+                  <a:srgbClr val="16263D"/>
                 </a:solidFill>
                 <a:latin typeface="Georgia" pitchFamily="34" charset="0"/>
                 <a:ea typeface="Georgia" pitchFamily="34" charset="-122"/>
                 <a:cs typeface="Georgia" pitchFamily="34" charset="-120"/>
               </a:rPr>
-              <a:t>Demascare locala</a:t>
+              <a:t>Demascare locală</a:t>
             </a:r>
             <a:endParaRPr lang="en-US" sz="1600" dirty="0"/>
           </a:p>
@@ -2735,7 +2795,7 @@
       </p:sp>
       <p:sp>
         <p:nvSpPr>
-          <p:cNvPr id="23" name="Text 21"/>
+          <p:cNvPr id="24" name="Text 22"/>
           <p:cNvSpPr/>
           <p:nvPr/>
         </p:nvSpPr>
@@ -2760,11 +2820,11 @@
             <a:r>
               <a:rPr lang="en-US" sz="1300" dirty="0">
                 <a:solidFill>
-                  <a:srgbClr val="1A2233"/>
-                </a:solidFill>
-                <a:latin typeface="Calibri" pitchFamily="34" charset="0"/>
-                <a:ea typeface="Calibri" pitchFamily="34" charset="-122"/>
-                <a:cs typeface="Calibri" pitchFamily="34" charset="-120"/>
+                  <a:srgbClr val="1F2D45"/>
+                </a:solidFill>
+                <a:latin typeface="Segoe UI" pitchFamily="34" charset="0"/>
+                <a:ea typeface="Segoe UI" pitchFamily="34" charset="-122"/>
+                <a:cs typeface="Segoe UI" pitchFamily="34" charset="-120"/>
               </a:rPr>
               <a:t>Numele reale revin pe calculator</a:t>
             </a:r>
@@ -2774,7 +2834,7 @@
       </p:sp>
       <p:sp>
         <p:nvSpPr>
-          <p:cNvPr id="24" name="Text 22"/>
+          <p:cNvPr id="25" name="Text 23"/>
           <p:cNvSpPr/>
           <p:nvPr/>
         </p:nvSpPr>
@@ -2799,13 +2859,13 @@
             <a:r>
               <a:rPr lang="en-US" sz="1400" i="1" dirty="0">
                 <a:solidFill>
-                  <a:srgbClr val="5C6679"/>
-                </a:solidFill>
-                <a:latin typeface="Calibri" pitchFamily="34" charset="0"/>
-                <a:ea typeface="Calibri" pitchFamily="34" charset="-122"/>
-                <a:cs typeface="Calibri" pitchFamily="34" charset="-120"/>
-              </a:rPr>
-              <a:t>Restul calculelor si generarea documentului se fac integral pe calculatorul evaluatorului.</a:t>
+                  <a:srgbClr val="5A6270"/>
+                </a:solidFill>
+                <a:latin typeface="Segoe UI" pitchFamily="34" charset="0"/>
+                <a:ea typeface="Segoe UI" pitchFamily="34" charset="-122"/>
+                <a:cs typeface="Segoe UI" pitchFamily="34" charset="-120"/>
+              </a:rPr>
+              <a:t>Restul calculelor și generarea documentului se fac integral pe calculatorul evaluatorului.</a:t>
             </a:r>
             <a:endParaRPr lang="en-US" sz="1400" dirty="0"/>
           </a:p>
@@ -2813,7 +2873,7 @@
       </p:sp>
       <p:sp>
         <p:nvSpPr>
-          <p:cNvPr id="25" name="Text 23"/>
+          <p:cNvPr id="26" name="Text 24"/>
           <p:cNvSpPr/>
           <p:nvPr/>
         </p:nvSpPr>
@@ -2838,13 +2898,13 @@
             <a:r>
               <a:rPr lang="en-US" sz="900" dirty="0">
                 <a:solidFill>
-                  <a:srgbClr val="5C6679"/>
-                </a:solidFill>
-                <a:latin typeface="Calibri" pitchFamily="34" charset="0"/>
-                <a:ea typeface="Calibri" pitchFamily="34" charset="-122"/>
-                <a:cs typeface="Calibri" pitchFamily="34" charset="-120"/>
-              </a:rPr>
-              <a:t>Aplicatie de asistenta la evaluare  ·  casa + teren  ·  document pentru review</a:t>
+                  <a:srgbClr val="5A6270"/>
+                </a:solidFill>
+                <a:latin typeface="Segoe UI" pitchFamily="34" charset="0"/>
+                <a:ea typeface="Segoe UI" pitchFamily="34" charset="-122"/>
+                <a:cs typeface="Segoe UI" pitchFamily="34" charset="-120"/>
+              </a:rPr>
+              <a:t>Registru de evaluare ANEVAR  ·  aplicație locală offline  ·  document pentru review</a:t>
             </a:r>
             <a:endParaRPr lang="en-US" sz="900" dirty="0"/>
           </a:p>
@@ -2852,7 +2912,7 @@
       </p:sp>
       <p:sp>
         <p:nvSpPr>
-          <p:cNvPr id="26" name="Text 24"/>
+          <p:cNvPr id="27" name="Text 25"/>
           <p:cNvSpPr/>
           <p:nvPr/>
         </p:nvSpPr>
@@ -2877,11 +2937,11 @@
             <a:r>
               <a:rPr lang="en-US" sz="900" dirty="0">
                 <a:solidFill>
-                  <a:srgbClr val="5C6679"/>
-                </a:solidFill>
-                <a:latin typeface="Calibri" pitchFamily="34" charset="0"/>
-                <a:ea typeface="Calibri" pitchFamily="34" charset="-122"/>
-                <a:cs typeface="Calibri" pitchFamily="34" charset="-120"/>
+                  <a:srgbClr val="5A6270"/>
+                </a:solidFill>
+                <a:latin typeface="Segoe UI" pitchFamily="34" charset="0"/>
+                <a:ea typeface="Segoe UI" pitchFamily="34" charset="-122"/>
+                <a:cs typeface="Segoe UI" pitchFamily="34" charset="-120"/>
               </a:rPr>
               <a:t>10</a:t>
             </a:r>
@@ -2903,7 +2963,7 @@
     <p:bg>
       <p:bgPr>
         <a:solidFill>
-          <a:srgbClr val="F5F7FB"/>
+          <a:srgbClr val="F2EEE2"/>
         </a:solidFill>
       </p:bgPr>
     </p:bg>
@@ -2936,7 +2996,7 @@
             <a:avLst/>
           </a:prstGeom>
           <a:solidFill>
-            <a:srgbClr val="D9A227"/>
+            <a:srgbClr val="9D4A25"/>
           </a:solidFill>
           <a:ln/>
         </p:spPr>
@@ -2968,11 +3028,11 @@
             <a:r>
               <a:rPr lang="en-US" sz="1200" b="1" spc="300" kern="0" dirty="0">
                 <a:solidFill>
-                  <a:srgbClr val="D9A227"/>
-                </a:solidFill>
-                <a:latin typeface="Calibri" pitchFamily="34" charset="0"/>
-                <a:ea typeface="Calibri" pitchFamily="34" charset="-122"/>
-                <a:cs typeface="Calibri" pitchFamily="34" charset="-120"/>
+                  <a:srgbClr val="9D4A25"/>
+                </a:solidFill>
+                <a:latin typeface="Segoe UI" pitchFamily="34" charset="0"/>
+                <a:ea typeface="Segoe UI" pitchFamily="34" charset="-122"/>
+                <a:cs typeface="Segoe UI" pitchFamily="34" charset="-120"/>
               </a:rPr>
               <a:t>ONESTITATE</a:t>
             </a:r>
@@ -3007,13 +3067,13 @@
             <a:r>
               <a:rPr lang="en-US" sz="3000" b="1" dirty="0">
                 <a:solidFill>
-                  <a:srgbClr val="152A4E"/>
+                  <a:srgbClr val="16263D"/>
                 </a:solidFill>
                 <a:latin typeface="Georgia" pitchFamily="34" charset="0"/>
                 <a:ea typeface="Georgia" pitchFamily="34" charset="-122"/>
                 <a:cs typeface="Georgia" pitchFamily="34" charset="-120"/>
               </a:rPr>
-              <a:t>Ce mai e de facut</a:t>
+              <a:t>Ce mai e de făcut</a:t>
             </a:r>
             <a:endParaRPr lang="en-US" sz="3000" dirty="0"/>
           </a:p>
@@ -3022,6 +3082,26 @@
       <p:sp>
         <p:nvSpPr>
           <p:cNvPr id="5" name="Shape 3"/>
+          <p:cNvSpPr/>
+          <p:nvPr/>
+        </p:nvSpPr>
+        <p:spPr>
+          <a:xfrm>
+            <a:off x="777240" y="1335024"/>
+            <a:ext cx="10607040" cy="22860"/>
+          </a:xfrm>
+          <a:prstGeom prst="rect">
+            <a:avLst/>
+          </a:prstGeom>
+          <a:solidFill>
+            <a:srgbClr val="B08D57"/>
+          </a:solidFill>
+          <a:ln/>
+        </p:spPr>
+      </p:sp>
+      <p:sp>
+        <p:nvSpPr>
+          <p:cNvPr id="6" name="Shape 4"/>
           <p:cNvSpPr/>
           <p:nvPr/>
         </p:nvSpPr>
@@ -3034,18 +3114,18 @@
             <a:avLst/>
           </a:prstGeom>
           <a:solidFill>
-            <a:srgbClr val="FFFFFF"/>
+            <a:srgbClr val="FBF8F0"/>
           </a:solidFill>
           <a:ln w="12700">
             <a:solidFill>
-              <a:srgbClr val="DDE3EE"/>
+              <a:srgbClr val="D7CDB4"/>
             </a:solidFill>
             <a:prstDash val="solid"/>
           </a:ln>
           <a:effectLst>
             <a:outerShdw sx="100000" sy="100000" kx="0" ky="0" algn="bl" rotWithShape="0" blurRad="88900" dist="38100" dir="8100000">
-              <a:srgbClr val="000000">
-                <a:alpha val="13000"/>
+              <a:srgbClr val="16263D">
+                <a:alpha val="12000"/>
               </a:srgbClr>
             </a:outerShdw>
           </a:effectLst>
@@ -3053,7 +3133,7 @@
       </p:sp>
       <p:sp>
         <p:nvSpPr>
-          <p:cNvPr id="6" name="Shape 4"/>
+          <p:cNvPr id="7" name="Shape 5"/>
           <p:cNvSpPr/>
           <p:nvPr/>
         </p:nvSpPr>
@@ -3066,14 +3146,14 @@
             <a:avLst/>
           </a:prstGeom>
           <a:solidFill>
-            <a:srgbClr val="D9A227"/>
-          </a:solidFill>
-          <a:ln/>
-        </p:spPr>
-      </p:sp>
-      <p:sp>
-        <p:nvSpPr>
-          <p:cNvPr id="7" name="Text 5"/>
+            <a:srgbClr val="9D4A25"/>
+          </a:solidFill>
+          <a:ln/>
+        </p:spPr>
+      </p:sp>
+      <p:sp>
+        <p:nvSpPr>
+          <p:cNvPr id="8" name="Text 6"/>
           <p:cNvSpPr/>
           <p:nvPr/>
         </p:nvSpPr>
@@ -3096,23 +3176,23 @@
               <a:buNone/>
             </a:pPr>
             <a:r>
-              <a:rPr lang="en-US" sz="1500" dirty="0">
-                <a:solidFill>
-                  <a:srgbClr val="1A2233"/>
-                </a:solidFill>
-                <a:latin typeface="Calibri" pitchFamily="34" charset="0"/>
-                <a:ea typeface="Calibri" pitchFamily="34" charset="-122"/>
-                <a:cs typeface="Calibri" pitchFamily="34" charset="-120"/>
-              </a:rPr>
-              <a:t>Validarea grilei de casa si pe celelalte dosare reale (Maneciu, Brasov)</a:t>
-            </a:r>
-            <a:endParaRPr lang="en-US" sz="1500" dirty="0"/>
-          </a:p>
-        </p:txBody>
-      </p:sp>
-      <p:sp>
-        <p:nvSpPr>
-          <p:cNvPr id="8" name="Shape 6"/>
+              <a:rPr lang="en-US" sz="1400" dirty="0">
+                <a:solidFill>
+                  <a:srgbClr val="1F2D45"/>
+                </a:solidFill>
+                <a:latin typeface="Segoe UI" pitchFamily="34" charset="0"/>
+                <a:ea typeface="Segoe UI" pitchFamily="34" charset="-122"/>
+                <a:cs typeface="Segoe UI" pitchFamily="34" charset="-120"/>
+              </a:rPr>
+              <a:t>Surse de date oficiale: catalog IROVAL (costuri unitare), BIG, ANCPI — necesită acces/membru ANEVAR</a:t>
+            </a:r>
+            <a:endParaRPr lang="en-US" sz="1400" dirty="0"/>
+          </a:p>
+        </p:txBody>
+      </p:sp>
+      <p:sp>
+        <p:nvSpPr>
+          <p:cNvPr id="9" name="Shape 7"/>
           <p:cNvSpPr/>
           <p:nvPr/>
         </p:nvSpPr>
@@ -3125,18 +3205,18 @@
             <a:avLst/>
           </a:prstGeom>
           <a:solidFill>
-            <a:srgbClr val="FFFFFF"/>
+            <a:srgbClr val="FBF8F0"/>
           </a:solidFill>
           <a:ln w="12700">
             <a:solidFill>
-              <a:srgbClr val="DDE3EE"/>
+              <a:srgbClr val="D7CDB4"/>
             </a:solidFill>
             <a:prstDash val="solid"/>
           </a:ln>
           <a:effectLst>
             <a:outerShdw sx="100000" sy="100000" kx="0" ky="0" algn="bl" rotWithShape="0" blurRad="88900" dist="38100" dir="8100000">
-              <a:srgbClr val="000000">
-                <a:alpha val="13000"/>
+              <a:srgbClr val="16263D">
+                <a:alpha val="12000"/>
               </a:srgbClr>
             </a:outerShdw>
           </a:effectLst>
@@ -3144,7 +3224,7 @@
       </p:sp>
       <p:sp>
         <p:nvSpPr>
-          <p:cNvPr id="9" name="Shape 7"/>
+          <p:cNvPr id="10" name="Shape 8"/>
           <p:cNvSpPr/>
           <p:nvPr/>
         </p:nvSpPr>
@@ -3157,14 +3237,14 @@
             <a:avLst/>
           </a:prstGeom>
           <a:solidFill>
-            <a:srgbClr val="D9A227"/>
-          </a:solidFill>
-          <a:ln/>
-        </p:spPr>
-      </p:sp>
-      <p:sp>
-        <p:nvSpPr>
-          <p:cNvPr id="10" name="Text 8"/>
+            <a:srgbClr val="9D4A25"/>
+          </a:solidFill>
+          <a:ln/>
+        </p:spPr>
+      </p:sp>
+      <p:sp>
+        <p:nvSpPr>
+          <p:cNvPr id="11" name="Text 9"/>
           <p:cNvSpPr/>
           <p:nvPr/>
         </p:nvSpPr>
@@ -3187,23 +3267,23 @@
               <a:buNone/>
             </a:pPr>
             <a:r>
-              <a:rPr lang="en-US" sz="1500" dirty="0">
-                <a:solidFill>
-                  <a:srgbClr val="1A2233"/>
-                </a:solidFill>
-                <a:latin typeface="Calibri" pitchFamily="34" charset="0"/>
-                <a:ea typeface="Calibri" pitchFamily="34" charset="-122"/>
-                <a:cs typeface="Calibri" pitchFamily="34" charset="-120"/>
-              </a:rPr>
-              <a:t>Cursul valutar — momentan introdus manual (nu automat de la BNR)</a:t>
-            </a:r>
-            <a:endParaRPr lang="en-US" sz="1500" dirty="0"/>
-          </a:p>
-        </p:txBody>
-      </p:sp>
-      <p:sp>
-        <p:nvSpPr>
-          <p:cNvPr id="11" name="Shape 9"/>
+              <a:rPr lang="en-US" sz="1400" dirty="0">
+                <a:solidFill>
+                  <a:srgbClr val="1F2D45"/>
+                </a:solidFill>
+                <a:latin typeface="Segoe UI" pitchFamily="34" charset="0"/>
+                <a:ea typeface="Segoe UI" pitchFamily="34" charset="-122"/>
+                <a:cs typeface="Segoe UI" pitchFamily="34" charset="-120"/>
+              </a:rPr>
+              <a:t>Liste AML live (sancțiuni UE/ONU, PEP) — momentan injectabile, de reîmprospătat din surse oficiale</a:t>
+            </a:r>
+            <a:endParaRPr lang="en-US" sz="1400" dirty="0"/>
+          </a:p>
+        </p:txBody>
+      </p:sp>
+      <p:sp>
+        <p:nvSpPr>
+          <p:cNvPr id="12" name="Shape 10"/>
           <p:cNvSpPr/>
           <p:nvPr/>
         </p:nvSpPr>
@@ -3216,18 +3296,18 @@
             <a:avLst/>
           </a:prstGeom>
           <a:solidFill>
-            <a:srgbClr val="FFFFFF"/>
+            <a:srgbClr val="FBF8F0"/>
           </a:solidFill>
           <a:ln w="12700">
             <a:solidFill>
-              <a:srgbClr val="DDE3EE"/>
+              <a:srgbClr val="D7CDB4"/>
             </a:solidFill>
             <a:prstDash val="solid"/>
           </a:ln>
           <a:effectLst>
             <a:outerShdw sx="100000" sy="100000" kx="0" ky="0" algn="bl" rotWithShape="0" blurRad="88900" dist="38100" dir="8100000">
-              <a:srgbClr val="000000">
-                <a:alpha val="13000"/>
+              <a:srgbClr val="16263D">
+                <a:alpha val="12000"/>
               </a:srgbClr>
             </a:outerShdw>
           </a:effectLst>
@@ -3235,7 +3315,7 @@
       </p:sp>
       <p:sp>
         <p:nvSpPr>
-          <p:cNvPr id="12" name="Shape 10"/>
+          <p:cNvPr id="13" name="Shape 11"/>
           <p:cNvSpPr/>
           <p:nvPr/>
         </p:nvSpPr>
@@ -3248,14 +3328,14 @@
             <a:avLst/>
           </a:prstGeom>
           <a:solidFill>
-            <a:srgbClr val="D9A227"/>
-          </a:solidFill>
-          <a:ln/>
-        </p:spPr>
-      </p:sp>
-      <p:sp>
-        <p:nvSpPr>
-          <p:cNvPr id="13" name="Text 11"/>
+            <a:srgbClr val="9D4A25"/>
+          </a:solidFill>
+          <a:ln/>
+        </p:spPr>
+      </p:sp>
+      <p:sp>
+        <p:nvSpPr>
+          <p:cNvPr id="14" name="Text 12"/>
           <p:cNvSpPr/>
           <p:nvPr/>
         </p:nvSpPr>
@@ -3278,23 +3358,23 @@
               <a:buNone/>
             </a:pPr>
             <a:r>
-              <a:rPr lang="en-US" sz="1500" dirty="0">
-                <a:solidFill>
-                  <a:srgbClr val="1A2233"/>
-                </a:solidFill>
-                <a:latin typeface="Calibri" pitchFamily="34" charset="0"/>
-                <a:ea typeface="Calibri" pitchFamily="34" charset="-122"/>
-                <a:cs typeface="Calibri" pitchFamily="34" charset="-120"/>
-              </a:rPr>
-              <a:t>Anexa cu documente (extras CF, acte) — momentan marcaj 'de atasat'</a:t>
-            </a:r>
-            <a:endParaRPr lang="en-US" sz="1500" dirty="0"/>
-          </a:p>
-        </p:txBody>
-      </p:sp>
-      <p:sp>
-        <p:nvSpPr>
-          <p:cNvPr id="14" name="Shape 12"/>
+              <a:rPr lang="en-US" sz="1400" dirty="0">
+                <a:solidFill>
+                  <a:srgbClr val="1F2D45"/>
+                </a:solidFill>
+                <a:latin typeface="Segoe UI" pitchFamily="34" charset="0"/>
+                <a:ea typeface="Segoe UI" pitchFamily="34" charset="-122"/>
+                <a:cs typeface="Segoe UI" pitchFamily="34" charset="-120"/>
+              </a:rPr>
+              <a:t>Validarea juridică finală a textelor AML generate (de către un jurist)</a:t>
+            </a:r>
+            <a:endParaRPr lang="en-US" sz="1400" dirty="0"/>
+          </a:p>
+        </p:txBody>
+      </p:sp>
+      <p:sp>
+        <p:nvSpPr>
+          <p:cNvPr id="15" name="Shape 13"/>
           <p:cNvSpPr/>
           <p:nvPr/>
         </p:nvSpPr>
@@ -3307,18 +3387,18 @@
             <a:avLst/>
           </a:prstGeom>
           <a:solidFill>
-            <a:srgbClr val="FFFFFF"/>
+            <a:srgbClr val="FBF8F0"/>
           </a:solidFill>
           <a:ln w="12700">
             <a:solidFill>
-              <a:srgbClr val="DDE3EE"/>
+              <a:srgbClr val="D7CDB4"/>
             </a:solidFill>
             <a:prstDash val="solid"/>
           </a:ln>
           <a:effectLst>
             <a:outerShdw sx="100000" sy="100000" kx="0" ky="0" algn="bl" rotWithShape="0" blurRad="88900" dist="38100" dir="8100000">
-              <a:srgbClr val="000000">
-                <a:alpha val="13000"/>
+              <a:srgbClr val="16263D">
+                <a:alpha val="12000"/>
               </a:srgbClr>
             </a:outerShdw>
           </a:effectLst>
@@ -3326,7 +3406,7 @@
       </p:sp>
       <p:sp>
         <p:nvSpPr>
-          <p:cNvPr id="15" name="Shape 13"/>
+          <p:cNvPr id="16" name="Shape 14"/>
           <p:cNvSpPr/>
           <p:nvPr/>
         </p:nvSpPr>
@@ -3339,14 +3419,14 @@
             <a:avLst/>
           </a:prstGeom>
           <a:solidFill>
-            <a:srgbClr val="D9A227"/>
-          </a:solidFill>
-          <a:ln/>
-        </p:spPr>
-      </p:sp>
-      <p:sp>
-        <p:nvSpPr>
-          <p:cNvPr id="16" name="Text 14"/>
+            <a:srgbClr val="9D4A25"/>
+          </a:solidFill>
+          <a:ln/>
+        </p:spPr>
+      </p:sp>
+      <p:sp>
+        <p:nvSpPr>
+          <p:cNvPr id="17" name="Text 15"/>
           <p:cNvSpPr/>
           <p:nvPr/>
         </p:nvSpPr>
@@ -3369,23 +3449,23 @@
               <a:buNone/>
             </a:pPr>
             <a:r>
-              <a:rPr lang="en-US" sz="1500" dirty="0">
-                <a:solidFill>
-                  <a:srgbClr val="1A2233"/>
-                </a:solidFill>
-                <a:latin typeface="Calibri" pitchFamily="34" charset="0"/>
-                <a:ea typeface="Calibri" pitchFamily="34" charset="-122"/>
-                <a:cs typeface="Calibri" pitchFamily="34" charset="-120"/>
-              </a:rPr>
-              <a:t>Export PDF al raportului (acum Word, salvabil ca PDF manual)</a:t>
-            </a:r>
-            <a:endParaRPr lang="en-US" sz="1500" dirty="0"/>
-          </a:p>
-        </p:txBody>
-      </p:sp>
-      <p:sp>
-        <p:nvSpPr>
-          <p:cNvPr id="17" name="Shape 15"/>
+              <a:rPr lang="en-US" sz="1400" dirty="0">
+                <a:solidFill>
+                  <a:srgbClr val="1F2D45"/>
+                </a:solidFill>
+                <a:latin typeface="Segoe UI" pitchFamily="34" charset="0"/>
+                <a:ea typeface="Segoe UI" pitchFamily="34" charset="-122"/>
+                <a:cs typeface="Segoe UI" pitchFamily="34" charset="-120"/>
+              </a:rPr>
+              <a:t>Semnătură digitală a .exe (elimină avertismentul SmartScreen)</a:t>
+            </a:r>
+            <a:endParaRPr lang="en-US" sz="1400" dirty="0"/>
+          </a:p>
+        </p:txBody>
+      </p:sp>
+      <p:sp>
+        <p:nvSpPr>
+          <p:cNvPr id="18" name="Shape 16"/>
           <p:cNvSpPr/>
           <p:nvPr/>
         </p:nvSpPr>
@@ -3398,18 +3478,18 @@
             <a:avLst/>
           </a:prstGeom>
           <a:solidFill>
-            <a:srgbClr val="FFFFFF"/>
+            <a:srgbClr val="FBF8F0"/>
           </a:solidFill>
           <a:ln w="12700">
             <a:solidFill>
-              <a:srgbClr val="DDE3EE"/>
+              <a:srgbClr val="D7CDB4"/>
             </a:solidFill>
             <a:prstDash val="solid"/>
           </a:ln>
           <a:effectLst>
             <a:outerShdw sx="100000" sy="100000" kx="0" ky="0" algn="bl" rotWithShape="0" blurRad="88900" dist="38100" dir="8100000">
-              <a:srgbClr val="000000">
-                <a:alpha val="13000"/>
+              <a:srgbClr val="16263D">
+                <a:alpha val="12000"/>
               </a:srgbClr>
             </a:outerShdw>
           </a:effectLst>
@@ -3417,7 +3497,7 @@
       </p:sp>
       <p:sp>
         <p:nvSpPr>
-          <p:cNvPr id="18" name="Shape 16"/>
+          <p:cNvPr id="19" name="Shape 17"/>
           <p:cNvSpPr/>
           <p:nvPr/>
         </p:nvSpPr>
@@ -3430,14 +3510,14 @@
             <a:avLst/>
           </a:prstGeom>
           <a:solidFill>
-            <a:srgbClr val="D9A227"/>
-          </a:solidFill>
-          <a:ln/>
-        </p:spPr>
-      </p:sp>
-      <p:sp>
-        <p:nvSpPr>
-          <p:cNvPr id="19" name="Text 17"/>
+            <a:srgbClr val="9D4A25"/>
+          </a:solidFill>
+          <a:ln/>
+        </p:spPr>
+      </p:sp>
+      <p:sp>
+        <p:nvSpPr>
+          <p:cNvPr id="20" name="Text 18"/>
           <p:cNvSpPr/>
           <p:nvPr/>
         </p:nvSpPr>
@@ -3460,23 +3540,23 @@
               <a:buNone/>
             </a:pPr>
             <a:r>
-              <a:rPr lang="en-US" sz="1500" dirty="0">
-                <a:solidFill>
-                  <a:srgbClr val="1A2233"/>
-                </a:solidFill>
-                <a:latin typeface="Calibri" pitchFamily="34" charset="0"/>
-                <a:ea typeface="Calibri" pitchFamily="34" charset="-122"/>
-                <a:cs typeface="Calibri" pitchFamily="34" charset="-120"/>
-              </a:rPr>
-              <a:t>Mai multa testare pe cazuri reale variate</a:t>
-            </a:r>
-            <a:endParaRPr lang="en-US" sz="1500" dirty="0"/>
-          </a:p>
-        </p:txBody>
-      </p:sp>
-      <p:sp>
-        <p:nvSpPr>
-          <p:cNvPr id="20" name="Text 18"/>
+              <a:rPr lang="en-US" sz="1400" dirty="0">
+                <a:solidFill>
+                  <a:srgbClr val="1F2D45"/>
+                </a:solidFill>
+                <a:latin typeface="Segoe UI" pitchFamily="34" charset="0"/>
+                <a:ea typeface="Segoe UI" pitchFamily="34" charset="-122"/>
+                <a:cs typeface="Segoe UI" pitchFamily="34" charset="-120"/>
+              </a:rPr>
+              <a:t>Mai multă testare cu cititor de ecran (NVDA) și pe cazuri reale variate</a:t>
+            </a:r>
+            <a:endParaRPr lang="en-US" sz="1400" dirty="0"/>
+          </a:p>
+        </p:txBody>
+      </p:sp>
+      <p:sp>
+        <p:nvSpPr>
+          <p:cNvPr id="21" name="Text 19"/>
           <p:cNvSpPr/>
           <p:nvPr/>
         </p:nvSpPr>
@@ -3501,13 +3581,13 @@
             <a:r>
               <a:rPr lang="en-US" sz="900" dirty="0">
                 <a:solidFill>
-                  <a:srgbClr val="5C6679"/>
-                </a:solidFill>
-                <a:latin typeface="Calibri" pitchFamily="34" charset="0"/>
-                <a:ea typeface="Calibri" pitchFamily="34" charset="-122"/>
-                <a:cs typeface="Calibri" pitchFamily="34" charset="-120"/>
-              </a:rPr>
-              <a:t>Aplicatie de asistenta la evaluare  ·  casa + teren  ·  document pentru review</a:t>
+                  <a:srgbClr val="5A6270"/>
+                </a:solidFill>
+                <a:latin typeface="Segoe UI" pitchFamily="34" charset="0"/>
+                <a:ea typeface="Segoe UI" pitchFamily="34" charset="-122"/>
+                <a:cs typeface="Segoe UI" pitchFamily="34" charset="-120"/>
+              </a:rPr>
+              <a:t>Registru de evaluare ANEVAR  ·  aplicație locală offline  ·  document pentru review</a:t>
             </a:r>
             <a:endParaRPr lang="en-US" sz="900" dirty="0"/>
           </a:p>
@@ -3515,7 +3595,7 @@
       </p:sp>
       <p:sp>
         <p:nvSpPr>
-          <p:cNvPr id="21" name="Text 19"/>
+          <p:cNvPr id="22" name="Text 20"/>
           <p:cNvSpPr/>
           <p:nvPr/>
         </p:nvSpPr>
@@ -3540,11 +3620,11 @@
             <a:r>
               <a:rPr lang="en-US" sz="900" dirty="0">
                 <a:solidFill>
-                  <a:srgbClr val="5C6679"/>
-                </a:solidFill>
-                <a:latin typeface="Calibri" pitchFamily="34" charset="0"/>
-                <a:ea typeface="Calibri" pitchFamily="34" charset="-122"/>
-                <a:cs typeface="Calibri" pitchFamily="34" charset="-120"/>
+                  <a:srgbClr val="5A6270"/>
+                </a:solidFill>
+                <a:latin typeface="Segoe UI" pitchFamily="34" charset="0"/>
+                <a:ea typeface="Segoe UI" pitchFamily="34" charset="-122"/>
+                <a:cs typeface="Segoe UI" pitchFamily="34" charset="-120"/>
               </a:rPr>
               <a:t>11</a:t>
             </a:r>
@@ -3566,7 +3646,7 @@
     <p:bg>
       <p:bgPr>
         <a:solidFill>
-          <a:srgbClr val="152A4E"/>
+          <a:srgbClr val="16263D"/>
         </a:solidFill>
       </p:bgPr>
     </p:bg>
@@ -3593,13 +3673,13 @@
         <p:spPr>
           <a:xfrm>
             <a:off x="0" y="0"/>
-            <a:ext cx="12191695" cy="201168"/>
-          </a:xfrm>
-          <a:prstGeom prst="rect">
-            <a:avLst/>
-          </a:prstGeom>
-          <a:solidFill>
-            <a:srgbClr val="D9A227"/>
+            <a:ext cx="4063898" cy="201168"/>
+          </a:xfrm>
+          <a:prstGeom prst="rect">
+            <a:avLst/>
+          </a:prstGeom>
+          <a:solidFill>
+            <a:srgbClr val="27408B"/>
           </a:solidFill>
           <a:ln/>
         </p:spPr>
@@ -3607,6 +3687,46 @@
       <p:sp>
         <p:nvSpPr>
           <p:cNvPr id="3" name="Shape 1"/>
+          <p:cNvSpPr/>
+          <p:nvPr/>
+        </p:nvSpPr>
+        <p:spPr>
+          <a:xfrm>
+            <a:off x="4063898" y="0"/>
+            <a:ext cx="4063898" cy="201168"/>
+          </a:xfrm>
+          <a:prstGeom prst="rect">
+            <a:avLst/>
+          </a:prstGeom>
+          <a:solidFill>
+            <a:srgbClr val="D7A92B"/>
+          </a:solidFill>
+          <a:ln/>
+        </p:spPr>
+      </p:sp>
+      <p:sp>
+        <p:nvSpPr>
+          <p:cNvPr id="4" name="Shape 2"/>
+          <p:cNvSpPr/>
+          <p:nvPr/>
+        </p:nvSpPr>
+        <p:spPr>
+          <a:xfrm>
+            <a:off x="8127797" y="0"/>
+            <a:ext cx="4063898" cy="201168"/>
+          </a:xfrm>
+          <a:prstGeom prst="rect">
+            <a:avLst/>
+          </a:prstGeom>
+          <a:solidFill>
+            <a:srgbClr val="A5301F"/>
+          </a:solidFill>
+          <a:ln/>
+        </p:spPr>
+      </p:sp>
+      <p:sp>
+        <p:nvSpPr>
+          <p:cNvPr id="5" name="Shape 3"/>
           <p:cNvSpPr/>
           <p:nvPr/>
         </p:nvSpPr>
@@ -3619,14 +3739,14 @@
             <a:avLst/>
           </a:prstGeom>
           <a:solidFill>
-            <a:srgbClr val="D9A227"/>
-          </a:solidFill>
-          <a:ln/>
-        </p:spPr>
-      </p:sp>
-      <p:sp>
-        <p:nvSpPr>
-          <p:cNvPr id="4" name="Text 2"/>
+            <a:srgbClr val="D9C08A"/>
+          </a:solidFill>
+          <a:ln/>
+        </p:spPr>
+      </p:sp>
+      <p:sp>
+        <p:nvSpPr>
+          <p:cNvPr id="6" name="Text 4"/>
           <p:cNvSpPr/>
           <p:nvPr/>
         </p:nvSpPr>
@@ -3651,11 +3771,11 @@
             <a:r>
               <a:rPr lang="en-US" sz="1200" b="1" spc="300" kern="0" dirty="0">
                 <a:solidFill>
-                  <a:srgbClr val="D9A227"/>
-                </a:solidFill>
-                <a:latin typeface="Calibri" pitchFamily="34" charset="0"/>
-                <a:ea typeface="Calibri" pitchFamily="34" charset="-122"/>
-                <a:cs typeface="Calibri" pitchFamily="34" charset="-120"/>
+                  <a:srgbClr val="D9C08A"/>
+                </a:solidFill>
+                <a:latin typeface="Segoe UI" pitchFamily="34" charset="0"/>
+                <a:ea typeface="Segoe UI" pitchFamily="34" charset="-122"/>
+                <a:cs typeface="Segoe UI" pitchFamily="34" charset="-120"/>
               </a:rPr>
               <a:t>CE FEEDBACK CAUT</a:t>
             </a:r>
@@ -3665,7 +3785,7 @@
       </p:sp>
       <p:sp>
         <p:nvSpPr>
-          <p:cNvPr id="5" name="Text 3"/>
+          <p:cNvPr id="7" name="Text 5"/>
           <p:cNvSpPr/>
           <p:nvPr/>
         </p:nvSpPr>
@@ -3696,7 +3816,7 @@
                 <a:ea typeface="Georgia" pitchFamily="34" charset="-122"/>
                 <a:cs typeface="Georgia" pitchFamily="34" charset="-120"/>
               </a:rPr>
-              <a:t>Intrebari pentru tine</a:t>
+              <a:t>Întrebări pentru tine</a:t>
             </a:r>
             <a:endParaRPr lang="en-US" sz="3000" dirty="0"/>
           </a:p>
@@ -3704,7 +3824,7 @@
       </p:sp>
       <p:sp>
         <p:nvSpPr>
-          <p:cNvPr id="6" name="Text 4"/>
+          <p:cNvPr id="8" name="Text 6"/>
           <p:cNvSpPr/>
           <p:nvPr/>
         </p:nvSpPr>
@@ -3732,13 +3852,13 @@
             <a:r>
               <a:rPr lang="en-US" sz="1600" dirty="0">
                 <a:solidFill>
-                  <a:srgbClr val="CFE0F5"/>
-                </a:solidFill>
-                <a:latin typeface="Calibri" pitchFamily="34" charset="0"/>
-                <a:ea typeface="Calibri" pitchFamily="34" charset="-122"/>
-                <a:cs typeface="Calibri" pitchFamily="34" charset="-120"/>
-              </a:rPr>
-              <a:t>1.   Metodologia terenului (doua etape, selectie pe ajustare bruta minima, fara oferta) — corecta?</a:t>
+                  <a:srgbClr val="E9E0CC"/>
+                </a:solidFill>
+                <a:latin typeface="Segoe UI" pitchFamily="34" charset="0"/>
+                <a:ea typeface="Segoe UI" pitchFamily="34" charset="-122"/>
+                <a:cs typeface="Segoe UI" pitchFamily="34" charset="-120"/>
+              </a:rPr>
+              <a:t>1.   Metodologia terenului (două etape, selecție pe ajustare brută minimă, fără ofertă) — corectă?</a:t>
             </a:r>
             <a:endParaRPr lang="en-US" sz="1600" dirty="0"/>
           </a:p>
@@ -3752,13 +3872,13 @@
             <a:r>
               <a:rPr lang="en-US" sz="1600" dirty="0">
                 <a:solidFill>
-                  <a:srgbClr val="CFE0F5"/>
-                </a:solidFill>
-                <a:latin typeface="Calibri" pitchFamily="34" charset="0"/>
-                <a:ea typeface="Calibri" pitchFamily="34" charset="-122"/>
-                <a:cs typeface="Calibri" pitchFamily="34" charset="-120"/>
-              </a:rPr>
-              <a:t>2.   Metodologia casei (pret total, arie utila ca ajustare valorica) si regula de selectie — corecte?</a:t>
+                  <a:srgbClr val="E9E0CC"/>
+                </a:solidFill>
+                <a:latin typeface="Segoe UI" pitchFamily="34" charset="0"/>
+                <a:ea typeface="Segoe UI" pitchFamily="34" charset="-122"/>
+                <a:cs typeface="Segoe UI" pitchFamily="34" charset="-120"/>
+              </a:rPr>
+              <a:t>2.   Metodologia casei (preț total, arie utilă ca ajustare valorică) și regula de selecție — corecte?</a:t>
             </a:r>
             <a:endParaRPr lang="en-US" sz="1600" dirty="0"/>
           </a:p>
@@ -3772,13 +3892,13 @@
             <a:r>
               <a:rPr lang="en-US" sz="1600" dirty="0">
                 <a:solidFill>
-                  <a:srgbClr val="CFE0F5"/>
-                </a:solidFill>
-                <a:latin typeface="Calibri" pitchFamily="34" charset="0"/>
-                <a:ea typeface="Calibri" pitchFamily="34" charset="-122"/>
-                <a:cs typeface="Calibri" pitchFamily="34" charset="-120"/>
-              </a:rPr>
-              <a:t>3.   Reconcilierea si alocarea (constructii = proprietate - teren) — in regula pentru garantare?</a:t>
+                  <a:srgbClr val="E9E0CC"/>
+                </a:solidFill>
+                <a:latin typeface="Segoe UI" pitchFamily="34" charset="0"/>
+                <a:ea typeface="Segoe UI" pitchFamily="34" charset="-122"/>
+                <a:cs typeface="Segoe UI" pitchFamily="34" charset="-120"/>
+              </a:rPr>
+              <a:t>3.   Abordarea prin venit (capitalizare directă + DCF) și grila de chirii — în regulă?</a:t>
             </a:r>
             <a:endParaRPr lang="en-US" sz="1600" dirty="0"/>
           </a:p>
@@ -3792,13 +3912,13 @@
             <a:r>
               <a:rPr lang="en-US" sz="1600" dirty="0">
                 <a:solidFill>
-                  <a:srgbClr val="CFE0F5"/>
-                </a:solidFill>
-                <a:latin typeface="Calibri" pitchFamily="34" charset="0"/>
-                <a:ea typeface="Calibri" pitchFamily="34" charset="-122"/>
-                <a:cs typeface="Calibri" pitchFamily="34" charset="-120"/>
-              </a:rPr>
-              <a:t>4.   Raportul (declaratii, termeni, GEV 520, anexe) — complet si acceptabil pentru banci?</a:t>
+                  <a:srgbClr val="E9E0CC"/>
+                </a:solidFill>
+                <a:latin typeface="Segoe UI" pitchFamily="34" charset="0"/>
+                <a:ea typeface="Segoe UI" pitchFamily="34" charset="-122"/>
+                <a:cs typeface="Segoe UI" pitchFamily="34" charset="-120"/>
+              </a:rPr>
+              <a:t>4.   Reconcilierea și alocarea (construcții = proprietate − teren) — în regulă pentru garantare?</a:t>
             </a:r>
             <a:endParaRPr lang="en-US" sz="1600" dirty="0"/>
           </a:p>
@@ -3812,13 +3932,13 @@
             <a:r>
               <a:rPr lang="en-US" sz="1600" dirty="0">
                 <a:solidFill>
-                  <a:srgbClr val="CFE0F5"/>
-                </a:solidFill>
-                <a:latin typeface="Calibri" pitchFamily="34" charset="0"/>
-                <a:ea typeface="Calibri" pitchFamily="34" charset="-122"/>
-                <a:cs typeface="Calibri" pitchFamily="34" charset="-120"/>
-              </a:rPr>
-              <a:t>5.   Validarile automate (minim comparabile, outlier, limita ajustare) — praguri potrivite?</a:t>
+                  <a:srgbClr val="E9E0CC"/>
+                </a:solidFill>
+                <a:latin typeface="Segoe UI" pitchFamily="34" charset="0"/>
+                <a:ea typeface="Segoe UI" pitchFamily="34" charset="-122"/>
+                <a:cs typeface="Segoe UI" pitchFamily="34" charset="-120"/>
+              </a:rPr>
+              <a:t>5.   Raportul (declarații, termeni, GEV 520, anexe) — complet și acceptabil pentru bănci?</a:t>
             </a:r>
             <a:endParaRPr lang="en-US" sz="1600" dirty="0"/>
           </a:p>
@@ -3832,13 +3952,13 @@
             <a:r>
               <a:rPr lang="en-US" sz="1600" dirty="0">
                 <a:solidFill>
-                  <a:srgbClr val="CFE0F5"/>
-                </a:solidFill>
-                <a:latin typeface="Calibri" pitchFamily="34" charset="0"/>
-                <a:ea typeface="Calibri" pitchFamily="34" charset="-122"/>
-                <a:cs typeface="Calibri" pitchFamily="34" charset="-120"/>
-              </a:rPr>
-              <a:t>6.   Orice ar face raportul respins sau ar trebui adaugat.</a:t>
+                  <a:srgbClr val="E9E0CC"/>
+                </a:solidFill>
+                <a:latin typeface="Segoe UI" pitchFamily="34" charset="0"/>
+                <a:ea typeface="Segoe UI" pitchFamily="34" charset="-122"/>
+                <a:cs typeface="Segoe UI" pitchFamily="34" charset="-120"/>
+              </a:rPr>
+              <a:t>6.   Orice ar face raportul respins sau ar trebui adăugat.</a:t>
             </a:r>
             <a:endParaRPr lang="en-US" sz="1600" dirty="0"/>
           </a:p>
@@ -3846,7 +3966,7 @@
       </p:sp>
       <p:sp>
         <p:nvSpPr>
-          <p:cNvPr id="7" name="Text 5"/>
+          <p:cNvPr id="9" name="Text 7"/>
           <p:cNvSpPr/>
           <p:nvPr/>
         </p:nvSpPr>
@@ -3871,13 +3991,13 @@
             <a:r>
               <a:rPr lang="en-US" sz="1500" b="1" i="1" dirty="0">
                 <a:solidFill>
-                  <a:srgbClr val="D9A227"/>
+                  <a:srgbClr val="D9C08A"/>
                 </a:solidFill>
                 <a:latin typeface="Georgia" pitchFamily="34" charset="0"/>
                 <a:ea typeface="Georgia" pitchFamily="34" charset="-122"/>
                 <a:cs typeface="Georgia" pitchFamily="34" charset="-120"/>
               </a:rPr>
-              <a:t>Orice observatie, chiar si 'asa nu se face', e exact ce caut. Multumesc pentru timp.</a:t>
+              <a:t>Orice observație, chiar și „așa nu se face”, e exact ce caut. Mulțumesc pentru timp.</a:t>
             </a:r>
             <a:endParaRPr lang="en-US" sz="1500" dirty="0"/>
           </a:p>
@@ -3897,7 +4017,7 @@
     <p:bg>
       <p:bgPr>
         <a:solidFill>
-          <a:srgbClr val="F5F7FB"/>
+          <a:srgbClr val="F2EEE2"/>
         </a:solidFill>
       </p:bgPr>
     </p:bg>
@@ -3930,7 +4050,7 @@
             <a:avLst/>
           </a:prstGeom>
           <a:solidFill>
-            <a:srgbClr val="D9A227"/>
+            <a:srgbClr val="9D4A25"/>
           </a:solidFill>
           <a:ln/>
         </p:spPr>
@@ -3962,11 +4082,11 @@
             <a:r>
               <a:rPr lang="en-US" sz="1200" b="1" spc="300" kern="0" dirty="0">
                 <a:solidFill>
-                  <a:srgbClr val="D9A227"/>
-                </a:solidFill>
-                <a:latin typeface="Calibri" pitchFamily="34" charset="0"/>
-                <a:ea typeface="Calibri" pitchFamily="34" charset="-122"/>
-                <a:cs typeface="Calibri" pitchFamily="34" charset="-120"/>
+                  <a:srgbClr val="9D4A25"/>
+                </a:solidFill>
+                <a:latin typeface="Segoe UI" pitchFamily="34" charset="0"/>
+                <a:ea typeface="Segoe UI" pitchFamily="34" charset="-122"/>
+                <a:cs typeface="Segoe UI" pitchFamily="34" charset="-120"/>
               </a:rPr>
               <a:t>PE SCURT</a:t>
             </a:r>
@@ -4001,13 +4121,13 @@
             <a:r>
               <a:rPr lang="en-US" sz="3000" b="1" dirty="0">
                 <a:solidFill>
-                  <a:srgbClr val="152A4E"/>
+                  <a:srgbClr val="16263D"/>
                 </a:solidFill>
                 <a:latin typeface="Georgia" pitchFamily="34" charset="0"/>
                 <a:ea typeface="Georgia" pitchFamily="34" charset="-122"/>
                 <a:cs typeface="Georgia" pitchFamily="34" charset="-120"/>
               </a:rPr>
-              <a:t>Ce este aplicatia</a:t>
+              <a:t>Ce este aplicația</a:t>
             </a:r>
             <a:endParaRPr lang="en-US" sz="3000" dirty="0"/>
           </a:p>
@@ -4016,6 +4136,26 @@
       <p:sp>
         <p:nvSpPr>
           <p:cNvPr id="5" name="Shape 3"/>
+          <p:cNvSpPr/>
+          <p:nvPr/>
+        </p:nvSpPr>
+        <p:spPr>
+          <a:xfrm>
+            <a:off x="777240" y="1335024"/>
+            <a:ext cx="10607040" cy="22860"/>
+          </a:xfrm>
+          <a:prstGeom prst="rect">
+            <a:avLst/>
+          </a:prstGeom>
+          <a:solidFill>
+            <a:srgbClr val="B08D57"/>
+          </a:solidFill>
+          <a:ln/>
+        </p:spPr>
+      </p:sp>
+      <p:sp>
+        <p:nvSpPr>
+          <p:cNvPr id="6" name="Shape 4"/>
           <p:cNvSpPr/>
           <p:nvPr/>
         </p:nvSpPr>
@@ -4028,18 +4168,18 @@
             <a:avLst/>
           </a:prstGeom>
           <a:solidFill>
-            <a:srgbClr val="FFFFFF"/>
+            <a:srgbClr val="FBF8F0"/>
           </a:solidFill>
           <a:ln w="12700">
             <a:solidFill>
-              <a:srgbClr val="DDE3EE"/>
+              <a:srgbClr val="D7CDB4"/>
             </a:solidFill>
             <a:prstDash val="solid"/>
           </a:ln>
           <a:effectLst>
             <a:outerShdw sx="100000" sy="100000" kx="0" ky="0" algn="bl" rotWithShape="0" blurRad="88900" dist="38100" dir="8100000">
-              <a:srgbClr val="000000">
-                <a:alpha val="13000"/>
+              <a:srgbClr val="16263D">
+                <a:alpha val="12000"/>
               </a:srgbClr>
             </a:outerShdw>
           </a:effectLst>
@@ -4047,7 +4187,7 @@
       </p:sp>
       <p:sp>
         <p:nvSpPr>
-          <p:cNvPr id="6" name="Shape 4"/>
+          <p:cNvPr id="7" name="Shape 5"/>
           <p:cNvSpPr/>
           <p:nvPr/>
         </p:nvSpPr>
@@ -4060,14 +4200,14 @@
             <a:avLst/>
           </a:prstGeom>
           <a:solidFill>
-            <a:srgbClr val="152A4E"/>
-          </a:solidFill>
-          <a:ln/>
-        </p:spPr>
-      </p:sp>
-      <p:sp>
-        <p:nvSpPr>
-          <p:cNvPr id="7" name="Text 5"/>
+            <a:srgbClr val="9D4A25"/>
+          </a:solidFill>
+          <a:ln/>
+        </p:spPr>
+      </p:sp>
+      <p:sp>
+        <p:nvSpPr>
+          <p:cNvPr id="8" name="Text 6"/>
           <p:cNvSpPr/>
           <p:nvPr/>
         </p:nvSpPr>
@@ -4106,7 +4246,7 @@
       </p:sp>
       <p:sp>
         <p:nvSpPr>
-          <p:cNvPr id="8" name="Text 6"/>
+          <p:cNvPr id="9" name="Text 7"/>
           <p:cNvSpPr/>
           <p:nvPr/>
         </p:nvSpPr>
@@ -4131,13 +4271,13 @@
             <a:r>
               <a:rPr lang="en-US" sz="1800" b="1" dirty="0">
                 <a:solidFill>
-                  <a:srgbClr val="152A4E"/>
+                  <a:srgbClr val="16263D"/>
                 </a:solidFill>
                 <a:latin typeface="Georgia" pitchFamily="34" charset="0"/>
                 <a:ea typeface="Georgia" pitchFamily="34" charset="-122"/>
                 <a:cs typeface="Georgia" pitchFamily="34" charset="-120"/>
               </a:rPr>
-              <a:t>Asista evaluatorul, nu il inlocuieste</a:t>
+              <a:t>Asistă evaluatorul, nu îl înlocuiește</a:t>
             </a:r>
             <a:endParaRPr lang="en-US" sz="1800" dirty="0"/>
           </a:p>
@@ -4145,7 +4285,7 @@
       </p:sp>
       <p:sp>
         <p:nvSpPr>
-          <p:cNvPr id="9" name="Text 7"/>
+          <p:cNvPr id="10" name="Text 8"/>
           <p:cNvSpPr/>
           <p:nvPr/>
         </p:nvSpPr>
@@ -4170,13 +4310,13 @@
             <a:r>
               <a:rPr lang="en-US" sz="1400" dirty="0">
                 <a:solidFill>
-                  <a:srgbClr val="1A2233"/>
-                </a:solidFill>
-                <a:latin typeface="Calibri" pitchFamily="34" charset="0"/>
-                <a:ea typeface="Calibri" pitchFamily="34" charset="-122"/>
-                <a:cs typeface="Calibri" pitchFamily="34" charset="-120"/>
-              </a:rPr>
-              <a:t>Automatizeaza partea repetitiva — calcule, cautare de comparabile, redactarea raportului. Evaluatorul decide si verifica.</a:t>
+                  <a:srgbClr val="1F2D45"/>
+                </a:solidFill>
+                <a:latin typeface="Segoe UI" pitchFamily="34" charset="0"/>
+                <a:ea typeface="Segoe UI" pitchFamily="34" charset="-122"/>
+                <a:cs typeface="Segoe UI" pitchFamily="34" charset="-120"/>
+              </a:rPr>
+              <a:t>Automatizează partea repetitivă — calcule, căutare de comparabile, redactarea raportului. Evaluatorul decide și verifică (om în buclă).</a:t>
             </a:r>
             <a:endParaRPr lang="en-US" sz="1400" dirty="0"/>
           </a:p>
@@ -4184,7 +4324,7 @@
       </p:sp>
       <p:sp>
         <p:nvSpPr>
-          <p:cNvPr id="10" name="Shape 8"/>
+          <p:cNvPr id="11" name="Shape 9"/>
           <p:cNvSpPr/>
           <p:nvPr/>
         </p:nvSpPr>
@@ -4197,18 +4337,18 @@
             <a:avLst/>
           </a:prstGeom>
           <a:solidFill>
-            <a:srgbClr val="FFFFFF"/>
+            <a:srgbClr val="FBF8F0"/>
           </a:solidFill>
           <a:ln w="12700">
             <a:solidFill>
-              <a:srgbClr val="DDE3EE"/>
+              <a:srgbClr val="D7CDB4"/>
             </a:solidFill>
             <a:prstDash val="solid"/>
           </a:ln>
           <a:effectLst>
             <a:outerShdw sx="100000" sy="100000" kx="0" ky="0" algn="bl" rotWithShape="0" blurRad="88900" dist="38100" dir="8100000">
-              <a:srgbClr val="000000">
-                <a:alpha val="13000"/>
+              <a:srgbClr val="16263D">
+                <a:alpha val="12000"/>
               </a:srgbClr>
             </a:outerShdw>
           </a:effectLst>
@@ -4216,7 +4356,7 @@
       </p:sp>
       <p:sp>
         <p:nvSpPr>
-          <p:cNvPr id="11" name="Shape 9"/>
+          <p:cNvPr id="12" name="Shape 10"/>
           <p:cNvSpPr/>
           <p:nvPr/>
         </p:nvSpPr>
@@ -4229,14 +4369,14 @@
             <a:avLst/>
           </a:prstGeom>
           <a:solidFill>
-            <a:srgbClr val="152A4E"/>
-          </a:solidFill>
-          <a:ln/>
-        </p:spPr>
-      </p:sp>
-      <p:sp>
-        <p:nvSpPr>
-          <p:cNvPr id="12" name="Text 10"/>
+            <a:srgbClr val="9D4A25"/>
+          </a:solidFill>
+          <a:ln/>
+        </p:spPr>
+      </p:sp>
+      <p:sp>
+        <p:nvSpPr>
+          <p:cNvPr id="13" name="Text 11"/>
           <p:cNvSpPr/>
           <p:nvPr/>
         </p:nvSpPr>
@@ -4275,7 +4415,7 @@
       </p:sp>
       <p:sp>
         <p:nvSpPr>
-          <p:cNvPr id="13" name="Text 11"/>
+          <p:cNvPr id="14" name="Text 12"/>
           <p:cNvSpPr/>
           <p:nvPr/>
         </p:nvSpPr>
@@ -4300,13 +4440,13 @@
             <a:r>
               <a:rPr lang="en-US" sz="1800" b="1" dirty="0">
                 <a:solidFill>
-                  <a:srgbClr val="152A4E"/>
+                  <a:srgbClr val="16263D"/>
                 </a:solidFill>
                 <a:latin typeface="Georgia" pitchFamily="34" charset="0"/>
                 <a:ea typeface="Georgia" pitchFamily="34" charset="-122"/>
                 <a:cs typeface="Georgia" pitchFamily="34" charset="-120"/>
               </a:rPr>
-              <a:t>Ruleaza local, ca un singur fisier .exe</a:t>
+              <a:t>Rulează local, ca un singur fișier .exe</a:t>
             </a:r>
             <a:endParaRPr lang="en-US" sz="1800" dirty="0"/>
           </a:p>
@@ -4314,7 +4454,7 @@
       </p:sp>
       <p:sp>
         <p:nvSpPr>
-          <p:cNvPr id="14" name="Text 12"/>
+          <p:cNvPr id="15" name="Text 13"/>
           <p:cNvSpPr/>
           <p:nvPr/>
         </p:nvSpPr>
@@ -4339,13 +4479,13 @@
             <a:r>
               <a:rPr lang="en-US" sz="1400" dirty="0">
                 <a:solidFill>
-                  <a:srgbClr val="1A2233"/>
-                </a:solidFill>
-                <a:latin typeface="Calibri" pitchFamily="34" charset="0"/>
-                <a:ea typeface="Calibri" pitchFamily="34" charset="-122"/>
-                <a:cs typeface="Calibri" pitchFamily="34" charset="-120"/>
-              </a:rPr>
-              <a:t>Se deschide o pagina in browser, pe calculatorul propriu. Fara instalari complicate, fara server extern.</a:t>
+                  <a:srgbClr val="1F2D45"/>
+                </a:solidFill>
+                <a:latin typeface="Segoe UI" pitchFamily="34" charset="0"/>
+                <a:ea typeface="Segoe UI" pitchFamily="34" charset="-122"/>
+                <a:cs typeface="Segoe UI" pitchFamily="34" charset="-120"/>
+              </a:rPr>
+              <a:t>Se deschide o pagină în browser, pe calculatorul propriu. Fără instalări, fără server extern — funcționează offline.</a:t>
             </a:r>
             <a:endParaRPr lang="en-US" sz="1400" dirty="0"/>
           </a:p>
@@ -4353,7 +4493,7 @@
       </p:sp>
       <p:sp>
         <p:nvSpPr>
-          <p:cNvPr id="15" name="Shape 13"/>
+          <p:cNvPr id="16" name="Shape 14"/>
           <p:cNvSpPr/>
           <p:nvPr/>
         </p:nvSpPr>
@@ -4366,18 +4506,18 @@
             <a:avLst/>
           </a:prstGeom>
           <a:solidFill>
-            <a:srgbClr val="FFFFFF"/>
+            <a:srgbClr val="FBF8F0"/>
           </a:solidFill>
           <a:ln w="12700">
             <a:solidFill>
-              <a:srgbClr val="DDE3EE"/>
+              <a:srgbClr val="D7CDB4"/>
             </a:solidFill>
             <a:prstDash val="solid"/>
           </a:ln>
           <a:effectLst>
             <a:outerShdw sx="100000" sy="100000" kx="0" ky="0" algn="bl" rotWithShape="0" blurRad="88900" dist="38100" dir="8100000">
-              <a:srgbClr val="000000">
-                <a:alpha val="13000"/>
+              <a:srgbClr val="16263D">
+                <a:alpha val="12000"/>
               </a:srgbClr>
             </a:outerShdw>
           </a:effectLst>
@@ -4385,7 +4525,7 @@
       </p:sp>
       <p:sp>
         <p:nvSpPr>
-          <p:cNvPr id="16" name="Shape 14"/>
+          <p:cNvPr id="17" name="Shape 15"/>
           <p:cNvSpPr/>
           <p:nvPr/>
         </p:nvSpPr>
@@ -4398,14 +4538,14 @@
             <a:avLst/>
           </a:prstGeom>
           <a:solidFill>
-            <a:srgbClr val="152A4E"/>
-          </a:solidFill>
-          <a:ln/>
-        </p:spPr>
-      </p:sp>
-      <p:sp>
-        <p:nvSpPr>
-          <p:cNvPr id="17" name="Text 15"/>
+            <a:srgbClr val="9D4A25"/>
+          </a:solidFill>
+          <a:ln/>
+        </p:spPr>
+      </p:sp>
+      <p:sp>
+        <p:nvSpPr>
+          <p:cNvPr id="18" name="Text 16"/>
           <p:cNvSpPr/>
           <p:nvPr/>
         </p:nvSpPr>
@@ -4444,7 +4584,7 @@
       </p:sp>
       <p:sp>
         <p:nvSpPr>
-          <p:cNvPr id="18" name="Text 16"/>
+          <p:cNvPr id="19" name="Text 17"/>
           <p:cNvSpPr/>
           <p:nvPr/>
         </p:nvSpPr>
@@ -4469,13 +4609,13 @@
             <a:r>
               <a:rPr lang="en-US" sz="1800" b="1" dirty="0">
                 <a:solidFill>
-                  <a:srgbClr val="152A4E"/>
+                  <a:srgbClr val="16263D"/>
                 </a:solidFill>
                 <a:latin typeface="Georgia" pitchFamily="34" charset="0"/>
                 <a:ea typeface="Georgia" pitchFamily="34" charset="-122"/>
                 <a:cs typeface="Georgia" pitchFamily="34" charset="-120"/>
               </a:rPr>
-              <a:t>Datele raman pe calculator</a:t>
+              <a:t>Datele rămân pe calculator</a:t>
             </a:r>
             <a:endParaRPr lang="en-US" sz="1800" dirty="0"/>
           </a:p>
@@ -4483,7 +4623,7 @@
       </p:sp>
       <p:sp>
         <p:nvSpPr>
-          <p:cNvPr id="19" name="Text 17"/>
+          <p:cNvPr id="20" name="Text 18"/>
           <p:cNvSpPr/>
           <p:nvPr/>
         </p:nvSpPr>
@@ -4508,13 +4648,13 @@
             <a:r>
               <a:rPr lang="en-US" sz="1400" dirty="0">
                 <a:solidFill>
-                  <a:srgbClr val="1A2233"/>
-                </a:solidFill>
-                <a:latin typeface="Calibri" pitchFamily="34" charset="0"/>
-                <a:ea typeface="Calibri" pitchFamily="34" charset="-122"/>
-                <a:cs typeface="Calibri" pitchFamily="34" charset="-120"/>
-              </a:rPr>
-              <a:t>Singurul moment cand ceva pleaca in exterior e redactarea textului cu AI — si acolo datele personale sunt anonimizate inainte.</a:t>
+                  <a:srgbClr val="1F2D45"/>
+                </a:solidFill>
+                <a:latin typeface="Segoe UI" pitchFamily="34" charset="0"/>
+                <a:ea typeface="Segoe UI" pitchFamily="34" charset="-122"/>
+                <a:cs typeface="Segoe UI" pitchFamily="34" charset="-120"/>
+              </a:rPr>
+              <a:t>Singurul moment când ceva pleacă în exterior e redactarea textului cu AI — și acolo datele personale sunt anonimizate înainte.</a:t>
             </a:r>
             <a:endParaRPr lang="en-US" sz="1400" dirty="0"/>
           </a:p>
@@ -4522,7 +4662,7 @@
       </p:sp>
       <p:sp>
         <p:nvSpPr>
-          <p:cNvPr id="20" name="Text 18"/>
+          <p:cNvPr id="21" name="Text 19"/>
           <p:cNvSpPr/>
           <p:nvPr/>
         </p:nvSpPr>
@@ -4547,13 +4687,13 @@
             <a:r>
               <a:rPr lang="en-US" sz="900" dirty="0">
                 <a:solidFill>
-                  <a:srgbClr val="5C6679"/>
-                </a:solidFill>
-                <a:latin typeface="Calibri" pitchFamily="34" charset="0"/>
-                <a:ea typeface="Calibri" pitchFamily="34" charset="-122"/>
-                <a:cs typeface="Calibri" pitchFamily="34" charset="-120"/>
-              </a:rPr>
-              <a:t>Aplicatie de asistenta la evaluare  ·  casa + teren  ·  document pentru review</a:t>
+                  <a:srgbClr val="5A6270"/>
+                </a:solidFill>
+                <a:latin typeface="Segoe UI" pitchFamily="34" charset="0"/>
+                <a:ea typeface="Segoe UI" pitchFamily="34" charset="-122"/>
+                <a:cs typeface="Segoe UI" pitchFamily="34" charset="-120"/>
+              </a:rPr>
+              <a:t>Registru de evaluare ANEVAR  ·  aplicație locală offline  ·  document pentru review</a:t>
             </a:r>
             <a:endParaRPr lang="en-US" sz="900" dirty="0"/>
           </a:p>
@@ -4561,7 +4701,7 @@
       </p:sp>
       <p:sp>
         <p:nvSpPr>
-          <p:cNvPr id="21" name="Text 19"/>
+          <p:cNvPr id="22" name="Text 20"/>
           <p:cNvSpPr/>
           <p:nvPr/>
         </p:nvSpPr>
@@ -4586,11 +4726,11 @@
             <a:r>
               <a:rPr lang="en-US" sz="900" dirty="0">
                 <a:solidFill>
-                  <a:srgbClr val="5C6679"/>
-                </a:solidFill>
-                <a:latin typeface="Calibri" pitchFamily="34" charset="0"/>
-                <a:ea typeface="Calibri" pitchFamily="34" charset="-122"/>
-                <a:cs typeface="Calibri" pitchFamily="34" charset="-120"/>
+                  <a:srgbClr val="5A6270"/>
+                </a:solidFill>
+                <a:latin typeface="Segoe UI" pitchFamily="34" charset="0"/>
+                <a:ea typeface="Segoe UI" pitchFamily="34" charset="-122"/>
+                <a:cs typeface="Segoe UI" pitchFamily="34" charset="-120"/>
               </a:rPr>
               <a:t>2</a:t>
             </a:r>
@@ -4612,7 +4752,7 @@
     <p:bg>
       <p:bgPr>
         <a:solidFill>
-          <a:srgbClr val="F5F7FB"/>
+          <a:srgbClr val="F2EEE2"/>
         </a:solidFill>
       </p:bgPr>
     </p:bg>
@@ -4645,7 +4785,7 @@
             <a:avLst/>
           </a:prstGeom>
           <a:solidFill>
-            <a:srgbClr val="D9A227"/>
+            <a:srgbClr val="9D4A25"/>
           </a:solidFill>
           <a:ln/>
         </p:spPr>
@@ -4677,13 +4817,13 @@
             <a:r>
               <a:rPr lang="en-US" sz="1200" b="1" spc="300" kern="0" dirty="0">
                 <a:solidFill>
-                  <a:srgbClr val="D9A227"/>
-                </a:solidFill>
-                <a:latin typeface="Calibri" pitchFamily="34" charset="0"/>
-                <a:ea typeface="Calibri" pitchFamily="34" charset="-122"/>
-                <a:cs typeface="Calibri" pitchFamily="34" charset="-120"/>
-              </a:rPr>
-              <a:t>CUM E GANDITA</a:t>
+                  <a:srgbClr val="9D4A25"/>
+                </a:solidFill>
+                <a:latin typeface="Segoe UI" pitchFamily="34" charset="0"/>
+                <a:ea typeface="Segoe UI" pitchFamily="34" charset="-122"/>
+                <a:cs typeface="Segoe UI" pitchFamily="34" charset="-120"/>
+              </a:rPr>
+              <a:t>CUM E GÂNDITĂ</a:t>
             </a:r>
             <a:endParaRPr lang="en-US" sz="1200" dirty="0"/>
           </a:p>
@@ -4716,13 +4856,13 @@
             <a:r>
               <a:rPr lang="en-US" sz="3000" b="1" dirty="0">
                 <a:solidFill>
-                  <a:srgbClr val="152A4E"/>
+                  <a:srgbClr val="16263D"/>
                 </a:solidFill>
                 <a:latin typeface="Georgia" pitchFamily="34" charset="0"/>
                 <a:ea typeface="Georgia" pitchFamily="34" charset="-122"/>
                 <a:cs typeface="Georgia" pitchFamily="34" charset="-120"/>
               </a:rPr>
-              <a:t>Patru parti care lucreaza impreuna</a:t>
+              <a:t>Module care lucrează împreună</a:t>
             </a:r>
             <a:endParaRPr lang="en-US" sz="3000" dirty="0"/>
           </a:p>
@@ -4731,6 +4871,26 @@
       <p:sp>
         <p:nvSpPr>
           <p:cNvPr id="5" name="Shape 3"/>
+          <p:cNvSpPr/>
+          <p:nvPr/>
+        </p:nvSpPr>
+        <p:spPr>
+          <a:xfrm>
+            <a:off x="777240" y="1335024"/>
+            <a:ext cx="10607040" cy="22860"/>
+          </a:xfrm>
+          <a:prstGeom prst="rect">
+            <a:avLst/>
+          </a:prstGeom>
+          <a:solidFill>
+            <a:srgbClr val="B08D57"/>
+          </a:solidFill>
+          <a:ln/>
+        </p:spPr>
+      </p:sp>
+      <p:sp>
+        <p:nvSpPr>
+          <p:cNvPr id="6" name="Shape 4"/>
           <p:cNvSpPr/>
           <p:nvPr/>
         </p:nvSpPr>
@@ -4743,18 +4903,18 @@
             <a:avLst/>
           </a:prstGeom>
           <a:solidFill>
-            <a:srgbClr val="FFFFFF"/>
+            <a:srgbClr val="FBF8F0"/>
           </a:solidFill>
           <a:ln w="12700">
             <a:solidFill>
-              <a:srgbClr val="DDE3EE"/>
+              <a:srgbClr val="D7CDB4"/>
             </a:solidFill>
             <a:prstDash val="solid"/>
           </a:ln>
           <a:effectLst>
             <a:outerShdw sx="100000" sy="100000" kx="0" ky="0" algn="bl" rotWithShape="0" blurRad="88900" dist="38100" dir="8100000">
-              <a:srgbClr val="000000">
-                <a:alpha val="13000"/>
+              <a:srgbClr val="16263D">
+                <a:alpha val="12000"/>
               </a:srgbClr>
             </a:outerShdw>
           </a:effectLst>
@@ -4762,7 +4922,7 @@
       </p:sp>
       <p:sp>
         <p:nvSpPr>
-          <p:cNvPr id="6" name="Shape 4"/>
+          <p:cNvPr id="7" name="Shape 5"/>
           <p:cNvSpPr/>
           <p:nvPr/>
         </p:nvSpPr>
@@ -4775,14 +4935,14 @@
             <a:avLst/>
           </a:prstGeom>
           <a:solidFill>
-            <a:srgbClr val="152A4E"/>
-          </a:solidFill>
-          <a:ln/>
-        </p:spPr>
-      </p:sp>
-      <p:sp>
-        <p:nvSpPr>
-          <p:cNvPr id="7" name="Text 5"/>
+            <a:srgbClr val="9D4A25"/>
+          </a:solidFill>
+          <a:ln/>
+        </p:spPr>
+      </p:sp>
+      <p:sp>
+        <p:nvSpPr>
+          <p:cNvPr id="8" name="Text 6"/>
           <p:cNvSpPr/>
           <p:nvPr/>
         </p:nvSpPr>
@@ -4807,7 +4967,7 @@
             <a:r>
               <a:rPr lang="en-US" sz="2000" b="1" dirty="0">
                 <a:solidFill>
-                  <a:srgbClr val="152A4E"/>
+                  <a:srgbClr val="16263D"/>
                 </a:solidFill>
                 <a:latin typeface="Georgia" pitchFamily="34" charset="0"/>
                 <a:ea typeface="Georgia" pitchFamily="34" charset="-122"/>
@@ -4821,7 +4981,7 @@
       </p:sp>
       <p:sp>
         <p:nvSpPr>
-          <p:cNvPr id="8" name="Text 6"/>
+          <p:cNvPr id="9" name="Text 7"/>
           <p:cNvSpPr/>
           <p:nvPr/>
         </p:nvSpPr>
@@ -4844,23 +5004,23 @@
               <a:buNone/>
             </a:pPr>
             <a:r>
-              <a:rPr lang="en-US" sz="1400" dirty="0">
-                <a:solidFill>
-                  <a:srgbClr val="1A2233"/>
-                </a:solidFill>
-                <a:latin typeface="Calibri" pitchFamily="34" charset="0"/>
-                <a:ea typeface="Calibri" pitchFamily="34" charset="-122"/>
-                <a:cs typeface="Calibri" pitchFamily="34" charset="-120"/>
-              </a:rPr>
-              <a:t>Cost (CIN), grila de teren, grila de casa, reconciliere si alocarea valorii — dupa metodologia ANEVAR.</a:t>
-            </a:r>
-            <a:endParaRPr lang="en-US" sz="1400" dirty="0"/>
-          </a:p>
-        </p:txBody>
-      </p:sp>
-      <p:sp>
-        <p:nvSpPr>
-          <p:cNvPr id="9" name="Shape 7"/>
+              <a:rPr lang="en-US" sz="1350" dirty="0">
+                <a:solidFill>
+                  <a:srgbClr val="1F2D45"/>
+                </a:solidFill>
+                <a:latin typeface="Segoe UI" pitchFamily="34" charset="0"/>
+                <a:ea typeface="Segoe UI" pitchFamily="34" charset="-122"/>
+                <a:cs typeface="Segoe UI" pitchFamily="34" charset="-120"/>
+              </a:rPr>
+              <a:t>Cost (CIN), comparație (teren + casă), venit (capitalizare directă + DCF), reconciliere și alocare — pe tip de proprietate și scop.</a:t>
+            </a:r>
+            <a:endParaRPr lang="en-US" sz="1350" dirty="0"/>
+          </a:p>
+        </p:txBody>
+      </p:sp>
+      <p:sp>
+        <p:nvSpPr>
+          <p:cNvPr id="10" name="Shape 8"/>
           <p:cNvSpPr/>
           <p:nvPr/>
         </p:nvSpPr>
@@ -4873,18 +5033,18 @@
             <a:avLst/>
           </a:prstGeom>
           <a:solidFill>
-            <a:srgbClr val="FFFFFF"/>
+            <a:srgbClr val="FBF8F0"/>
           </a:solidFill>
           <a:ln w="12700">
             <a:solidFill>
-              <a:srgbClr val="DDE3EE"/>
+              <a:srgbClr val="D7CDB4"/>
             </a:solidFill>
             <a:prstDash val="solid"/>
           </a:ln>
           <a:effectLst>
             <a:outerShdw sx="100000" sy="100000" kx="0" ky="0" algn="bl" rotWithShape="0" blurRad="88900" dist="38100" dir="8100000">
-              <a:srgbClr val="000000">
-                <a:alpha val="13000"/>
+              <a:srgbClr val="16263D">
+                <a:alpha val="12000"/>
               </a:srgbClr>
             </a:outerShdw>
           </a:effectLst>
@@ -4892,7 +5052,7 @@
       </p:sp>
       <p:sp>
         <p:nvSpPr>
-          <p:cNvPr id="10" name="Shape 8"/>
+          <p:cNvPr id="11" name="Shape 9"/>
           <p:cNvSpPr/>
           <p:nvPr/>
         </p:nvSpPr>
@@ -4905,14 +5065,14 @@
             <a:avLst/>
           </a:prstGeom>
           <a:solidFill>
-            <a:srgbClr val="2A9D8F"/>
-          </a:solidFill>
-          <a:ln/>
-        </p:spPr>
-      </p:sp>
-      <p:sp>
-        <p:nvSpPr>
-          <p:cNvPr id="11" name="Text 9"/>
+            <a:srgbClr val="2F6B4F"/>
+          </a:solidFill>
+          <a:ln/>
+        </p:spPr>
+      </p:sp>
+      <p:sp>
+        <p:nvSpPr>
+          <p:cNvPr id="12" name="Text 10"/>
           <p:cNvSpPr/>
           <p:nvPr/>
         </p:nvSpPr>
@@ -4937,7 +5097,7 @@
             <a:r>
               <a:rPr lang="en-US" sz="2000" b="1" dirty="0">
                 <a:solidFill>
-                  <a:srgbClr val="152A4E"/>
+                  <a:srgbClr val="16263D"/>
                 </a:solidFill>
                 <a:latin typeface="Georgia" pitchFamily="34" charset="0"/>
                 <a:ea typeface="Georgia" pitchFamily="34" charset="-122"/>
@@ -4951,7 +5111,7 @@
       </p:sp>
       <p:sp>
         <p:nvSpPr>
-          <p:cNvPr id="12" name="Text 10"/>
+          <p:cNvPr id="13" name="Text 11"/>
           <p:cNvSpPr/>
           <p:nvPr/>
         </p:nvSpPr>
@@ -4974,23 +5134,23 @@
               <a:buNone/>
             </a:pPr>
             <a:r>
-              <a:rPr lang="en-US" sz="1400" dirty="0">
-                <a:solidFill>
-                  <a:srgbClr val="1A2233"/>
-                </a:solidFill>
-                <a:latin typeface="Calibri" pitchFamily="34" charset="0"/>
-                <a:ea typeface="Calibri" pitchFamily="34" charset="-122"/>
-                <a:cs typeface="Calibri" pitchFamily="34" charset="-120"/>
-              </a:rPr>
-              <a:t>Cauta anunturi in zona, le citeste, le puncteaza dupa similaritate si propune cele mai potrivite.</a:t>
-            </a:r>
-            <a:endParaRPr lang="en-US" sz="1400" dirty="0"/>
-          </a:p>
-        </p:txBody>
-      </p:sp>
-      <p:sp>
-        <p:nvSpPr>
-          <p:cNvPr id="13" name="Shape 11"/>
+              <a:rPr lang="en-US" sz="1350" dirty="0">
+                <a:solidFill>
+                  <a:srgbClr val="1F2D45"/>
+                </a:solidFill>
+                <a:latin typeface="Segoe UI" pitchFamily="34" charset="0"/>
+                <a:ea typeface="Segoe UI" pitchFamily="34" charset="-122"/>
+                <a:cs typeface="Segoe UI" pitchFamily="34" charset="-120"/>
+              </a:rPr>
+              <a:t>Caută anunțuri în zonă, le citește, le punctează după similaritate și propune cele mai potrivite.</a:t>
+            </a:r>
+            <a:endParaRPr lang="en-US" sz="1350" dirty="0"/>
+          </a:p>
+        </p:txBody>
+      </p:sp>
+      <p:sp>
+        <p:nvSpPr>
+          <p:cNvPr id="14" name="Shape 12"/>
           <p:cNvSpPr/>
           <p:nvPr/>
         </p:nvSpPr>
@@ -5003,18 +5163,18 @@
             <a:avLst/>
           </a:prstGeom>
           <a:solidFill>
-            <a:srgbClr val="FFFFFF"/>
+            <a:srgbClr val="FBF8F0"/>
           </a:solidFill>
           <a:ln w="12700">
             <a:solidFill>
-              <a:srgbClr val="DDE3EE"/>
+              <a:srgbClr val="D7CDB4"/>
             </a:solidFill>
             <a:prstDash val="solid"/>
           </a:ln>
           <a:effectLst>
             <a:outerShdw sx="100000" sy="100000" kx="0" ky="0" algn="bl" rotWithShape="0" blurRad="88900" dist="38100" dir="8100000">
-              <a:srgbClr val="000000">
-                <a:alpha val="13000"/>
+              <a:srgbClr val="16263D">
+                <a:alpha val="12000"/>
               </a:srgbClr>
             </a:outerShdw>
           </a:effectLst>
@@ -5022,7 +5182,7 @@
       </p:sp>
       <p:sp>
         <p:nvSpPr>
-          <p:cNvPr id="14" name="Shape 12"/>
+          <p:cNvPr id="15" name="Shape 13"/>
           <p:cNvSpPr/>
           <p:nvPr/>
         </p:nvSpPr>
@@ -5035,14 +5195,14 @@
             <a:avLst/>
           </a:prstGeom>
           <a:solidFill>
-            <a:srgbClr val="D9A227"/>
-          </a:solidFill>
-          <a:ln/>
-        </p:spPr>
-      </p:sp>
-      <p:sp>
-        <p:nvSpPr>
-          <p:cNvPr id="15" name="Text 13"/>
+            <a:srgbClr val="B08D57"/>
+          </a:solidFill>
+          <a:ln/>
+        </p:spPr>
+      </p:sp>
+      <p:sp>
+        <p:nvSpPr>
+          <p:cNvPr id="16" name="Text 14"/>
           <p:cNvSpPr/>
           <p:nvPr/>
         </p:nvSpPr>
@@ -5067,13 +5227,13 @@
             <a:r>
               <a:rPr lang="en-US" sz="2000" b="1" dirty="0">
                 <a:solidFill>
-                  <a:srgbClr val="152A4E"/>
+                  <a:srgbClr val="16263D"/>
                 </a:solidFill>
                 <a:latin typeface="Georgia" pitchFamily="34" charset="0"/>
                 <a:ea typeface="Georgia" pitchFamily="34" charset="-122"/>
                 <a:cs typeface="Georgia" pitchFamily="34" charset="-120"/>
               </a:rPr>
-              <a:t>Generator de raport</a:t>
+              <a:t>Generator de raport + AML</a:t>
             </a:r>
             <a:endParaRPr lang="en-US" sz="2000" dirty="0"/>
           </a:p>
@@ -5081,7 +5241,7 @@
       </p:sp>
       <p:sp>
         <p:nvSpPr>
-          <p:cNvPr id="16" name="Text 14"/>
+          <p:cNvPr id="17" name="Text 15"/>
           <p:cNvSpPr/>
           <p:nvPr/>
         </p:nvSpPr>
@@ -5104,23 +5264,23 @@
               <a:buNone/>
             </a:pPr>
             <a:r>
-              <a:rPr lang="en-US" sz="1400" dirty="0">
-                <a:solidFill>
-                  <a:srgbClr val="1A2233"/>
-                </a:solidFill>
-                <a:latin typeface="Calibri" pitchFamily="34" charset="0"/>
-                <a:ea typeface="Calibri" pitchFamily="34" charset="-122"/>
-                <a:cs typeface="Calibri" pitchFamily="34" charset="-120"/>
-              </a:rPr>
-              <a:t>Construieste documentul Word: coperta, declaratii, capitole de analiza, anexe — cu text si fotografii.</a:t>
-            </a:r>
-            <a:endParaRPr lang="en-US" sz="1400" dirty="0"/>
-          </a:p>
-        </p:txBody>
-      </p:sp>
-      <p:sp>
-        <p:nvSpPr>
-          <p:cNvPr id="17" name="Shape 15"/>
+              <a:rPr lang="en-US" sz="1350" dirty="0">
+                <a:solidFill>
+                  <a:srgbClr val="1F2D45"/>
+                </a:solidFill>
+                <a:latin typeface="Segoe UI" pitchFamily="34" charset="0"/>
+                <a:ea typeface="Segoe UI" pitchFamily="34" charset="-122"/>
+                <a:cs typeface="Segoe UI" pitchFamily="34" charset="-120"/>
+              </a:rPr>
+              <a:t>Raportul Word (SEV 2025) cu text, grile și fotografii; plus modulul AML (Legea 129/2019): KYC, risc, documente.</a:t>
+            </a:r>
+            <a:endParaRPr lang="en-US" sz="1350" dirty="0"/>
+          </a:p>
+        </p:txBody>
+      </p:sp>
+      <p:sp>
+        <p:nvSpPr>
+          <p:cNvPr id="18" name="Shape 16"/>
           <p:cNvSpPr/>
           <p:nvPr/>
         </p:nvSpPr>
@@ -5133,18 +5293,18 @@
             <a:avLst/>
           </a:prstGeom>
           <a:solidFill>
-            <a:srgbClr val="FFFFFF"/>
+            <a:srgbClr val="FBF8F0"/>
           </a:solidFill>
           <a:ln w="12700">
             <a:solidFill>
-              <a:srgbClr val="DDE3EE"/>
+              <a:srgbClr val="D7CDB4"/>
             </a:solidFill>
             <a:prstDash val="solid"/>
           </a:ln>
           <a:effectLst>
             <a:outerShdw sx="100000" sy="100000" kx="0" ky="0" algn="bl" rotWithShape="0" blurRad="88900" dist="38100" dir="8100000">
-              <a:srgbClr val="000000">
-                <a:alpha val="13000"/>
+              <a:srgbClr val="16263D">
+                <a:alpha val="12000"/>
               </a:srgbClr>
             </a:outerShdw>
           </a:effectLst>
@@ -5152,7 +5312,7 @@
       </p:sp>
       <p:sp>
         <p:nvSpPr>
-          <p:cNvPr id="18" name="Shape 16"/>
+          <p:cNvPr id="19" name="Shape 17"/>
           <p:cNvSpPr/>
           <p:nvPr/>
         </p:nvSpPr>
@@ -5165,14 +5325,14 @@
             <a:avLst/>
           </a:prstGeom>
           <a:solidFill>
-            <a:srgbClr val="2E7D5B"/>
-          </a:solidFill>
-          <a:ln/>
-        </p:spPr>
-      </p:sp>
-      <p:sp>
-        <p:nvSpPr>
-          <p:cNvPr id="19" name="Text 17"/>
+            <a:srgbClr val="2F6B4F"/>
+          </a:solidFill>
+          <a:ln/>
+        </p:spPr>
+      </p:sp>
+      <p:sp>
+        <p:nvSpPr>
+          <p:cNvPr id="20" name="Text 18"/>
           <p:cNvSpPr/>
           <p:nvPr/>
         </p:nvSpPr>
@@ -5197,13 +5357,13 @@
             <a:r>
               <a:rPr lang="en-US" sz="2000" b="1" dirty="0">
                 <a:solidFill>
-                  <a:srgbClr val="152A4E"/>
+                  <a:srgbClr val="16263D"/>
                 </a:solidFill>
                 <a:latin typeface="Georgia" pitchFamily="34" charset="0"/>
                 <a:ea typeface="Georgia" pitchFamily="34" charset="-122"/>
                 <a:cs typeface="Georgia" pitchFamily="34" charset="-120"/>
               </a:rPr>
-              <a:t>Wizard in 5 pasi</a:t>
+              <a:t>Wizard în 5 pași</a:t>
             </a:r>
             <a:endParaRPr lang="en-US" sz="2000" dirty="0"/>
           </a:p>
@@ -5211,7 +5371,7 @@
       </p:sp>
       <p:sp>
         <p:nvSpPr>
-          <p:cNvPr id="20" name="Text 18"/>
+          <p:cNvPr id="21" name="Text 19"/>
           <p:cNvSpPr/>
           <p:nvPr/>
         </p:nvSpPr>
@@ -5234,23 +5394,23 @@
               <a:buNone/>
             </a:pPr>
             <a:r>
-              <a:rPr lang="en-US" sz="1400" dirty="0">
-                <a:solidFill>
-                  <a:srgbClr val="1A2233"/>
-                </a:solidFill>
-                <a:latin typeface="Calibri" pitchFamily="34" charset="0"/>
-                <a:ea typeface="Calibri" pitchFamily="34" charset="-122"/>
-                <a:cs typeface="Calibri" pitchFamily="34" charset="-120"/>
-              </a:rPr>
-              <a:t>Ghideaza evaluatorul de la identificarea proprietatii pana la descarcarea raportului.</a:t>
-            </a:r>
-            <a:endParaRPr lang="en-US" sz="1400" dirty="0"/>
-          </a:p>
-        </p:txBody>
-      </p:sp>
-      <p:sp>
-        <p:nvSpPr>
-          <p:cNvPr id="21" name="Text 19"/>
+              <a:rPr lang="en-US" sz="1350" dirty="0">
+                <a:solidFill>
+                  <a:srgbClr val="1F2D45"/>
+                </a:solidFill>
+                <a:latin typeface="Segoe UI" pitchFamily="34" charset="0"/>
+                <a:ea typeface="Segoe UI" pitchFamily="34" charset="-122"/>
+                <a:cs typeface="Segoe UI" pitchFamily="34" charset="-120"/>
+              </a:rPr>
+              <a:t>Ghidează evaluatorul de la identificarea proprietății până la descărcarea raportului.</a:t>
+            </a:r>
+            <a:endParaRPr lang="en-US" sz="1350" dirty="0"/>
+          </a:p>
+        </p:txBody>
+      </p:sp>
+      <p:sp>
+        <p:nvSpPr>
+          <p:cNvPr id="22" name="Text 20"/>
           <p:cNvSpPr/>
           <p:nvPr/>
         </p:nvSpPr>
@@ -5275,13 +5435,13 @@
             <a:r>
               <a:rPr lang="en-US" sz="1300" i="1" dirty="0">
                 <a:solidFill>
-                  <a:srgbClr val="5C6679"/>
-                </a:solidFill>
-                <a:latin typeface="Calibri" pitchFamily="34" charset="0"/>
-                <a:ea typeface="Calibri" pitchFamily="34" charset="-122"/>
-                <a:cs typeface="Calibri" pitchFamily="34" charset="-120"/>
-              </a:rPr>
-              <a:t>Filosofia: fiecare cifra poate fi verificata — aplicatia arata cum a ajuns la fiecare rezultat, nu doar valoarea finala.</a:t>
+                  <a:srgbClr val="5A6270"/>
+                </a:solidFill>
+                <a:latin typeface="Segoe UI" pitchFamily="34" charset="0"/>
+                <a:ea typeface="Segoe UI" pitchFamily="34" charset="-122"/>
+                <a:cs typeface="Segoe UI" pitchFamily="34" charset="-120"/>
+              </a:rPr>
+              <a:t>Filosofia: fiecare cifră poate fi verificată — aplicația arată cum a ajuns la fiecare rezultat, nu doar valoarea finală.</a:t>
             </a:r>
             <a:endParaRPr lang="en-US" sz="1300" dirty="0"/>
           </a:p>
@@ -5289,7 +5449,7 @@
       </p:sp>
       <p:sp>
         <p:nvSpPr>
-          <p:cNvPr id="22" name="Text 20"/>
+          <p:cNvPr id="23" name="Text 21"/>
           <p:cNvSpPr/>
           <p:nvPr/>
         </p:nvSpPr>
@@ -5314,13 +5474,13 @@
             <a:r>
               <a:rPr lang="en-US" sz="900" dirty="0">
                 <a:solidFill>
-                  <a:srgbClr val="5C6679"/>
-                </a:solidFill>
-                <a:latin typeface="Calibri" pitchFamily="34" charset="0"/>
-                <a:ea typeface="Calibri" pitchFamily="34" charset="-122"/>
-                <a:cs typeface="Calibri" pitchFamily="34" charset="-120"/>
-              </a:rPr>
-              <a:t>Aplicatie de asistenta la evaluare  ·  casa + teren  ·  document pentru review</a:t>
+                  <a:srgbClr val="5A6270"/>
+                </a:solidFill>
+                <a:latin typeface="Segoe UI" pitchFamily="34" charset="0"/>
+                <a:ea typeface="Segoe UI" pitchFamily="34" charset="-122"/>
+                <a:cs typeface="Segoe UI" pitchFamily="34" charset="-120"/>
+              </a:rPr>
+              <a:t>Registru de evaluare ANEVAR  ·  aplicație locală offline  ·  document pentru review</a:t>
             </a:r>
             <a:endParaRPr lang="en-US" sz="900" dirty="0"/>
           </a:p>
@@ -5328,7 +5488,7 @@
       </p:sp>
       <p:sp>
         <p:nvSpPr>
-          <p:cNvPr id="23" name="Text 21"/>
+          <p:cNvPr id="24" name="Text 22"/>
           <p:cNvSpPr/>
           <p:nvPr/>
         </p:nvSpPr>
@@ -5353,11 +5513,11 @@
             <a:r>
               <a:rPr lang="en-US" sz="900" dirty="0">
                 <a:solidFill>
-                  <a:srgbClr val="5C6679"/>
-                </a:solidFill>
-                <a:latin typeface="Calibri" pitchFamily="34" charset="0"/>
-                <a:ea typeface="Calibri" pitchFamily="34" charset="-122"/>
-                <a:cs typeface="Calibri" pitchFamily="34" charset="-120"/>
+                  <a:srgbClr val="5A6270"/>
+                </a:solidFill>
+                <a:latin typeface="Segoe UI" pitchFamily="34" charset="0"/>
+                <a:ea typeface="Segoe UI" pitchFamily="34" charset="-122"/>
+                <a:cs typeface="Segoe UI" pitchFamily="34" charset="-120"/>
               </a:rPr>
               <a:t>3</a:t>
             </a:r>
@@ -5379,7 +5539,7 @@
     <p:bg>
       <p:bgPr>
         <a:solidFill>
-          <a:srgbClr val="F5F7FB"/>
+          <a:srgbClr val="F2EEE2"/>
         </a:solidFill>
       </p:bgPr>
     </p:bg>
@@ -5412,7 +5572,7 @@
             <a:avLst/>
           </a:prstGeom>
           <a:solidFill>
-            <a:srgbClr val="D9A227"/>
+            <a:srgbClr val="9D4A25"/>
           </a:solidFill>
           <a:ln/>
         </p:spPr>
@@ -5444,11 +5604,11 @@
             <a:r>
               <a:rPr lang="en-US" sz="1200" b="1" spc="300" kern="0" dirty="0">
                 <a:solidFill>
-                  <a:srgbClr val="D9A227"/>
-                </a:solidFill>
-                <a:latin typeface="Calibri" pitchFamily="34" charset="0"/>
-                <a:ea typeface="Calibri" pitchFamily="34" charset="-122"/>
-                <a:cs typeface="Calibri" pitchFamily="34" charset="-120"/>
+                  <a:srgbClr val="9D4A25"/>
+                </a:solidFill>
+                <a:latin typeface="Segoe UI" pitchFamily="34" charset="0"/>
+                <a:ea typeface="Segoe UI" pitchFamily="34" charset="-122"/>
+                <a:cs typeface="Segoe UI" pitchFamily="34" charset="-120"/>
               </a:rPr>
               <a:t>METODOLOGIA · TEREN</a:t>
             </a:r>
@@ -5483,13 +5643,13 @@
             <a:r>
               <a:rPr lang="en-US" sz="3000" b="1" dirty="0">
                 <a:solidFill>
-                  <a:srgbClr val="152A4E"/>
+                  <a:srgbClr val="16263D"/>
                 </a:solidFill>
                 <a:latin typeface="Georgia" pitchFamily="34" charset="0"/>
                 <a:ea typeface="Georgia" pitchFamily="34" charset="-122"/>
                 <a:cs typeface="Georgia" pitchFamily="34" charset="-120"/>
               </a:rPr>
-              <a:t>Grila de comparatie in doua etape</a:t>
+              <a:t>Grila de comparație în două etape</a:t>
             </a:r>
             <a:endParaRPr lang="en-US" sz="3000" dirty="0"/>
           </a:p>
@@ -5498,6 +5658,26 @@
       <p:sp>
         <p:nvSpPr>
           <p:cNvPr id="5" name="Shape 3"/>
+          <p:cNvSpPr/>
+          <p:nvPr/>
+        </p:nvSpPr>
+        <p:spPr>
+          <a:xfrm>
+            <a:off x="777240" y="1335024"/>
+            <a:ext cx="10607040" cy="22860"/>
+          </a:xfrm>
+          <a:prstGeom prst="rect">
+            <a:avLst/>
+          </a:prstGeom>
+          <a:solidFill>
+            <a:srgbClr val="B08D57"/>
+          </a:solidFill>
+          <a:ln/>
+        </p:spPr>
+      </p:sp>
+      <p:sp>
+        <p:nvSpPr>
+          <p:cNvPr id="6" name="Shape 4"/>
           <p:cNvSpPr/>
           <p:nvPr/>
         </p:nvSpPr>
@@ -5510,18 +5690,18 @@
             <a:avLst/>
           </a:prstGeom>
           <a:solidFill>
-            <a:srgbClr val="FFFFFF"/>
+            <a:srgbClr val="FBF8F0"/>
           </a:solidFill>
           <a:ln w="12700">
             <a:solidFill>
-              <a:srgbClr val="DDE3EE"/>
+              <a:srgbClr val="D7CDB4"/>
             </a:solidFill>
             <a:prstDash val="solid"/>
           </a:ln>
           <a:effectLst>
             <a:outerShdw sx="100000" sy="100000" kx="0" ky="0" algn="bl" rotWithShape="0" blurRad="88900" dist="38100" dir="8100000">
-              <a:srgbClr val="000000">
-                <a:alpha val="13000"/>
+              <a:srgbClr val="16263D">
+                <a:alpha val="12000"/>
               </a:srgbClr>
             </a:outerShdw>
           </a:effectLst>
@@ -5529,7 +5709,7 @@
       </p:sp>
       <p:sp>
         <p:nvSpPr>
-          <p:cNvPr id="6" name="Shape 4"/>
+          <p:cNvPr id="7" name="Shape 5"/>
           <p:cNvSpPr/>
           <p:nvPr/>
         </p:nvSpPr>
@@ -5542,14 +5722,14 @@
             <a:avLst/>
           </a:prstGeom>
           <a:solidFill>
-            <a:srgbClr val="152A4E"/>
-          </a:solidFill>
-          <a:ln/>
-        </p:spPr>
-      </p:sp>
-      <p:sp>
-        <p:nvSpPr>
-          <p:cNvPr id="7" name="Text 5"/>
+            <a:srgbClr val="16263D"/>
+          </a:solidFill>
+          <a:ln/>
+        </p:spPr>
+      </p:sp>
+      <p:sp>
+        <p:nvSpPr>
+          <p:cNvPr id="8" name="Text 6"/>
           <p:cNvSpPr/>
           <p:nvPr/>
         </p:nvSpPr>
@@ -5580,7 +5760,7 @@
                 <a:ea typeface="Georgia" pitchFamily="34" charset="-122"/>
                 <a:cs typeface="Georgia" pitchFamily="34" charset="-120"/>
               </a:rPr>
-              <a:t>Etapa 1 — Tranzactie</a:t>
+              <a:t>Etapa 1 — Tranzacție</a:t>
             </a:r>
             <a:endParaRPr lang="en-US" sz="1700" dirty="0"/>
           </a:p>
@@ -5588,7 +5768,7 @@
       </p:sp>
       <p:sp>
         <p:nvSpPr>
-          <p:cNvPr id="8" name="Text 6"/>
+          <p:cNvPr id="9" name="Text 7"/>
           <p:cNvSpPr/>
           <p:nvPr/>
         </p:nvSpPr>
@@ -5613,13 +5793,13 @@
             <a:r>
               <a:rPr lang="en-US" sz="1250" i="1" dirty="0">
                 <a:solidFill>
-                  <a:srgbClr val="5C6679"/>
-                </a:solidFill>
-                <a:latin typeface="Calibri" pitchFamily="34" charset="0"/>
-                <a:ea typeface="Calibri" pitchFamily="34" charset="-122"/>
-                <a:cs typeface="Calibri" pitchFamily="34" charset="-120"/>
-              </a:rPr>
-              <a:t>aplicare secventiala (compus)</a:t>
+                  <a:srgbClr val="5A6270"/>
+                </a:solidFill>
+                <a:latin typeface="Segoe UI" pitchFamily="34" charset="0"/>
+                <a:ea typeface="Segoe UI" pitchFamily="34" charset="-122"/>
+                <a:cs typeface="Segoe UI" pitchFamily="34" charset="-120"/>
+              </a:rPr>
+              <a:t>aplicare secvențială (compus)</a:t>
             </a:r>
             <a:endParaRPr lang="en-US" sz="1250" dirty="0"/>
           </a:p>
@@ -5627,7 +5807,7 @@
       </p:sp>
       <p:sp>
         <p:nvSpPr>
-          <p:cNvPr id="9" name="Text 7"/>
+          <p:cNvPr id="10" name="Text 8"/>
           <p:cNvSpPr/>
           <p:nvPr/>
         </p:nvSpPr>
@@ -5656,13 +5836,13 @@
             <a:r>
               <a:rPr lang="en-US" sz="1300" dirty="0">
                 <a:solidFill>
-                  <a:srgbClr val="1A2233"/>
-                </a:solidFill>
-                <a:latin typeface="Calibri" pitchFamily="34" charset="0"/>
-                <a:ea typeface="Calibri" pitchFamily="34" charset="-122"/>
-                <a:cs typeface="Calibri" pitchFamily="34" charset="-120"/>
-              </a:rPr>
-              <a:t>Oferta -&gt; tranzactie</a:t>
+                  <a:srgbClr val="1F2D45"/>
+                </a:solidFill>
+                <a:latin typeface="Segoe UI" pitchFamily="34" charset="0"/>
+                <a:ea typeface="Segoe UI" pitchFamily="34" charset="-122"/>
+                <a:cs typeface="Segoe UI" pitchFamily="34" charset="-120"/>
+              </a:rPr>
+              <a:t>Ofertă → tranzacție</a:t>
             </a:r>
             <a:endParaRPr lang="en-US" sz="1300" dirty="0"/>
           </a:p>
@@ -5677,13 +5857,13 @@
             <a:r>
               <a:rPr lang="en-US" sz="1300" dirty="0">
                 <a:solidFill>
-                  <a:srgbClr val="1A2233"/>
-                </a:solidFill>
-                <a:latin typeface="Calibri" pitchFamily="34" charset="0"/>
-                <a:ea typeface="Calibri" pitchFamily="34" charset="-122"/>
-                <a:cs typeface="Calibri" pitchFamily="34" charset="-120"/>
-              </a:rPr>
-              <a:t>Drept de proprietate, finantare</a:t>
+                  <a:srgbClr val="1F2D45"/>
+                </a:solidFill>
+                <a:latin typeface="Segoe UI" pitchFamily="34" charset="0"/>
+                <a:ea typeface="Segoe UI" pitchFamily="34" charset="-122"/>
+                <a:cs typeface="Segoe UI" pitchFamily="34" charset="-120"/>
+              </a:rPr>
+              <a:t>Drept de proprietate, finanțare</a:t>
             </a:r>
             <a:endParaRPr lang="en-US" sz="1300" dirty="0"/>
           </a:p>
@@ -5698,13 +5878,13 @@
             <a:r>
               <a:rPr lang="en-US" sz="1300" dirty="0">
                 <a:solidFill>
-                  <a:srgbClr val="1A2233"/>
-                </a:solidFill>
-                <a:latin typeface="Calibri" pitchFamily="34" charset="0"/>
-                <a:ea typeface="Calibri" pitchFamily="34" charset="-122"/>
-                <a:cs typeface="Calibri" pitchFamily="34" charset="-120"/>
-              </a:rPr>
-              <a:t>Conditii de vanzare, cheltuieli</a:t>
+                  <a:srgbClr val="1F2D45"/>
+                </a:solidFill>
+                <a:latin typeface="Segoe UI" pitchFamily="34" charset="0"/>
+                <a:ea typeface="Segoe UI" pitchFamily="34" charset="-122"/>
+                <a:cs typeface="Segoe UI" pitchFamily="34" charset="-120"/>
+              </a:rPr>
+              <a:t>Condiții de vânzare, cheltuieli</a:t>
             </a:r>
             <a:endParaRPr lang="en-US" sz="1300" dirty="0"/>
           </a:p>
@@ -5719,13 +5899,13 @@
             <a:r>
               <a:rPr lang="en-US" sz="1300" dirty="0">
                 <a:solidFill>
-                  <a:srgbClr val="1A2233"/>
-                </a:solidFill>
-                <a:latin typeface="Calibri" pitchFamily="34" charset="0"/>
-                <a:ea typeface="Calibri" pitchFamily="34" charset="-122"/>
-                <a:cs typeface="Calibri" pitchFamily="34" charset="-120"/>
-              </a:rPr>
-              <a:t>Conditiile pietei</a:t>
+                  <a:srgbClr val="1F2D45"/>
+                </a:solidFill>
+                <a:latin typeface="Segoe UI" pitchFamily="34" charset="0"/>
+                <a:ea typeface="Segoe UI" pitchFamily="34" charset="-122"/>
+                <a:cs typeface="Segoe UI" pitchFamily="34" charset="-120"/>
+              </a:rPr>
+              <a:t>Condițiile pieței</a:t>
             </a:r>
             <a:endParaRPr lang="en-US" sz="1300" dirty="0"/>
           </a:p>
@@ -5733,7 +5913,7 @@
       </p:sp>
       <p:sp>
         <p:nvSpPr>
-          <p:cNvPr id="10" name="Shape 8"/>
+          <p:cNvPr id="11" name="Shape 9"/>
           <p:cNvSpPr/>
           <p:nvPr/>
         </p:nvSpPr>
@@ -5748,7 +5928,7 @@
           <a:noFill/>
           <a:ln w="38100">
             <a:solidFill>
-              <a:srgbClr val="D9A227"/>
+              <a:srgbClr val="9D4A25"/>
             </a:solidFill>
             <a:prstDash val="solid"/>
             <a:tailEnd type="triangle"/>
@@ -5757,7 +5937,7 @@
       </p:sp>
       <p:sp>
         <p:nvSpPr>
-          <p:cNvPr id="11" name="Shape 9"/>
+          <p:cNvPr id="12" name="Shape 10"/>
           <p:cNvSpPr/>
           <p:nvPr/>
         </p:nvSpPr>
@@ -5770,18 +5950,18 @@
             <a:avLst/>
           </a:prstGeom>
           <a:solidFill>
-            <a:srgbClr val="FFFFFF"/>
+            <a:srgbClr val="FBF8F0"/>
           </a:solidFill>
           <a:ln w="12700">
             <a:solidFill>
-              <a:srgbClr val="DDE3EE"/>
+              <a:srgbClr val="D7CDB4"/>
             </a:solidFill>
             <a:prstDash val="solid"/>
           </a:ln>
           <a:effectLst>
             <a:outerShdw sx="100000" sy="100000" kx="0" ky="0" algn="bl" rotWithShape="0" blurRad="88900" dist="38100" dir="8100000">
-              <a:srgbClr val="000000">
-                <a:alpha val="13000"/>
+              <a:srgbClr val="16263D">
+                <a:alpha val="12000"/>
               </a:srgbClr>
             </a:outerShdw>
           </a:effectLst>
@@ -5789,7 +5969,7 @@
       </p:sp>
       <p:sp>
         <p:nvSpPr>
-          <p:cNvPr id="12" name="Shape 10"/>
+          <p:cNvPr id="13" name="Shape 11"/>
           <p:cNvSpPr/>
           <p:nvPr/>
         </p:nvSpPr>
@@ -5802,14 +5982,14 @@
             <a:avLst/>
           </a:prstGeom>
           <a:solidFill>
-            <a:srgbClr val="2A9D8F"/>
-          </a:solidFill>
-          <a:ln/>
-        </p:spPr>
-      </p:sp>
-      <p:sp>
-        <p:nvSpPr>
-          <p:cNvPr id="13" name="Text 11"/>
+            <a:srgbClr val="2F6B4F"/>
+          </a:solidFill>
+          <a:ln/>
+        </p:spPr>
+      </p:sp>
+      <p:sp>
+        <p:nvSpPr>
+          <p:cNvPr id="14" name="Text 12"/>
           <p:cNvSpPr/>
           <p:nvPr/>
         </p:nvSpPr>
@@ -5848,7 +6028,7 @@
       </p:sp>
       <p:sp>
         <p:nvSpPr>
-          <p:cNvPr id="14" name="Text 12"/>
+          <p:cNvPr id="15" name="Text 13"/>
           <p:cNvSpPr/>
           <p:nvPr/>
         </p:nvSpPr>
@@ -5873,13 +6053,13 @@
             <a:r>
               <a:rPr lang="en-US" sz="1250" i="1" dirty="0">
                 <a:solidFill>
-                  <a:srgbClr val="5C6679"/>
-                </a:solidFill>
-                <a:latin typeface="Calibri" pitchFamily="34" charset="0"/>
-                <a:ea typeface="Calibri" pitchFamily="34" charset="-122"/>
-                <a:cs typeface="Calibri" pitchFamily="34" charset="-120"/>
-              </a:rPr>
-              <a:t>aplicare aditiva pe pretul de baza</a:t>
+                  <a:srgbClr val="5A6270"/>
+                </a:solidFill>
+                <a:latin typeface="Segoe UI" pitchFamily="34" charset="0"/>
+                <a:ea typeface="Segoe UI" pitchFamily="34" charset="-122"/>
+                <a:cs typeface="Segoe UI" pitchFamily="34" charset="-120"/>
+              </a:rPr>
+              <a:t>aplicare aditivă pe prețul de bază</a:t>
             </a:r>
             <a:endParaRPr lang="en-US" sz="1250" dirty="0"/>
           </a:p>
@@ -5887,7 +6067,7 @@
       </p:sp>
       <p:sp>
         <p:nvSpPr>
-          <p:cNvPr id="15" name="Text 13"/>
+          <p:cNvPr id="16" name="Text 14"/>
           <p:cNvSpPr/>
           <p:nvPr/>
         </p:nvSpPr>
@@ -5916,13 +6096,13 @@
             <a:r>
               <a:rPr lang="en-US" sz="1300" dirty="0">
                 <a:solidFill>
-                  <a:srgbClr val="1A2233"/>
-                </a:solidFill>
-                <a:latin typeface="Calibri" pitchFamily="34" charset="0"/>
-                <a:ea typeface="Calibri" pitchFamily="34" charset="-122"/>
-                <a:cs typeface="Calibri" pitchFamily="34" charset="-120"/>
-              </a:rPr>
-              <a:t>Localizare, acces, utilitati</a:t>
+                  <a:srgbClr val="1F2D45"/>
+                </a:solidFill>
+                <a:latin typeface="Segoe UI" pitchFamily="34" charset="0"/>
+                <a:ea typeface="Segoe UI" pitchFamily="34" charset="-122"/>
+                <a:cs typeface="Segoe UI" pitchFamily="34" charset="-120"/>
+              </a:rPr>
+              <a:t>Localizare, acces, utilități</a:t>
             </a:r>
             <a:endParaRPr lang="en-US" sz="1300" dirty="0"/>
           </a:p>
@@ -5937,13 +6117,13 @@
             <a:r>
               <a:rPr lang="en-US" sz="1300" dirty="0">
                 <a:solidFill>
-                  <a:srgbClr val="1A2233"/>
-                </a:solidFill>
-                <a:latin typeface="Calibri" pitchFamily="34" charset="0"/>
-                <a:ea typeface="Calibri" pitchFamily="34" charset="-122"/>
-                <a:cs typeface="Calibri" pitchFamily="34" charset="-120"/>
-              </a:rPr>
-              <a:t>Suprafata, deschidere</a:t>
+                  <a:srgbClr val="1F2D45"/>
+                </a:solidFill>
+                <a:latin typeface="Segoe UI" pitchFamily="34" charset="0"/>
+                <a:ea typeface="Segoe UI" pitchFamily="34" charset="-122"/>
+                <a:cs typeface="Segoe UI" pitchFamily="34" charset="-120"/>
+              </a:rPr>
+              <a:t>Suprafață, deschidere</a:t>
             </a:r>
             <a:endParaRPr lang="en-US" sz="1300" dirty="0"/>
           </a:p>
@@ -5958,13 +6138,13 @@
             <a:r>
               <a:rPr lang="en-US" sz="1300" dirty="0">
                 <a:solidFill>
-                  <a:srgbClr val="1A2233"/>
-                </a:solidFill>
-                <a:latin typeface="Calibri" pitchFamily="34" charset="0"/>
-                <a:ea typeface="Calibri" pitchFamily="34" charset="-122"/>
-                <a:cs typeface="Calibri" pitchFamily="34" charset="-120"/>
-              </a:rPr>
-              <a:t>Inclinatie, tip teren</a:t>
+                  <a:srgbClr val="1F2D45"/>
+                </a:solidFill>
+                <a:latin typeface="Segoe UI" pitchFamily="34" charset="0"/>
+                <a:ea typeface="Segoe UI" pitchFamily="34" charset="-122"/>
+                <a:cs typeface="Segoe UI" pitchFamily="34" charset="-120"/>
+              </a:rPr>
+              <a:t>Înclinație, tip teren</a:t>
             </a:r>
             <a:endParaRPr lang="en-US" sz="1300" dirty="0"/>
           </a:p>
@@ -5979,11 +6159,11 @@
             <a:r>
               <a:rPr lang="en-US" sz="1300" dirty="0">
                 <a:solidFill>
-                  <a:srgbClr val="1A2233"/>
-                </a:solidFill>
-                <a:latin typeface="Calibri" pitchFamily="34" charset="0"/>
-                <a:ea typeface="Calibri" pitchFamily="34" charset="-122"/>
-                <a:cs typeface="Calibri" pitchFamily="34" charset="-120"/>
+                  <a:srgbClr val="1F2D45"/>
+                </a:solidFill>
+                <a:latin typeface="Segoe UI" pitchFamily="34" charset="0"/>
+                <a:ea typeface="Segoe UI" pitchFamily="34" charset="-122"/>
+                <a:cs typeface="Segoe UI" pitchFamily="34" charset="-120"/>
               </a:rPr>
               <a:t>Regim juridic / urbanism</a:t>
             </a:r>
@@ -5993,7 +6173,7 @@
       </p:sp>
       <p:sp>
         <p:nvSpPr>
-          <p:cNvPr id="16" name="Shape 14"/>
+          <p:cNvPr id="17" name="Shape 15"/>
           <p:cNvSpPr/>
           <p:nvPr/>
         </p:nvSpPr>
@@ -6010,14 +6190,14 @@
           </a:solidFill>
           <a:ln w="12700">
             <a:solidFill>
-              <a:srgbClr val="DDE3EE"/>
+              <a:srgbClr val="D7CDB4"/>
             </a:solidFill>
             <a:prstDash val="solid"/>
           </a:ln>
           <a:effectLst>
             <a:outerShdw sx="100000" sy="100000" kx="0" ky="0" algn="bl" rotWithShape="0" blurRad="88900" dist="38100" dir="8100000">
-              <a:srgbClr val="000000">
-                <a:alpha val="13000"/>
+              <a:srgbClr val="16263D">
+                <a:alpha val="12000"/>
               </a:srgbClr>
             </a:outerShdw>
           </a:effectLst>
@@ -6025,7 +6205,7 @@
       </p:sp>
       <p:sp>
         <p:nvSpPr>
-          <p:cNvPr id="17" name="Text 15"/>
+          <p:cNvPr id="18" name="Text 16"/>
           <p:cNvSpPr/>
           <p:nvPr/>
         </p:nvSpPr>
@@ -6050,13 +6230,13 @@
             <a:r>
               <a:rPr lang="en-US" sz="1450" b="1" dirty="0">
                 <a:solidFill>
-                  <a:srgbClr val="152A4E"/>
-                </a:solidFill>
-                <a:latin typeface="Calibri" pitchFamily="34" charset="0"/>
-                <a:ea typeface="Calibri" pitchFamily="34" charset="-122"/>
-                <a:cs typeface="Calibri" pitchFamily="34" charset="-120"/>
-              </a:rPr>
-              <a:t>Selectie: </a:t>
+                  <a:srgbClr val="7C3A1B"/>
+                </a:solidFill>
+                <a:latin typeface="Segoe UI" pitchFamily="34" charset="0"/>
+                <a:ea typeface="Segoe UI" pitchFamily="34" charset="-122"/>
+                <a:cs typeface="Segoe UI" pitchFamily="34" charset="-120"/>
+              </a:rPr>
+              <a:t>Selecție: </a:t>
             </a:r>
             <a:pPr indent="0" marL="0">
               <a:buNone/>
@@ -6064,13 +6244,13 @@
             <a:r>
               <a:rPr lang="en-US" sz="1450" dirty="0">
                 <a:solidFill>
-                  <a:srgbClr val="1A2233"/>
-                </a:solidFill>
-                <a:latin typeface="Calibri" pitchFamily="34" charset="0"/>
-                <a:ea typeface="Calibri" pitchFamily="34" charset="-122"/>
-                <a:cs typeface="Calibri" pitchFamily="34" charset="-120"/>
-              </a:rPr>
-              <a:t>comparabilul cu ajustarea bruta minima pe etapa de proprietate (oferta-&gt;tranzactie NU se contorizeaza).   </a:t>
+                  <a:srgbClr val="1F2D45"/>
+                </a:solidFill>
+                <a:latin typeface="Segoe UI" pitchFamily="34" charset="0"/>
+                <a:ea typeface="Segoe UI" pitchFamily="34" charset="-122"/>
+                <a:cs typeface="Segoe UI" pitchFamily="34" charset="-120"/>
+              </a:rPr>
+              <a:t>comparabilul cu ajustarea brută minimă pe etapa de proprietate (ofertă→tranzacție NU se contorizează).   </a:t>
             </a:r>
             <a:pPr indent="0" marL="0">
               <a:buNone/>
@@ -6078,11 +6258,11 @@
             <a:r>
               <a:rPr lang="en-US" sz="1450" b="1" dirty="0">
                 <a:solidFill>
-                  <a:srgbClr val="152A4E"/>
-                </a:solidFill>
-                <a:latin typeface="Calibri" pitchFamily="34" charset="0"/>
-                <a:ea typeface="Calibri" pitchFamily="34" charset="-122"/>
-                <a:cs typeface="Calibri" pitchFamily="34" charset="-120"/>
+                  <a:srgbClr val="7C3A1B"/>
+                </a:solidFill>
+                <a:latin typeface="Segoe UI" pitchFamily="34" charset="0"/>
+                <a:ea typeface="Segoe UI" pitchFamily="34" charset="-122"/>
+                <a:cs typeface="Segoe UI" pitchFamily="34" charset="-120"/>
               </a:rPr>
               <a:t>Valoarea terenului = </a:t>
             </a:r>
@@ -6092,13 +6272,13 @@
             <a:r>
               <a:rPr lang="en-US" sz="1450" dirty="0">
                 <a:solidFill>
-                  <a:srgbClr val="1A2233"/>
-                </a:solidFill>
-                <a:latin typeface="Calibri" pitchFamily="34" charset="0"/>
-                <a:ea typeface="Calibri" pitchFamily="34" charset="-122"/>
-                <a:cs typeface="Calibri" pitchFamily="34" charset="-120"/>
-              </a:rPr>
-              <a:t>pret/mp corectat al comparabilului ales × suprafata terenului.</a:t>
+                  <a:srgbClr val="1F2D45"/>
+                </a:solidFill>
+                <a:latin typeface="Segoe UI" pitchFamily="34" charset="0"/>
+                <a:ea typeface="Segoe UI" pitchFamily="34" charset="-122"/>
+                <a:cs typeface="Segoe UI" pitchFamily="34" charset="-120"/>
+              </a:rPr>
+              <a:t>preț/mp corectat al comparabilului ales × suprafața terenului.</a:t>
             </a:r>
             <a:endParaRPr lang="en-US" sz="1450" dirty="0"/>
           </a:p>
@@ -6106,7 +6286,7 @@
       </p:sp>
       <p:sp>
         <p:nvSpPr>
-          <p:cNvPr id="18" name="Text 16"/>
+          <p:cNvPr id="19" name="Text 17"/>
           <p:cNvSpPr/>
           <p:nvPr/>
         </p:nvSpPr>
@@ -6131,13 +6311,13 @@
             <a:r>
               <a:rPr lang="en-US" sz="900" dirty="0">
                 <a:solidFill>
-                  <a:srgbClr val="5C6679"/>
-                </a:solidFill>
-                <a:latin typeface="Calibri" pitchFamily="34" charset="0"/>
-                <a:ea typeface="Calibri" pitchFamily="34" charset="-122"/>
-                <a:cs typeface="Calibri" pitchFamily="34" charset="-120"/>
-              </a:rPr>
-              <a:t>Aplicatie de asistenta la evaluare  ·  casa + teren  ·  document pentru review</a:t>
+                  <a:srgbClr val="5A6270"/>
+                </a:solidFill>
+                <a:latin typeface="Segoe UI" pitchFamily="34" charset="0"/>
+                <a:ea typeface="Segoe UI" pitchFamily="34" charset="-122"/>
+                <a:cs typeface="Segoe UI" pitchFamily="34" charset="-120"/>
+              </a:rPr>
+              <a:t>Registru de evaluare ANEVAR  ·  aplicație locală offline  ·  document pentru review</a:t>
             </a:r>
             <a:endParaRPr lang="en-US" sz="900" dirty="0"/>
           </a:p>
@@ -6145,7 +6325,7 @@
       </p:sp>
       <p:sp>
         <p:nvSpPr>
-          <p:cNvPr id="19" name="Text 17"/>
+          <p:cNvPr id="20" name="Text 18"/>
           <p:cNvSpPr/>
           <p:nvPr/>
         </p:nvSpPr>
@@ -6170,11 +6350,11 @@
             <a:r>
               <a:rPr lang="en-US" sz="900" dirty="0">
                 <a:solidFill>
-                  <a:srgbClr val="5C6679"/>
-                </a:solidFill>
-                <a:latin typeface="Calibri" pitchFamily="34" charset="0"/>
-                <a:ea typeface="Calibri" pitchFamily="34" charset="-122"/>
-                <a:cs typeface="Calibri" pitchFamily="34" charset="-120"/>
+                  <a:srgbClr val="5A6270"/>
+                </a:solidFill>
+                <a:latin typeface="Segoe UI" pitchFamily="34" charset="0"/>
+                <a:ea typeface="Segoe UI" pitchFamily="34" charset="-122"/>
+                <a:cs typeface="Segoe UI" pitchFamily="34" charset="-120"/>
               </a:rPr>
               <a:t>4</a:t>
             </a:r>
@@ -6196,7 +6376,7 @@
     <p:bg>
       <p:bgPr>
         <a:solidFill>
-          <a:srgbClr val="F5F7FB"/>
+          <a:srgbClr val="F2EEE2"/>
         </a:solidFill>
       </p:bgPr>
     </p:bg>
@@ -6229,7 +6409,7 @@
             <a:avLst/>
           </a:prstGeom>
           <a:solidFill>
-            <a:srgbClr val="D9A227"/>
+            <a:srgbClr val="9D4A25"/>
           </a:solidFill>
           <a:ln/>
         </p:spPr>
@@ -6261,13 +6441,13 @@
             <a:r>
               <a:rPr lang="en-US" sz="1200" b="1" spc="300" kern="0" dirty="0">
                 <a:solidFill>
-                  <a:srgbClr val="D9A227"/>
-                </a:solidFill>
-                <a:latin typeface="Calibri" pitchFamily="34" charset="0"/>
-                <a:ea typeface="Calibri" pitchFamily="34" charset="-122"/>
-                <a:cs typeface="Calibri" pitchFamily="34" charset="-120"/>
-              </a:rPr>
-              <a:t>METODOLOGIA · CASA SI COST</a:t>
+                  <a:srgbClr val="9D4A25"/>
+                </a:solidFill>
+                <a:latin typeface="Segoe UI" pitchFamily="34" charset="0"/>
+                <a:ea typeface="Segoe UI" pitchFamily="34" charset="-122"/>
+                <a:cs typeface="Segoe UI" pitchFamily="34" charset="-120"/>
+              </a:rPr>
+              <a:t>METODOLOGIA · CASĂ, COST, VENIT</a:t>
             </a:r>
             <a:endParaRPr lang="en-US" sz="1200" dirty="0"/>
           </a:p>
@@ -6300,13 +6480,13 @@
             <a:r>
               <a:rPr lang="en-US" sz="3000" b="1" dirty="0">
                 <a:solidFill>
-                  <a:srgbClr val="152A4E"/>
+                  <a:srgbClr val="16263D"/>
                 </a:solidFill>
                 <a:latin typeface="Georgia" pitchFamily="34" charset="0"/>
                 <a:ea typeface="Georgia" pitchFamily="34" charset="-122"/>
                 <a:cs typeface="Georgia" pitchFamily="34" charset="-120"/>
               </a:rPr>
-              <a:t>Grila pe pret total + abordarea prin cost</a:t>
+              <a:t>Comparație pe preț total · cost · venit</a:t>
             </a:r>
             <a:endParaRPr lang="en-US" sz="3000" dirty="0"/>
           </a:p>
@@ -6315,6 +6495,26 @@
       <p:sp>
         <p:nvSpPr>
           <p:cNvPr id="5" name="Shape 3"/>
+          <p:cNvSpPr/>
+          <p:nvPr/>
+        </p:nvSpPr>
+        <p:spPr>
+          <a:xfrm>
+            <a:off x="777240" y="1335024"/>
+            <a:ext cx="10607040" cy="22860"/>
+          </a:xfrm>
+          <a:prstGeom prst="rect">
+            <a:avLst/>
+          </a:prstGeom>
+          <a:solidFill>
+            <a:srgbClr val="B08D57"/>
+          </a:solidFill>
+          <a:ln/>
+        </p:spPr>
+      </p:sp>
+      <p:sp>
+        <p:nvSpPr>
+          <p:cNvPr id="6" name="Shape 4"/>
           <p:cNvSpPr/>
           <p:nvPr/>
         </p:nvSpPr>
@@ -6327,18 +6527,18 @@
             <a:avLst/>
           </a:prstGeom>
           <a:solidFill>
-            <a:srgbClr val="FFFFFF"/>
+            <a:srgbClr val="FBF8F0"/>
           </a:solidFill>
           <a:ln w="12700">
             <a:solidFill>
-              <a:srgbClr val="DDE3EE"/>
+              <a:srgbClr val="D7CDB4"/>
             </a:solidFill>
             <a:prstDash val="solid"/>
           </a:ln>
           <a:effectLst>
             <a:outerShdw sx="100000" sy="100000" kx="0" ky="0" algn="bl" rotWithShape="0" blurRad="88900" dist="38100" dir="8100000">
-              <a:srgbClr val="000000">
-                <a:alpha val="13000"/>
+              <a:srgbClr val="16263D">
+                <a:alpha val="12000"/>
               </a:srgbClr>
             </a:outerShdw>
           </a:effectLst>
@@ -6346,7 +6546,7 @@
       </p:sp>
       <p:sp>
         <p:nvSpPr>
-          <p:cNvPr id="6" name="Text 4"/>
+          <p:cNvPr id="7" name="Text 5"/>
           <p:cNvSpPr/>
           <p:nvPr/>
         </p:nvSpPr>
@@ -6371,13 +6571,13 @@
             <a:r>
               <a:rPr lang="en-US" sz="1800" b="1" dirty="0">
                 <a:solidFill>
-                  <a:srgbClr val="152A4E"/>
+                  <a:srgbClr val="16263D"/>
                 </a:solidFill>
                 <a:latin typeface="Georgia" pitchFamily="34" charset="0"/>
                 <a:ea typeface="Georgia" pitchFamily="34" charset="-122"/>
                 <a:cs typeface="Georgia" pitchFamily="34" charset="-120"/>
               </a:rPr>
-              <a:t>Casa — grila pe pret total</a:t>
+              <a:t>Casă — grilă pe preț total</a:t>
             </a:r>
             <a:endParaRPr lang="en-US" sz="1800" dirty="0"/>
           </a:p>
@@ -6385,7 +6585,7 @@
       </p:sp>
       <p:sp>
         <p:nvSpPr>
-          <p:cNvPr id="7" name="Text 5"/>
+          <p:cNvPr id="8" name="Text 6"/>
           <p:cNvSpPr/>
           <p:nvPr/>
         </p:nvSpPr>
@@ -6414,13 +6614,13 @@
             <a:r>
               <a:rPr lang="en-US" sz="1350" dirty="0">
                 <a:solidFill>
-                  <a:srgbClr val="1A2233"/>
-                </a:solidFill>
-                <a:latin typeface="Calibri" pitchFamily="34" charset="0"/>
-                <a:ea typeface="Calibri" pitchFamily="34" charset="-122"/>
-                <a:cs typeface="Calibri" pitchFamily="34" charset="-120"/>
-              </a:rPr>
-              <a:t>Aceleasi doua etape (tranzactie secvential + proprietate aditiv), dar pe pretul TOTAL.</a:t>
+                  <a:srgbClr val="1F2D45"/>
+                </a:solidFill>
+                <a:latin typeface="Segoe UI" pitchFamily="34" charset="0"/>
+                <a:ea typeface="Segoe UI" pitchFamily="34" charset="-122"/>
+                <a:cs typeface="Segoe UI" pitchFamily="34" charset="-120"/>
+              </a:rPr>
+              <a:t>Aceleași două etape (tranzacție secvențial + proprietate aditiv), dar pe prețul TOTAL.</a:t>
             </a:r>
             <a:endParaRPr lang="en-US" sz="1350" dirty="0"/>
           </a:p>
@@ -6435,13 +6635,13 @@
             <a:r>
               <a:rPr lang="en-US" sz="1350" dirty="0">
                 <a:solidFill>
-                  <a:srgbClr val="1A2233"/>
-                </a:solidFill>
-                <a:latin typeface="Calibri" pitchFamily="34" charset="0"/>
-                <a:ea typeface="Calibri" pitchFamily="34" charset="-122"/>
-                <a:cs typeface="Calibri" pitchFamily="34" charset="-120"/>
-              </a:rPr>
-              <a:t>Diferenta de marime se trateaza ca ajustare valorica de arie utila (pret unitar × diferenta mp).</a:t>
+                  <a:srgbClr val="1F2D45"/>
+                </a:solidFill>
+                <a:latin typeface="Segoe UI" pitchFamily="34" charset="0"/>
+                <a:ea typeface="Segoe UI" pitchFamily="34" charset="-122"/>
+                <a:cs typeface="Segoe UI" pitchFamily="34" charset="-120"/>
+              </a:rPr>
+              <a:t>Diferența de mărime se tratează ca ajustare valorică de arie utilă (preț unitar × diferență mp).</a:t>
             </a:r>
             <a:endParaRPr lang="en-US" sz="1350" dirty="0"/>
           </a:p>
@@ -6456,13 +6656,13 @@
             <a:r>
               <a:rPr lang="en-US" sz="1350" dirty="0">
                 <a:solidFill>
-                  <a:srgbClr val="1A2233"/>
-                </a:solidFill>
-                <a:latin typeface="Calibri" pitchFamily="34" charset="0"/>
-                <a:ea typeface="Calibri" pitchFamily="34" charset="-122"/>
-                <a:cs typeface="Calibri" pitchFamily="34" charset="-120"/>
-              </a:rPr>
-              <a:t>Fiecare comparabil este astfel 'adus' la subiect.</a:t>
+                  <a:srgbClr val="1F2D45"/>
+                </a:solidFill>
+                <a:latin typeface="Segoe UI" pitchFamily="34" charset="0"/>
+                <a:ea typeface="Segoe UI" pitchFamily="34" charset="-122"/>
+                <a:cs typeface="Segoe UI" pitchFamily="34" charset="-120"/>
+              </a:rPr>
+              <a:t>Fiecare comparabil este astfel „adus” la subiect.</a:t>
             </a:r>
             <a:endParaRPr lang="en-US" sz="1350" dirty="0"/>
           </a:p>
@@ -6477,13 +6677,13 @@
             <a:r>
               <a:rPr lang="en-US" sz="1350" dirty="0">
                 <a:solidFill>
-                  <a:srgbClr val="1A2233"/>
-                </a:solidFill>
-                <a:latin typeface="Calibri" pitchFamily="34" charset="0"/>
-                <a:ea typeface="Calibri" pitchFamily="34" charset="-122"/>
-                <a:cs typeface="Calibri" pitchFamily="34" charset="-120"/>
-              </a:rPr>
-              <a:t>Valoarea prin comparatie = pretul total corectat al comparabilului ales.</a:t>
+                  <a:srgbClr val="1F2D45"/>
+                </a:solidFill>
+                <a:latin typeface="Segoe UI" pitchFamily="34" charset="0"/>
+                <a:ea typeface="Segoe UI" pitchFamily="34" charset="-122"/>
+                <a:cs typeface="Segoe UI" pitchFamily="34" charset="-120"/>
+              </a:rPr>
+              <a:t>Valoarea prin comparație = prețul total corectat al comparabilului ales.</a:t>
             </a:r>
             <a:endParaRPr lang="en-US" sz="1350" dirty="0"/>
           </a:p>
@@ -6491,7 +6691,7 @@
       </p:sp>
       <p:sp>
         <p:nvSpPr>
-          <p:cNvPr id="8" name="Shape 6"/>
+          <p:cNvPr id="9" name="Shape 7"/>
           <p:cNvSpPr/>
           <p:nvPr/>
         </p:nvSpPr>
@@ -6504,18 +6704,18 @@
             <a:avLst/>
           </a:prstGeom>
           <a:solidFill>
-            <a:srgbClr val="FFFFFF"/>
+            <a:srgbClr val="FBF8F0"/>
           </a:solidFill>
           <a:ln w="12700">
             <a:solidFill>
-              <a:srgbClr val="DDE3EE"/>
+              <a:srgbClr val="D7CDB4"/>
             </a:solidFill>
             <a:prstDash val="solid"/>
           </a:ln>
           <a:effectLst>
             <a:outerShdw sx="100000" sy="100000" kx="0" ky="0" algn="bl" rotWithShape="0" blurRad="88900" dist="38100" dir="8100000">
-              <a:srgbClr val="000000">
-                <a:alpha val="13000"/>
+              <a:srgbClr val="16263D">
+                <a:alpha val="12000"/>
               </a:srgbClr>
             </a:outerShdw>
           </a:effectLst>
@@ -6523,7 +6723,7 @@
       </p:sp>
       <p:sp>
         <p:nvSpPr>
-          <p:cNvPr id="9" name="Text 7"/>
+          <p:cNvPr id="10" name="Text 8"/>
           <p:cNvSpPr/>
           <p:nvPr/>
         </p:nvSpPr>
@@ -6548,13 +6748,13 @@
             <a:r>
               <a:rPr lang="en-US" sz="1800" b="1" dirty="0">
                 <a:solidFill>
-                  <a:srgbClr val="152A4E"/>
+                  <a:srgbClr val="16263D"/>
                 </a:solidFill>
                 <a:latin typeface="Georgia" pitchFamily="34" charset="0"/>
                 <a:ea typeface="Georgia" pitchFamily="34" charset="-122"/>
                 <a:cs typeface="Georgia" pitchFamily="34" charset="-120"/>
               </a:rPr>
-              <a:t>Abordarea prin cost (CIN)</a:t>
+              <a:t>Cost (CIN) și venit</a:t>
             </a:r>
             <a:endParaRPr lang="en-US" sz="1800" dirty="0"/>
           </a:p>
@@ -6562,7 +6762,7 @@
       </p:sp>
       <p:sp>
         <p:nvSpPr>
-          <p:cNvPr id="10" name="Text 8"/>
+          <p:cNvPr id="11" name="Text 9"/>
           <p:cNvSpPr/>
           <p:nvPr/>
         </p:nvSpPr>
@@ -6589,17 +6789,17 @@
               <a:buChar char="•"/>
             </a:pPr>
             <a:r>
-              <a:rPr lang="en-US" sz="1350" dirty="0">
-                <a:solidFill>
-                  <a:srgbClr val="1A2233"/>
-                </a:solidFill>
-                <a:latin typeface="Calibri" pitchFamily="34" charset="0"/>
-                <a:ea typeface="Calibri" pitchFamily="34" charset="-122"/>
-                <a:cs typeface="Calibri" pitchFamily="34" charset="-120"/>
-              </a:rPr>
-              <a:t>Cost de inlocuire net, segregat pe elemente (catalog IROVAL).</a:t>
-            </a:r>
-            <a:endParaRPr lang="en-US" sz="1350" dirty="0"/>
+              <a:rPr lang="en-US" sz="1300" dirty="0">
+                <a:solidFill>
+                  <a:srgbClr val="1F2D45"/>
+                </a:solidFill>
+                <a:latin typeface="Segoe UI" pitchFamily="34" charset="0"/>
+                <a:ea typeface="Segoe UI" pitchFamily="34" charset="-122"/>
+                <a:cs typeface="Segoe UI" pitchFamily="34" charset="-120"/>
+              </a:rPr>
+              <a:t>Cost de înlocuire net, segregat pe elemente (catalog IROVAL).</a:t>
+            </a:r>
+            <a:endParaRPr lang="en-US" sz="1300" dirty="0"/>
           </a:p>
           <a:p>
             <a:pPr marL="342900" indent="-342900">
@@ -6610,17 +6810,17 @@
               <a:buChar char="•"/>
             </a:pPr>
             <a:r>
-              <a:rPr lang="en-US" sz="1350" dirty="0">
-                <a:solidFill>
-                  <a:srgbClr val="1A2233"/>
-                </a:solidFill>
-                <a:latin typeface="Calibri" pitchFamily="34" charset="0"/>
-                <a:ea typeface="Calibri" pitchFamily="34" charset="-122"/>
-                <a:cs typeface="Calibri" pitchFamily="34" charset="-120"/>
-              </a:rPr>
-              <a:t>CIN = CIB × (1-depr. fizica) × (1-depr. functionala) × (1-depr. externa).</a:t>
-            </a:r>
-            <a:endParaRPr lang="en-US" sz="1350" dirty="0"/>
+              <a:rPr lang="en-US" sz="1300" dirty="0">
+                <a:solidFill>
+                  <a:srgbClr val="1F2D45"/>
+                </a:solidFill>
+                <a:latin typeface="Segoe UI" pitchFamily="34" charset="0"/>
+                <a:ea typeface="Segoe UI" pitchFamily="34" charset="-122"/>
+                <a:cs typeface="Segoe UI" pitchFamily="34" charset="-120"/>
+              </a:rPr>
+              <a:t>CIN = CIB × (1 − depr. fizică) × (1 − funcțională) × (1 − externă); valoare = CIN + teren.</a:t>
+            </a:r>
+            <a:endParaRPr lang="en-US" sz="1300" dirty="0"/>
           </a:p>
           <a:p>
             <a:pPr marL="342900" indent="-342900">
@@ -6631,17 +6831,17 @@
               <a:buChar char="•"/>
             </a:pPr>
             <a:r>
-              <a:rPr lang="en-US" sz="1350" dirty="0">
-                <a:solidFill>
-                  <a:srgbClr val="1A2233"/>
-                </a:solidFill>
-                <a:latin typeface="Calibri" pitchFamily="34" charset="0"/>
-                <a:ea typeface="Calibri" pitchFamily="34" charset="-122"/>
-                <a:cs typeface="Calibri" pitchFamily="34" charset="-120"/>
-              </a:rPr>
-              <a:t>Depreciere fizica interpolata dupa varsta ponderata.</a:t>
-            </a:r>
-            <a:endParaRPr lang="en-US" sz="1350" dirty="0"/>
+              <a:rPr lang="en-US" sz="1300" dirty="0">
+                <a:solidFill>
+                  <a:srgbClr val="1F2D45"/>
+                </a:solidFill>
+                <a:latin typeface="Segoe UI" pitchFamily="34" charset="0"/>
+                <a:ea typeface="Segoe UI" pitchFamily="34" charset="-122"/>
+                <a:cs typeface="Segoe UI" pitchFamily="34" charset="-120"/>
+              </a:rPr>
+              <a:t>Venit: capitalizare directă (VBP din grila de chirii) sau DCF (fluxuri actualizate + valoare reziduală).</a:t>
+            </a:r>
+            <a:endParaRPr lang="en-US" sz="1300" dirty="0"/>
           </a:p>
           <a:p>
             <a:pPr marL="342900" indent="-342900">
@@ -6652,17 +6852,17 @@
               <a:buChar char="•"/>
             </a:pPr>
             <a:r>
-              <a:rPr lang="en-US" sz="1350" dirty="0">
-                <a:solidFill>
-                  <a:srgbClr val="1A2233"/>
-                </a:solidFill>
-                <a:latin typeface="Calibri" pitchFamily="34" charset="0"/>
-                <a:ea typeface="Calibri" pitchFamily="34" charset="-122"/>
-                <a:cs typeface="Calibri" pitchFamily="34" charset="-120"/>
-              </a:rPr>
-              <a:t>Valoare prin cost = CIN + valoarea terenului.</a:t>
-            </a:r>
-            <a:endParaRPr lang="en-US" sz="1350" dirty="0"/>
+              <a:rPr lang="en-US" sz="1300" dirty="0">
+                <a:solidFill>
+                  <a:srgbClr val="1F2D45"/>
+                </a:solidFill>
+                <a:latin typeface="Segoe UI" pitchFamily="34" charset="0"/>
+                <a:ea typeface="Segoe UI" pitchFamily="34" charset="-122"/>
+                <a:cs typeface="Segoe UI" pitchFamily="34" charset="-120"/>
+              </a:rPr>
+              <a:t>Reconciliere (cost / comparație / venit) + alocare: construcții = proprietate − teren.</a:t>
+            </a:r>
+            <a:endParaRPr lang="en-US" sz="1300" dirty="0"/>
           </a:p>
           <a:p>
             <a:pPr marL="342900" indent="-342900">
@@ -6673,23 +6873,23 @@
               <a:buChar char="•"/>
             </a:pPr>
             <a:r>
-              <a:rPr lang="en-US" sz="1350" dirty="0">
-                <a:solidFill>
-                  <a:srgbClr val="1A2233"/>
-                </a:solidFill>
-                <a:latin typeface="Calibri" pitchFamily="34" charset="0"/>
-                <a:ea typeface="Calibri" pitchFamily="34" charset="-122"/>
-                <a:cs typeface="Calibri" pitchFamily="34" charset="-120"/>
-              </a:rPr>
-              <a:t>Reconciliere (piata / cost / ponderata) + alocare: constructii = proprietate - teren.</a:t>
-            </a:r>
-            <a:endParaRPr lang="en-US" sz="1350" dirty="0"/>
-          </a:p>
-        </p:txBody>
-      </p:sp>
-      <p:sp>
-        <p:nvSpPr>
-          <p:cNvPr id="11" name="Text 9"/>
+              <a:rPr lang="en-US" sz="1300" dirty="0">
+                <a:solidFill>
+                  <a:srgbClr val="1F2D45"/>
+                </a:solidFill>
+                <a:latin typeface="Segoe UI" pitchFamily="34" charset="0"/>
+                <a:ea typeface="Segoe UI" pitchFamily="34" charset="-122"/>
+                <a:cs typeface="Segoe UI" pitchFamily="34" charset="-120"/>
+              </a:rPr>
+              <a:t>Conform SEV 103 „Abordări” și SEV 105 „Modele de evaluare”.</a:t>
+            </a:r>
+            <a:endParaRPr lang="en-US" sz="1300" dirty="0"/>
+          </a:p>
+        </p:txBody>
+      </p:sp>
+      <p:sp>
+        <p:nvSpPr>
+          <p:cNvPr id="12" name="Text 10"/>
           <p:cNvSpPr/>
           <p:nvPr/>
         </p:nvSpPr>
@@ -6714,13 +6914,13 @@
             <a:r>
               <a:rPr lang="en-US" sz="900" dirty="0">
                 <a:solidFill>
-                  <a:srgbClr val="5C6679"/>
-                </a:solidFill>
-                <a:latin typeface="Calibri" pitchFamily="34" charset="0"/>
-                <a:ea typeface="Calibri" pitchFamily="34" charset="-122"/>
-                <a:cs typeface="Calibri" pitchFamily="34" charset="-120"/>
-              </a:rPr>
-              <a:t>Aplicatie de asistenta la evaluare  ·  casa + teren  ·  document pentru review</a:t>
+                  <a:srgbClr val="5A6270"/>
+                </a:solidFill>
+                <a:latin typeface="Segoe UI" pitchFamily="34" charset="0"/>
+                <a:ea typeface="Segoe UI" pitchFamily="34" charset="-122"/>
+                <a:cs typeface="Segoe UI" pitchFamily="34" charset="-120"/>
+              </a:rPr>
+              <a:t>Registru de evaluare ANEVAR  ·  aplicație locală offline  ·  document pentru review</a:t>
             </a:r>
             <a:endParaRPr lang="en-US" sz="900" dirty="0"/>
           </a:p>
@@ -6728,7 +6928,7 @@
       </p:sp>
       <p:sp>
         <p:nvSpPr>
-          <p:cNvPr id="12" name="Text 10"/>
+          <p:cNvPr id="13" name="Text 11"/>
           <p:cNvSpPr/>
           <p:nvPr/>
         </p:nvSpPr>
@@ -6753,11 +6953,11 @@
             <a:r>
               <a:rPr lang="en-US" sz="900" dirty="0">
                 <a:solidFill>
-                  <a:srgbClr val="5C6679"/>
-                </a:solidFill>
-                <a:latin typeface="Calibri" pitchFamily="34" charset="0"/>
-                <a:ea typeface="Calibri" pitchFamily="34" charset="-122"/>
-                <a:cs typeface="Calibri" pitchFamily="34" charset="-120"/>
+                  <a:srgbClr val="5A6270"/>
+                </a:solidFill>
+                <a:latin typeface="Segoe UI" pitchFamily="34" charset="0"/>
+                <a:ea typeface="Segoe UI" pitchFamily="34" charset="-122"/>
+                <a:cs typeface="Segoe UI" pitchFamily="34" charset="-120"/>
               </a:rPr>
               <a:t>5</a:t>
             </a:r>
@@ -6779,7 +6979,7 @@
     <p:bg>
       <p:bgPr>
         <a:solidFill>
-          <a:srgbClr val="152A4E"/>
+          <a:srgbClr val="16263D"/>
         </a:solidFill>
       </p:bgPr>
     </p:bg>
@@ -6812,7 +7012,7 @@
             <a:avLst/>
           </a:prstGeom>
           <a:solidFill>
-            <a:srgbClr val="D9A227"/>
+            <a:srgbClr val="D9C08A"/>
           </a:solidFill>
           <a:ln/>
         </p:spPr>
@@ -6844,11 +7044,11 @@
             <a:r>
               <a:rPr lang="en-US" sz="1200" b="1" spc="300" kern="0" dirty="0">
                 <a:solidFill>
-                  <a:srgbClr val="D9A227"/>
-                </a:solidFill>
-                <a:latin typeface="Calibri" pitchFamily="34" charset="0"/>
-                <a:ea typeface="Calibri" pitchFamily="34" charset="-122"/>
-                <a:cs typeface="Calibri" pitchFamily="34" charset="-120"/>
+                  <a:srgbClr val="D9C08A"/>
+                </a:solidFill>
+                <a:latin typeface="Segoe UI" pitchFamily="34" charset="0"/>
+                <a:ea typeface="Segoe UI" pitchFamily="34" charset="-122"/>
+                <a:cs typeface="Segoe UI" pitchFamily="34" charset="-120"/>
               </a:rPr>
               <a:t>VALIDARE</a:t>
             </a:r>
@@ -6922,11 +7122,11 @@
             <a:r>
               <a:rPr lang="en-US" sz="1500" dirty="0">
                 <a:solidFill>
-                  <a:srgbClr val="CFE0F5"/>
-                </a:solidFill>
-                <a:latin typeface="Calibri" pitchFamily="34" charset="0"/>
-                <a:ea typeface="Calibri" pitchFamily="34" charset="-122"/>
-                <a:cs typeface="Calibri" pitchFamily="34" charset="-120"/>
+                  <a:srgbClr val="E9E0CC"/>
+                </a:solidFill>
+                <a:latin typeface="Segoe UI" pitchFamily="34" charset="0"/>
+                <a:ea typeface="Segoe UI" pitchFamily="34" charset="-122"/>
+                <a:cs typeface="Segoe UI" pitchFamily="34" charset="-120"/>
               </a:rPr>
               <a:t>Valorile de teren din patru dosare reale, reproduse la cent (EUR):</a:t>
             </a:r>
@@ -6949,11 +7149,11 @@
             <a:avLst/>
           </a:prstGeom>
           <a:solidFill>
-            <a:srgbClr val="1E3A66"/>
+            <a:srgbClr val="21314E"/>
           </a:solidFill>
           <a:ln w="12700">
             <a:solidFill>
-              <a:srgbClr val="D9A227"/>
+              <a:srgbClr val="B08D57"/>
             </a:solidFill>
             <a:prstDash val="solid"/>
           </a:ln>
@@ -6984,9 +7184,9 @@
               <a:buNone/>
             </a:pPr>
             <a:r>
-              <a:rPr lang="en-US" sz="4000" b="1" dirty="0">
-                <a:solidFill>
-                  <a:srgbClr val="D9A227"/>
+              <a:rPr lang="en-US" sz="3800" b="1" dirty="0">
+                <a:solidFill>
+                  <a:srgbClr val="D9C08A"/>
                 </a:solidFill>
                 <a:latin typeface="Georgia" pitchFamily="34" charset="0"/>
                 <a:ea typeface="Georgia" pitchFamily="34" charset="-122"/>
@@ -6994,7 +7194,7 @@
               </a:rPr>
               <a:t>44.000</a:t>
             </a:r>
-            <a:endParaRPr lang="en-US" sz="4000" dirty="0"/>
+            <a:endParaRPr lang="en-US" sz="3800" dirty="0"/>
           </a:p>
         </p:txBody>
       </p:sp>
@@ -7025,11 +7225,11 @@
             <a:r>
               <a:rPr lang="en-US" sz="1200" dirty="0">
                 <a:solidFill>
-                  <a:srgbClr val="CFE0F5"/>
-                </a:solidFill>
-                <a:latin typeface="Calibri" pitchFamily="34" charset="0"/>
-                <a:ea typeface="Calibri" pitchFamily="34" charset="-122"/>
-                <a:cs typeface="Calibri" pitchFamily="34" charset="-120"/>
+                  <a:srgbClr val="E9E0CC"/>
+                </a:solidFill>
+                <a:latin typeface="Segoe UI" pitchFamily="34" charset="0"/>
+                <a:ea typeface="Segoe UI" pitchFamily="34" charset="-122"/>
+                <a:cs typeface="Segoe UI" pitchFamily="34" charset="-120"/>
               </a:rPr>
               <a:t>EUR</a:t>
             </a:r>
@@ -7066,11 +7266,11 @@
                 <a:solidFill>
                   <a:srgbClr val="FFFFFF"/>
                 </a:solidFill>
-                <a:latin typeface="Calibri" pitchFamily="34" charset="0"/>
-                <a:ea typeface="Calibri" pitchFamily="34" charset="-122"/>
-                <a:cs typeface="Calibri" pitchFamily="34" charset="-120"/>
-              </a:rPr>
-              <a:t>Maneciu</a:t>
+                <a:latin typeface="Segoe UI" pitchFamily="34" charset="0"/>
+                <a:ea typeface="Segoe UI" pitchFamily="34" charset="-122"/>
+                <a:cs typeface="Segoe UI" pitchFamily="34" charset="-120"/>
+              </a:rPr>
+              <a:t>Mâneciu</a:t>
             </a:r>
             <a:endParaRPr lang="en-US" sz="1500" dirty="0"/>
           </a:p>
@@ -7091,11 +7291,11 @@
             <a:avLst/>
           </a:prstGeom>
           <a:solidFill>
-            <a:srgbClr val="1E3A66"/>
+            <a:srgbClr val="21314E"/>
           </a:solidFill>
           <a:ln w="12700">
             <a:solidFill>
-              <a:srgbClr val="D9A227"/>
+              <a:srgbClr val="B08D57"/>
             </a:solidFill>
             <a:prstDash val="solid"/>
           </a:ln>
@@ -7126,9 +7326,9 @@
               <a:buNone/>
             </a:pPr>
             <a:r>
-              <a:rPr lang="en-US" sz="4000" b="1" dirty="0">
-                <a:solidFill>
-                  <a:srgbClr val="D9A227"/>
+              <a:rPr lang="en-US" sz="3800" b="1" dirty="0">
+                <a:solidFill>
+                  <a:srgbClr val="D9C08A"/>
                 </a:solidFill>
                 <a:latin typeface="Georgia" pitchFamily="34" charset="0"/>
                 <a:ea typeface="Georgia" pitchFamily="34" charset="-122"/>
@@ -7136,7 +7336,7 @@
               </a:rPr>
               <a:t>78.000</a:t>
             </a:r>
-            <a:endParaRPr lang="en-US" sz="4000" dirty="0"/>
+            <a:endParaRPr lang="en-US" sz="3800" dirty="0"/>
           </a:p>
         </p:txBody>
       </p:sp>
@@ -7167,11 +7367,11 @@
             <a:r>
               <a:rPr lang="en-US" sz="1200" dirty="0">
                 <a:solidFill>
-                  <a:srgbClr val="CFE0F5"/>
-                </a:solidFill>
-                <a:latin typeface="Calibri" pitchFamily="34" charset="0"/>
-                <a:ea typeface="Calibri" pitchFamily="34" charset="-122"/>
-                <a:cs typeface="Calibri" pitchFamily="34" charset="-120"/>
+                  <a:srgbClr val="E9E0CC"/>
+                </a:solidFill>
+                <a:latin typeface="Segoe UI" pitchFamily="34" charset="0"/>
+                <a:ea typeface="Segoe UI" pitchFamily="34" charset="-122"/>
+                <a:cs typeface="Segoe UI" pitchFamily="34" charset="-120"/>
               </a:rPr>
               <a:t>EUR</a:t>
             </a:r>
@@ -7208,11 +7408,11 @@
                 <a:solidFill>
                   <a:srgbClr val="FFFFFF"/>
                 </a:solidFill>
-                <a:latin typeface="Calibri" pitchFamily="34" charset="0"/>
-                <a:ea typeface="Calibri" pitchFamily="34" charset="-122"/>
-                <a:cs typeface="Calibri" pitchFamily="34" charset="-120"/>
-              </a:rPr>
-              <a:t>Brasov</a:t>
+                <a:latin typeface="Segoe UI" pitchFamily="34" charset="0"/>
+                <a:ea typeface="Segoe UI" pitchFamily="34" charset="-122"/>
+                <a:cs typeface="Segoe UI" pitchFamily="34" charset="-120"/>
+              </a:rPr>
+              <a:t>Brașov</a:t>
             </a:r>
             <a:endParaRPr lang="en-US" sz="1500" dirty="0"/>
           </a:p>
@@ -7233,11 +7433,11 @@
             <a:avLst/>
           </a:prstGeom>
           <a:solidFill>
-            <a:srgbClr val="1E3A66"/>
+            <a:srgbClr val="21314E"/>
           </a:solidFill>
           <a:ln w="12700">
             <a:solidFill>
-              <a:srgbClr val="D9A227"/>
+              <a:srgbClr val="B08D57"/>
             </a:solidFill>
             <a:prstDash val="solid"/>
           </a:ln>
@@ -7268,9 +7468,9 @@
               <a:buNone/>
             </a:pPr>
             <a:r>
-              <a:rPr lang="en-US" sz="4000" b="1" dirty="0">
-                <a:solidFill>
-                  <a:srgbClr val="D9A227"/>
+              <a:rPr lang="en-US" sz="3800" b="1" dirty="0">
+                <a:solidFill>
+                  <a:srgbClr val="D9C08A"/>
                 </a:solidFill>
                 <a:latin typeface="Georgia" pitchFamily="34" charset="0"/>
                 <a:ea typeface="Georgia" pitchFamily="34" charset="-122"/>
@@ -7278,7 +7478,7 @@
               </a:rPr>
               <a:t>34.000</a:t>
             </a:r>
-            <a:endParaRPr lang="en-US" sz="4000" dirty="0"/>
+            <a:endParaRPr lang="en-US" sz="3800" dirty="0"/>
           </a:p>
         </p:txBody>
       </p:sp>
@@ -7309,11 +7509,11 @@
             <a:r>
               <a:rPr lang="en-US" sz="1200" dirty="0">
                 <a:solidFill>
-                  <a:srgbClr val="CFE0F5"/>
-                </a:solidFill>
-                <a:latin typeface="Calibri" pitchFamily="34" charset="0"/>
-                <a:ea typeface="Calibri" pitchFamily="34" charset="-122"/>
-                <a:cs typeface="Calibri" pitchFamily="34" charset="-120"/>
+                  <a:srgbClr val="E9E0CC"/>
+                </a:solidFill>
+                <a:latin typeface="Segoe UI" pitchFamily="34" charset="0"/>
+                <a:ea typeface="Segoe UI" pitchFamily="34" charset="-122"/>
+                <a:cs typeface="Segoe UI" pitchFamily="34" charset="-120"/>
               </a:rPr>
               <a:t>EUR</a:t>
             </a:r>
@@ -7350,11 +7550,11 @@
                 <a:solidFill>
                   <a:srgbClr val="FFFFFF"/>
                 </a:solidFill>
-                <a:latin typeface="Calibri" pitchFamily="34" charset="0"/>
-                <a:ea typeface="Calibri" pitchFamily="34" charset="-122"/>
-                <a:cs typeface="Calibri" pitchFamily="34" charset="-120"/>
-              </a:rPr>
-              <a:t>Busteni</a:t>
+                <a:latin typeface="Segoe UI" pitchFamily="34" charset="0"/>
+                <a:ea typeface="Segoe UI" pitchFamily="34" charset="-122"/>
+                <a:cs typeface="Segoe UI" pitchFamily="34" charset="-120"/>
+              </a:rPr>
+              <a:t>Bușteni</a:t>
             </a:r>
             <a:endParaRPr lang="en-US" sz="1500" dirty="0"/>
           </a:p>
@@ -7375,11 +7575,11 @@
             <a:avLst/>
           </a:prstGeom>
           <a:solidFill>
-            <a:srgbClr val="1E3A66"/>
+            <a:srgbClr val="21314E"/>
           </a:solidFill>
           <a:ln w="12700">
             <a:solidFill>
-              <a:srgbClr val="D9A227"/>
+              <a:srgbClr val="B08D57"/>
             </a:solidFill>
             <a:prstDash val="solid"/>
           </a:ln>
@@ -7410,9 +7610,9 @@
               <a:buNone/>
             </a:pPr>
             <a:r>
-              <a:rPr lang="en-US" sz="4000" b="1" dirty="0">
-                <a:solidFill>
-                  <a:srgbClr val="D9A227"/>
+              <a:rPr lang="en-US" sz="3800" b="1" dirty="0">
+                <a:solidFill>
+                  <a:srgbClr val="D9C08A"/>
                 </a:solidFill>
                 <a:latin typeface="Georgia" pitchFamily="34" charset="0"/>
                 <a:ea typeface="Georgia" pitchFamily="34" charset="-122"/>
@@ -7420,7 +7620,7 @@
               </a:rPr>
               <a:t>67.000</a:t>
             </a:r>
-            <a:endParaRPr lang="en-US" sz="4000" dirty="0"/>
+            <a:endParaRPr lang="en-US" sz="3800" dirty="0"/>
           </a:p>
         </p:txBody>
       </p:sp>
@@ -7451,11 +7651,11 @@
             <a:r>
               <a:rPr lang="en-US" sz="1200" dirty="0">
                 <a:solidFill>
-                  <a:srgbClr val="CFE0F5"/>
-                </a:solidFill>
-                <a:latin typeface="Calibri" pitchFamily="34" charset="0"/>
-                <a:ea typeface="Calibri" pitchFamily="34" charset="-122"/>
-                <a:cs typeface="Calibri" pitchFamily="34" charset="-120"/>
+                  <a:srgbClr val="E9E0CC"/>
+                </a:solidFill>
+                <a:latin typeface="Segoe UI" pitchFamily="34" charset="0"/>
+                <a:ea typeface="Segoe UI" pitchFamily="34" charset="-122"/>
+                <a:cs typeface="Segoe UI" pitchFamily="34" charset="-120"/>
               </a:rPr>
               <a:t>EUR</a:t>
             </a:r>
@@ -7492,9 +7692,9 @@
                 <a:solidFill>
                   <a:srgbClr val="FFFFFF"/>
                 </a:solidFill>
-                <a:latin typeface="Calibri" pitchFamily="34" charset="0"/>
-                <a:ea typeface="Calibri" pitchFamily="34" charset="-122"/>
-                <a:cs typeface="Calibri" pitchFamily="34" charset="-120"/>
+                <a:latin typeface="Segoe UI" pitchFamily="34" charset="0"/>
+                <a:ea typeface="Segoe UI" pitchFamily="34" charset="-122"/>
+                <a:cs typeface="Segoe UI" pitchFamily="34" charset="-120"/>
               </a:rPr>
               <a:t>Breaza</a:t>
             </a:r>
@@ -7511,7 +7711,7 @@
         <p:spPr>
           <a:xfrm>
             <a:off x="777240" y="4480560"/>
-            <a:ext cx="10607040" cy="548640"/>
+            <a:ext cx="10607040" cy="457200"/>
           </a:xfrm>
           <a:prstGeom prst="rect">
             <a:avLst/>
@@ -7529,13 +7729,13 @@
             <a:r>
               <a:rPr lang="en-US" sz="1500" dirty="0">
                 <a:solidFill>
-                  <a:srgbClr val="CFE0F5"/>
-                </a:solidFill>
-                <a:latin typeface="Calibri" pitchFamily="34" charset="0"/>
-                <a:ea typeface="Calibri" pitchFamily="34" charset="-122"/>
-                <a:cs typeface="Calibri" pitchFamily="34" charset="-120"/>
-              </a:rPr>
-              <a:t>Toate cele 12 comparabile de teren  ·  preturile totale ale comparabilelor de casa (Busteni)  ·  costul (CIN)  </a:t>
+                  <a:srgbClr val="E9E0CC"/>
+                </a:solidFill>
+                <a:latin typeface="Segoe UI" pitchFamily="34" charset="0"/>
+                <a:ea typeface="Segoe UI" pitchFamily="34" charset="-122"/>
+                <a:cs typeface="Segoe UI" pitchFamily="34" charset="-120"/>
+              </a:rPr>
+              <a:t>Toate comparabilele de teren  ·  prețurile totale ale comparabilelor de casă  ·  costul (CIN)  </a:t>
             </a:r>
             <a:pPr indent="0" marL="0">
               <a:buNone/>
@@ -7543,11 +7743,11 @@
             <a:r>
               <a:rPr lang="en-US" sz="1500" b="1" dirty="0">
                 <a:solidFill>
-                  <a:srgbClr val="D9A227"/>
-                </a:solidFill>
-                <a:latin typeface="Calibri" pitchFamily="34" charset="0"/>
-                <a:ea typeface="Calibri" pitchFamily="34" charset="-122"/>
-                <a:cs typeface="Calibri" pitchFamily="34" charset="-120"/>
+                  <a:srgbClr val="D9C08A"/>
+                </a:solidFill>
+                <a:latin typeface="Segoe UI" pitchFamily="34" charset="0"/>
+                <a:ea typeface="Segoe UI" pitchFamily="34" charset="-122"/>
+                <a:cs typeface="Segoe UI" pitchFamily="34" charset="-120"/>
               </a:rPr>
               <a:t>— reproduse exact.</a:t>
             </a:r>
@@ -7563,7 +7763,7 @@
         </p:nvSpPr>
         <p:spPr>
           <a:xfrm>
-            <a:off x="777240" y="5120640"/>
+            <a:off x="777240" y="5074920"/>
             <a:ext cx="10607040" cy="457200"/>
           </a:xfrm>
           <a:prstGeom prst="rect">
@@ -7582,13 +7782,13 @@
             <a:r>
               <a:rPr lang="en-US" sz="1300" i="1" dirty="0">
                 <a:solidFill>
-                  <a:srgbClr val="CFE0F5"/>
-                </a:solidFill>
-                <a:latin typeface="Calibri" pitchFamily="34" charset="0"/>
-                <a:ea typeface="Calibri" pitchFamily="34" charset="-122"/>
-                <a:cs typeface="Calibri" pitchFamily="34" charset="-120"/>
-              </a:rPr>
-              <a:t>Aceasta este dovada ca aplicatia aplica aceeasi logica de calcul ca dosarele tale.</a:t>
+                  <a:srgbClr val="E9E0CC"/>
+                </a:solidFill>
+                <a:latin typeface="Segoe UI" pitchFamily="34" charset="0"/>
+                <a:ea typeface="Segoe UI" pitchFamily="34" charset="-122"/>
+                <a:cs typeface="Segoe UI" pitchFamily="34" charset="-120"/>
+              </a:rPr>
+              <a:t>Acoperit de 375 de teste automate (verzi). Aceeași logică de calcul ca dosarele reale.</a:t>
             </a:r>
             <a:endParaRPr lang="en-US" sz="1300" dirty="0"/>
           </a:p>
@@ -7621,13 +7821,13 @@
             <a:r>
               <a:rPr lang="en-US" sz="900" dirty="0">
                 <a:solidFill>
-                  <a:srgbClr val="CFE0F5"/>
-                </a:solidFill>
-                <a:latin typeface="Calibri" pitchFamily="34" charset="0"/>
-                <a:ea typeface="Calibri" pitchFamily="34" charset="-122"/>
-                <a:cs typeface="Calibri" pitchFamily="34" charset="-120"/>
-              </a:rPr>
-              <a:t>Aplicatie de asistenta la evaluare  ·  casa + teren  ·  document pentru review</a:t>
+                  <a:srgbClr val="E9E0CC"/>
+                </a:solidFill>
+                <a:latin typeface="Segoe UI" pitchFamily="34" charset="0"/>
+                <a:ea typeface="Segoe UI" pitchFamily="34" charset="-122"/>
+                <a:cs typeface="Segoe UI" pitchFamily="34" charset="-120"/>
+              </a:rPr>
+              <a:t>Registru de evaluare ANEVAR  ·  aplicație locală offline  ·  document pentru review</a:t>
             </a:r>
             <a:endParaRPr lang="en-US" sz="900" dirty="0"/>
           </a:p>
@@ -7660,11 +7860,11 @@
             <a:r>
               <a:rPr lang="en-US" sz="900" dirty="0">
                 <a:solidFill>
-                  <a:srgbClr val="CFE0F5"/>
-                </a:solidFill>
-                <a:latin typeface="Calibri" pitchFamily="34" charset="0"/>
-                <a:ea typeface="Calibri" pitchFamily="34" charset="-122"/>
-                <a:cs typeface="Calibri" pitchFamily="34" charset="-120"/>
+                  <a:srgbClr val="E9E0CC"/>
+                </a:solidFill>
+                <a:latin typeface="Segoe UI" pitchFamily="34" charset="0"/>
+                <a:ea typeface="Segoe UI" pitchFamily="34" charset="-122"/>
+                <a:cs typeface="Segoe UI" pitchFamily="34" charset="-120"/>
               </a:rPr>
               <a:t>6</a:t>
             </a:r>
@@ -7686,7 +7886,7 @@
     <p:bg>
       <p:bgPr>
         <a:solidFill>
-          <a:srgbClr val="F5F7FB"/>
+          <a:srgbClr val="F2EEE2"/>
         </a:solidFill>
       </p:bgPr>
     </p:bg>
@@ -7719,7 +7919,7 @@
             <a:avLst/>
           </a:prstGeom>
           <a:solidFill>
-            <a:srgbClr val="D9A227"/>
+            <a:srgbClr val="9D4A25"/>
           </a:solidFill>
           <a:ln/>
         </p:spPr>
@@ -7751,11 +7951,11 @@
             <a:r>
               <a:rPr lang="en-US" sz="1200" b="1" spc="300" kern="0" dirty="0">
                 <a:solidFill>
-                  <a:srgbClr val="D9A227"/>
-                </a:solidFill>
-                <a:latin typeface="Calibri" pitchFamily="34" charset="0"/>
-                <a:ea typeface="Calibri" pitchFamily="34" charset="-122"/>
-                <a:cs typeface="Calibri" pitchFamily="34" charset="-120"/>
+                  <a:srgbClr val="9D4A25"/>
+                </a:solidFill>
+                <a:latin typeface="Segoe UI" pitchFamily="34" charset="0"/>
+                <a:ea typeface="Segoe UI" pitchFamily="34" charset="-122"/>
+                <a:cs typeface="Segoe UI" pitchFamily="34" charset="-120"/>
               </a:rPr>
               <a:t>FLUXUL DE LUCRU</a:t>
             </a:r>
@@ -7790,13 +7990,13 @@
             <a:r>
               <a:rPr lang="en-US" sz="3000" b="1" dirty="0">
                 <a:solidFill>
-                  <a:srgbClr val="152A4E"/>
+                  <a:srgbClr val="16263D"/>
                 </a:solidFill>
                 <a:latin typeface="Georgia" pitchFamily="34" charset="0"/>
                 <a:ea typeface="Georgia" pitchFamily="34" charset="-122"/>
                 <a:cs typeface="Georgia" pitchFamily="34" charset="-120"/>
               </a:rPr>
-              <a:t>Wizardul in cinci pasi</a:t>
+              <a:t>Wizardul în cinci pași</a:t>
             </a:r>
             <a:endParaRPr lang="en-US" sz="3000" dirty="0"/>
           </a:p>
@@ -7805,6 +8005,26 @@
       <p:sp>
         <p:nvSpPr>
           <p:cNvPr id="5" name="Shape 3"/>
+          <p:cNvSpPr/>
+          <p:nvPr/>
+        </p:nvSpPr>
+        <p:spPr>
+          <a:xfrm>
+            <a:off x="777240" y="1335024"/>
+            <a:ext cx="10607040" cy="22860"/>
+          </a:xfrm>
+          <a:prstGeom prst="rect">
+            <a:avLst/>
+          </a:prstGeom>
+          <a:solidFill>
+            <a:srgbClr val="B08D57"/>
+          </a:solidFill>
+          <a:ln/>
+        </p:spPr>
+      </p:sp>
+      <p:sp>
+        <p:nvSpPr>
+          <p:cNvPr id="6" name="Shape 4"/>
           <p:cNvSpPr/>
           <p:nvPr/>
         </p:nvSpPr>
@@ -7817,14 +8037,14 @@
             <a:avLst/>
           </a:prstGeom>
           <a:solidFill>
-            <a:srgbClr val="152A4E"/>
-          </a:solidFill>
-          <a:ln/>
-        </p:spPr>
-      </p:sp>
-      <p:sp>
-        <p:nvSpPr>
-          <p:cNvPr id="6" name="Text 4"/>
+            <a:srgbClr val="9D4A25"/>
+          </a:solidFill>
+          <a:ln/>
+        </p:spPr>
+      </p:sp>
+      <p:sp>
+        <p:nvSpPr>
+          <p:cNvPr id="7" name="Text 5"/>
           <p:cNvSpPr/>
           <p:nvPr/>
         </p:nvSpPr>
@@ -7849,7 +8069,7 @@
             <a:r>
               <a:rPr lang="en-US" sz="2600" b="1" dirty="0">
                 <a:solidFill>
-                  <a:srgbClr val="D9A227"/>
+                  <a:srgbClr val="FFFFFF"/>
                 </a:solidFill>
                 <a:latin typeface="Georgia" pitchFamily="34" charset="0"/>
                 <a:ea typeface="Georgia" pitchFamily="34" charset="-122"/>
@@ -7863,7 +8083,7 @@
       </p:sp>
       <p:sp>
         <p:nvSpPr>
-          <p:cNvPr id="7" name="Shape 5"/>
+          <p:cNvPr id="8" name="Shape 6"/>
           <p:cNvSpPr/>
           <p:nvPr/>
         </p:nvSpPr>
@@ -7878,7 +8098,7 @@
           <a:noFill/>
           <a:ln w="25400">
             <a:solidFill>
-              <a:srgbClr val="DDE3EE"/>
+              <a:srgbClr val="B08D57"/>
             </a:solidFill>
             <a:prstDash val="solid"/>
           </a:ln>
@@ -7886,7 +8106,7 @@
       </p:sp>
       <p:sp>
         <p:nvSpPr>
-          <p:cNvPr id="8" name="Shape 6"/>
+          <p:cNvPr id="9" name="Shape 7"/>
           <p:cNvSpPr/>
           <p:nvPr/>
         </p:nvSpPr>
@@ -7899,18 +8119,18 @@
             <a:avLst/>
           </a:prstGeom>
           <a:solidFill>
-            <a:srgbClr val="FFFFFF"/>
+            <a:srgbClr val="FBF8F0"/>
           </a:solidFill>
           <a:ln w="12700">
             <a:solidFill>
-              <a:srgbClr val="DDE3EE"/>
+              <a:srgbClr val="D7CDB4"/>
             </a:solidFill>
             <a:prstDash val="solid"/>
           </a:ln>
           <a:effectLst>
             <a:outerShdw sx="100000" sy="100000" kx="0" ky="0" algn="bl" rotWithShape="0" blurRad="88900" dist="38100" dir="8100000">
-              <a:srgbClr val="000000">
-                <a:alpha val="13000"/>
+              <a:srgbClr val="16263D">
+                <a:alpha val="12000"/>
               </a:srgbClr>
             </a:outerShdw>
           </a:effectLst>
@@ -7918,7 +8138,7 @@
       </p:sp>
       <p:sp>
         <p:nvSpPr>
-          <p:cNvPr id="9" name="Text 7"/>
+          <p:cNvPr id="10" name="Text 8"/>
           <p:cNvSpPr/>
           <p:nvPr/>
         </p:nvSpPr>
@@ -7943,13 +8163,13 @@
             <a:r>
               <a:rPr lang="en-US" sz="1500" b="1" dirty="0">
                 <a:solidFill>
-                  <a:srgbClr val="152A4E"/>
+                  <a:srgbClr val="16263D"/>
                 </a:solidFill>
                 <a:latin typeface="Georgia" pitchFamily="34" charset="0"/>
                 <a:ea typeface="Georgia" pitchFamily="34" charset="-122"/>
                 <a:cs typeface="Georgia" pitchFamily="34" charset="-120"/>
               </a:rPr>
-              <a:t>Adresa &amp; lucrare</a:t>
+              <a:t>Adresă &amp; lucrare</a:t>
             </a:r>
             <a:endParaRPr lang="en-US" sz="1500" dirty="0"/>
           </a:p>
@@ -7957,7 +8177,7 @@
       </p:sp>
       <p:sp>
         <p:nvSpPr>
-          <p:cNvPr id="10" name="Text 8"/>
+          <p:cNvPr id="11" name="Text 9"/>
           <p:cNvSpPr/>
           <p:nvPr/>
         </p:nvSpPr>
@@ -7982,13 +8202,13 @@
             <a:r>
               <a:rPr lang="en-US" sz="1200" dirty="0">
                 <a:solidFill>
-                  <a:srgbClr val="1A2233"/>
-                </a:solidFill>
-                <a:latin typeface="Calibri" pitchFamily="34" charset="0"/>
-                <a:ea typeface="Calibri" pitchFamily="34" charset="-122"/>
-                <a:cs typeface="Calibri" pitchFamily="34" charset="-120"/>
-              </a:rPr>
-              <a:t>Judet/localitate, client, beneficiar, evaluator, date</a:t>
+                  <a:srgbClr val="1F2D45"/>
+                </a:solidFill>
+                <a:latin typeface="Segoe UI" pitchFamily="34" charset="0"/>
+                <a:ea typeface="Segoe UI" pitchFamily="34" charset="-122"/>
+                <a:cs typeface="Segoe UI" pitchFamily="34" charset="-120"/>
+              </a:rPr>
+              <a:t>Județ/localitate, client, beneficiar, evaluator, date</a:t>
             </a:r>
             <a:endParaRPr lang="en-US" sz="1200" dirty="0"/>
           </a:p>
@@ -7996,7 +8216,7 @@
       </p:sp>
       <p:sp>
         <p:nvSpPr>
-          <p:cNvPr id="11" name="Shape 9"/>
+          <p:cNvPr id="12" name="Shape 10"/>
           <p:cNvSpPr/>
           <p:nvPr/>
         </p:nvSpPr>
@@ -8009,14 +8229,14 @@
             <a:avLst/>
           </a:prstGeom>
           <a:solidFill>
-            <a:srgbClr val="152A4E"/>
-          </a:solidFill>
-          <a:ln/>
-        </p:spPr>
-      </p:sp>
-      <p:sp>
-        <p:nvSpPr>
-          <p:cNvPr id="12" name="Text 10"/>
+            <a:srgbClr val="9D4A25"/>
+          </a:solidFill>
+          <a:ln/>
+        </p:spPr>
+      </p:sp>
+      <p:sp>
+        <p:nvSpPr>
+          <p:cNvPr id="13" name="Text 11"/>
           <p:cNvSpPr/>
           <p:nvPr/>
         </p:nvSpPr>
@@ -8041,7 +8261,7 @@
             <a:r>
               <a:rPr lang="en-US" sz="2600" b="1" dirty="0">
                 <a:solidFill>
-                  <a:srgbClr val="D9A227"/>
+                  <a:srgbClr val="FFFFFF"/>
                 </a:solidFill>
                 <a:latin typeface="Georgia" pitchFamily="34" charset="0"/>
                 <a:ea typeface="Georgia" pitchFamily="34" charset="-122"/>
@@ -8055,7 +8275,7 @@
       </p:sp>
       <p:sp>
         <p:nvSpPr>
-          <p:cNvPr id="13" name="Shape 11"/>
+          <p:cNvPr id="14" name="Shape 12"/>
           <p:cNvSpPr/>
           <p:nvPr/>
         </p:nvSpPr>
@@ -8070,7 +8290,7 @@
           <a:noFill/>
           <a:ln w="25400">
             <a:solidFill>
-              <a:srgbClr val="DDE3EE"/>
+              <a:srgbClr val="B08D57"/>
             </a:solidFill>
             <a:prstDash val="solid"/>
           </a:ln>
@@ -8078,7 +8298,7 @@
       </p:sp>
       <p:sp>
         <p:nvSpPr>
-          <p:cNvPr id="14" name="Shape 12"/>
+          <p:cNvPr id="15" name="Shape 13"/>
           <p:cNvSpPr/>
           <p:nvPr/>
         </p:nvSpPr>
@@ -8091,18 +8311,18 @@
             <a:avLst/>
           </a:prstGeom>
           <a:solidFill>
-            <a:srgbClr val="FFFFFF"/>
+            <a:srgbClr val="FBF8F0"/>
           </a:solidFill>
           <a:ln w="12700">
             <a:solidFill>
-              <a:srgbClr val="DDE3EE"/>
+              <a:srgbClr val="D7CDB4"/>
             </a:solidFill>
             <a:prstDash val="solid"/>
           </a:ln>
           <a:effectLst>
             <a:outerShdw sx="100000" sy="100000" kx="0" ky="0" algn="bl" rotWithShape="0" blurRad="88900" dist="38100" dir="8100000">
-              <a:srgbClr val="000000">
-                <a:alpha val="13000"/>
+              <a:srgbClr val="16263D">
+                <a:alpha val="12000"/>
               </a:srgbClr>
             </a:outerShdw>
           </a:effectLst>
@@ -8110,7 +8330,7 @@
       </p:sp>
       <p:sp>
         <p:nvSpPr>
-          <p:cNvPr id="15" name="Text 13"/>
+          <p:cNvPr id="16" name="Text 14"/>
           <p:cNvSpPr/>
           <p:nvPr/>
         </p:nvSpPr>
@@ -8135,7 +8355,7 @@
             <a:r>
               <a:rPr lang="en-US" sz="1500" b="1" dirty="0">
                 <a:solidFill>
-                  <a:srgbClr val="152A4E"/>
+                  <a:srgbClr val="16263D"/>
                 </a:solidFill>
                 <a:latin typeface="Georgia" pitchFamily="34" charset="0"/>
                 <a:ea typeface="Georgia" pitchFamily="34" charset="-122"/>
@@ -8149,7 +8369,7 @@
       </p:sp>
       <p:sp>
         <p:nvSpPr>
-          <p:cNvPr id="16" name="Text 14"/>
+          <p:cNvPr id="17" name="Text 15"/>
           <p:cNvSpPr/>
           <p:nvPr/>
         </p:nvSpPr>
@@ -8174,13 +8394,13 @@
             <a:r>
               <a:rPr lang="en-US" sz="1200" dirty="0">
                 <a:solidFill>
-                  <a:srgbClr val="1A2233"/>
-                </a:solidFill>
-                <a:latin typeface="Calibri" pitchFamily="34" charset="0"/>
-                <a:ea typeface="Calibri" pitchFamily="34" charset="-122"/>
-                <a:cs typeface="Calibri" pitchFamily="34" charset="-120"/>
-              </a:rPr>
-              <a:t>Teren, arii, an, elemente de cost, depreciere, atribute</a:t>
+                  <a:srgbClr val="1F2D45"/>
+                </a:solidFill>
+                <a:latin typeface="Segoe UI" pitchFamily="34" charset="0"/>
+                <a:ea typeface="Segoe UI" pitchFamily="34" charset="-122"/>
+                <a:cs typeface="Segoe UI" pitchFamily="34" charset="-120"/>
+              </a:rPr>
+              <a:t>Tip proprietate, teren, arii, an, elemente de cost, atribute</a:t>
             </a:r>
             <a:endParaRPr lang="en-US" sz="1200" dirty="0"/>
           </a:p>
@@ -8188,7 +8408,7 @@
       </p:sp>
       <p:sp>
         <p:nvSpPr>
-          <p:cNvPr id="17" name="Shape 15"/>
+          <p:cNvPr id="18" name="Shape 16"/>
           <p:cNvSpPr/>
           <p:nvPr/>
         </p:nvSpPr>
@@ -8201,14 +8421,14 @@
             <a:avLst/>
           </a:prstGeom>
           <a:solidFill>
-            <a:srgbClr val="152A4E"/>
-          </a:solidFill>
-          <a:ln/>
-        </p:spPr>
-      </p:sp>
-      <p:sp>
-        <p:nvSpPr>
-          <p:cNvPr id="18" name="Text 16"/>
+            <a:srgbClr val="9D4A25"/>
+          </a:solidFill>
+          <a:ln/>
+        </p:spPr>
+      </p:sp>
+      <p:sp>
+        <p:nvSpPr>
+          <p:cNvPr id="19" name="Text 17"/>
           <p:cNvSpPr/>
           <p:nvPr/>
         </p:nvSpPr>
@@ -8233,7 +8453,7 @@
             <a:r>
               <a:rPr lang="en-US" sz="2600" b="1" dirty="0">
                 <a:solidFill>
-                  <a:srgbClr val="D9A227"/>
+                  <a:srgbClr val="FFFFFF"/>
                 </a:solidFill>
                 <a:latin typeface="Georgia" pitchFamily="34" charset="0"/>
                 <a:ea typeface="Georgia" pitchFamily="34" charset="-122"/>
@@ -8247,7 +8467,7 @@
       </p:sp>
       <p:sp>
         <p:nvSpPr>
-          <p:cNvPr id="19" name="Shape 17"/>
+          <p:cNvPr id="20" name="Shape 18"/>
           <p:cNvSpPr/>
           <p:nvPr/>
         </p:nvSpPr>
@@ -8262,7 +8482,7 @@
           <a:noFill/>
           <a:ln w="25400">
             <a:solidFill>
-              <a:srgbClr val="DDE3EE"/>
+              <a:srgbClr val="B08D57"/>
             </a:solidFill>
             <a:prstDash val="solid"/>
           </a:ln>
@@ -8270,7 +8490,7 @@
       </p:sp>
       <p:sp>
         <p:nvSpPr>
-          <p:cNvPr id="20" name="Shape 18"/>
+          <p:cNvPr id="21" name="Shape 19"/>
           <p:cNvSpPr/>
           <p:nvPr/>
         </p:nvSpPr>
@@ -8283,18 +8503,18 @@
             <a:avLst/>
           </a:prstGeom>
           <a:solidFill>
-            <a:srgbClr val="FFFFFF"/>
+            <a:srgbClr val="FBF8F0"/>
           </a:solidFill>
           <a:ln w="12700">
             <a:solidFill>
-              <a:srgbClr val="DDE3EE"/>
+              <a:srgbClr val="D7CDB4"/>
             </a:solidFill>
             <a:prstDash val="solid"/>
           </a:ln>
           <a:effectLst>
             <a:outerShdw sx="100000" sy="100000" kx="0" ky="0" algn="bl" rotWithShape="0" blurRad="88900" dist="38100" dir="8100000">
-              <a:srgbClr val="000000">
-                <a:alpha val="13000"/>
+              <a:srgbClr val="16263D">
+                <a:alpha val="12000"/>
               </a:srgbClr>
             </a:outerShdw>
           </a:effectLst>
@@ -8302,7 +8522,7 @@
       </p:sp>
       <p:sp>
         <p:nvSpPr>
-          <p:cNvPr id="21" name="Text 19"/>
+          <p:cNvPr id="22" name="Text 20"/>
           <p:cNvSpPr/>
           <p:nvPr/>
         </p:nvSpPr>
@@ -8327,7 +8547,7 @@
             <a:r>
               <a:rPr lang="en-US" sz="1500" b="1" dirty="0">
                 <a:solidFill>
-                  <a:srgbClr val="152A4E"/>
+                  <a:srgbClr val="16263D"/>
                 </a:solidFill>
                 <a:latin typeface="Georgia" pitchFamily="34" charset="0"/>
                 <a:ea typeface="Georgia" pitchFamily="34" charset="-122"/>
@@ -8341,7 +8561,7 @@
       </p:sp>
       <p:sp>
         <p:nvSpPr>
-          <p:cNvPr id="22" name="Text 20"/>
+          <p:cNvPr id="23" name="Text 21"/>
           <p:cNvSpPr/>
           <p:nvPr/>
         </p:nvSpPr>
@@ -8366,13 +8586,13 @@
             <a:r>
               <a:rPr lang="en-US" sz="1200" dirty="0">
                 <a:solidFill>
-                  <a:srgbClr val="1A2233"/>
-                </a:solidFill>
-                <a:latin typeface="Calibri" pitchFamily="34" charset="0"/>
-                <a:ea typeface="Calibri" pitchFamily="34" charset="-122"/>
-                <a:cs typeface="Calibri" pitchFamily="34" charset="-120"/>
-              </a:rPr>
-              <a:t>Cautare automata, import din link sau introducere manuala</a:t>
+                  <a:srgbClr val="1F2D45"/>
+                </a:solidFill>
+                <a:latin typeface="Segoe UI" pitchFamily="34" charset="0"/>
+                <a:ea typeface="Segoe UI" pitchFamily="34" charset="-122"/>
+                <a:cs typeface="Segoe UI" pitchFamily="34" charset="-120"/>
+              </a:rPr>
+              <a:t>Căutare automată, import din link sau introducere manuală</a:t>
             </a:r>
             <a:endParaRPr lang="en-US" sz="1200" dirty="0"/>
           </a:p>
@@ -8380,7 +8600,7 @@
       </p:sp>
       <p:sp>
         <p:nvSpPr>
-          <p:cNvPr id="23" name="Shape 21"/>
+          <p:cNvPr id="24" name="Shape 22"/>
           <p:cNvSpPr/>
           <p:nvPr/>
         </p:nvSpPr>
@@ -8393,14 +8613,14 @@
             <a:avLst/>
           </a:prstGeom>
           <a:solidFill>
-            <a:srgbClr val="152A4E"/>
-          </a:solidFill>
-          <a:ln/>
-        </p:spPr>
-      </p:sp>
-      <p:sp>
-        <p:nvSpPr>
-          <p:cNvPr id="24" name="Text 22"/>
+            <a:srgbClr val="9D4A25"/>
+          </a:solidFill>
+          <a:ln/>
+        </p:spPr>
+      </p:sp>
+      <p:sp>
+        <p:nvSpPr>
+          <p:cNvPr id="25" name="Text 23"/>
           <p:cNvSpPr/>
           <p:nvPr/>
         </p:nvSpPr>
@@ -8425,7 +8645,7 @@
             <a:r>
               <a:rPr lang="en-US" sz="2600" b="1" dirty="0">
                 <a:solidFill>
-                  <a:srgbClr val="D9A227"/>
+                  <a:srgbClr val="FFFFFF"/>
                 </a:solidFill>
                 <a:latin typeface="Georgia" pitchFamily="34" charset="0"/>
                 <a:ea typeface="Georgia" pitchFamily="34" charset="-122"/>
@@ -8439,7 +8659,7 @@
       </p:sp>
       <p:sp>
         <p:nvSpPr>
-          <p:cNvPr id="25" name="Shape 23"/>
+          <p:cNvPr id="26" name="Shape 24"/>
           <p:cNvSpPr/>
           <p:nvPr/>
         </p:nvSpPr>
@@ -8454,7 +8674,7 @@
           <a:noFill/>
           <a:ln w="25400">
             <a:solidFill>
-              <a:srgbClr val="DDE3EE"/>
+              <a:srgbClr val="B08D57"/>
             </a:solidFill>
             <a:prstDash val="solid"/>
           </a:ln>
@@ -8462,7 +8682,7 @@
       </p:sp>
       <p:sp>
         <p:nvSpPr>
-          <p:cNvPr id="26" name="Shape 24"/>
+          <p:cNvPr id="27" name="Shape 25"/>
           <p:cNvSpPr/>
           <p:nvPr/>
         </p:nvSpPr>
@@ -8475,18 +8695,18 @@
             <a:avLst/>
           </a:prstGeom>
           <a:solidFill>
-            <a:srgbClr val="FFFFFF"/>
+            <a:srgbClr val="FBF8F0"/>
           </a:solidFill>
           <a:ln w="12700">
             <a:solidFill>
-              <a:srgbClr val="DDE3EE"/>
+              <a:srgbClr val="D7CDB4"/>
             </a:solidFill>
             <a:prstDash val="solid"/>
           </a:ln>
           <a:effectLst>
             <a:outerShdw sx="100000" sy="100000" kx="0" ky="0" algn="bl" rotWithShape="0" blurRad="88900" dist="38100" dir="8100000">
-              <a:srgbClr val="000000">
-                <a:alpha val="13000"/>
+              <a:srgbClr val="16263D">
+                <a:alpha val="12000"/>
               </a:srgbClr>
             </a:outerShdw>
           </a:effectLst>
@@ -8494,7 +8714,7 @@
       </p:sp>
       <p:sp>
         <p:nvSpPr>
-          <p:cNvPr id="27" name="Text 25"/>
+          <p:cNvPr id="28" name="Text 26"/>
           <p:cNvSpPr/>
           <p:nvPr/>
         </p:nvSpPr>
@@ -8519,13 +8739,13 @@
             <a:r>
               <a:rPr lang="en-US" sz="1500" b="1" dirty="0">
                 <a:solidFill>
-                  <a:srgbClr val="152A4E"/>
+                  <a:srgbClr val="16263D"/>
                 </a:solidFill>
                 <a:latin typeface="Georgia" pitchFamily="34" charset="0"/>
                 <a:ea typeface="Georgia" pitchFamily="34" charset="-122"/>
                 <a:cs typeface="Georgia" pitchFamily="34" charset="-120"/>
               </a:rPr>
-              <a:t>Metoda &amp; calcul</a:t>
+              <a:t>Metodă &amp; calcul</a:t>
             </a:r>
             <a:endParaRPr lang="en-US" sz="1500" dirty="0"/>
           </a:p>
@@ -8533,7 +8753,7 @@
       </p:sp>
       <p:sp>
         <p:nvSpPr>
-          <p:cNvPr id="28" name="Text 26"/>
+          <p:cNvPr id="29" name="Text 27"/>
           <p:cNvSpPr/>
           <p:nvPr/>
         </p:nvSpPr>
@@ -8558,13 +8778,13 @@
             <a:r>
               <a:rPr lang="en-US" sz="1200" dirty="0">
                 <a:solidFill>
-                  <a:srgbClr val="1A2233"/>
-                </a:solidFill>
-                <a:latin typeface="Calibri" pitchFamily="34" charset="0"/>
-                <a:ea typeface="Calibri" pitchFamily="34" charset="-122"/>
-                <a:cs typeface="Calibri" pitchFamily="34" charset="-120"/>
-              </a:rPr>
-              <a:t>Metoda, moneda, curs, fotografii, calcul + alerte</a:t>
+                  <a:srgbClr val="1F2D45"/>
+                </a:solidFill>
+                <a:latin typeface="Segoe UI" pitchFamily="34" charset="0"/>
+                <a:ea typeface="Segoe UI" pitchFamily="34" charset="-122"/>
+                <a:cs typeface="Segoe UI" pitchFamily="34" charset="-120"/>
+              </a:rPr>
+              <a:t>Abordare, monedă, curs BNR, fotografii, calcul + alerte</a:t>
             </a:r>
             <a:endParaRPr lang="en-US" sz="1200" dirty="0"/>
           </a:p>
@@ -8572,7 +8792,7 @@
       </p:sp>
       <p:sp>
         <p:nvSpPr>
-          <p:cNvPr id="29" name="Shape 27"/>
+          <p:cNvPr id="30" name="Shape 28"/>
           <p:cNvSpPr/>
           <p:nvPr/>
         </p:nvSpPr>
@@ -8585,14 +8805,14 @@
             <a:avLst/>
           </a:prstGeom>
           <a:solidFill>
-            <a:srgbClr val="152A4E"/>
-          </a:solidFill>
-          <a:ln/>
-        </p:spPr>
-      </p:sp>
-      <p:sp>
-        <p:nvSpPr>
-          <p:cNvPr id="30" name="Text 28"/>
+            <a:srgbClr val="9D4A25"/>
+          </a:solidFill>
+          <a:ln/>
+        </p:spPr>
+      </p:sp>
+      <p:sp>
+        <p:nvSpPr>
+          <p:cNvPr id="31" name="Text 29"/>
           <p:cNvSpPr/>
           <p:nvPr/>
         </p:nvSpPr>
@@ -8617,7 +8837,7 @@
             <a:r>
               <a:rPr lang="en-US" sz="2600" b="1" dirty="0">
                 <a:solidFill>
-                  <a:srgbClr val="D9A227"/>
+                  <a:srgbClr val="FFFFFF"/>
                 </a:solidFill>
                 <a:latin typeface="Georgia" pitchFamily="34" charset="0"/>
                 <a:ea typeface="Georgia" pitchFamily="34" charset="-122"/>
@@ -8631,7 +8851,7 @@
       </p:sp>
       <p:sp>
         <p:nvSpPr>
-          <p:cNvPr id="31" name="Shape 29"/>
+          <p:cNvPr id="32" name="Shape 30"/>
           <p:cNvSpPr/>
           <p:nvPr/>
         </p:nvSpPr>
@@ -8644,18 +8864,18 @@
             <a:avLst/>
           </a:prstGeom>
           <a:solidFill>
-            <a:srgbClr val="FFFFFF"/>
+            <a:srgbClr val="FBF8F0"/>
           </a:solidFill>
           <a:ln w="12700">
             <a:solidFill>
-              <a:srgbClr val="DDE3EE"/>
+              <a:srgbClr val="D7CDB4"/>
             </a:solidFill>
             <a:prstDash val="solid"/>
           </a:ln>
           <a:effectLst>
             <a:outerShdw sx="100000" sy="100000" kx="0" ky="0" algn="bl" rotWithShape="0" blurRad="88900" dist="38100" dir="8100000">
-              <a:srgbClr val="000000">
-                <a:alpha val="13000"/>
+              <a:srgbClr val="16263D">
+                <a:alpha val="12000"/>
               </a:srgbClr>
             </a:outerShdw>
           </a:effectLst>
@@ -8663,7 +8883,7 @@
       </p:sp>
       <p:sp>
         <p:nvSpPr>
-          <p:cNvPr id="32" name="Text 30"/>
+          <p:cNvPr id="33" name="Text 31"/>
           <p:cNvSpPr/>
           <p:nvPr/>
         </p:nvSpPr>
@@ -8688,7 +8908,7 @@
             <a:r>
               <a:rPr lang="en-US" sz="1500" b="1" dirty="0">
                 <a:solidFill>
-                  <a:srgbClr val="152A4E"/>
+                  <a:srgbClr val="16263D"/>
                 </a:solidFill>
                 <a:latin typeface="Georgia" pitchFamily="34" charset="0"/>
                 <a:ea typeface="Georgia" pitchFamily="34" charset="-122"/>
@@ -8702,7 +8922,7 @@
       </p:sp>
       <p:sp>
         <p:nvSpPr>
-          <p:cNvPr id="33" name="Text 31"/>
+          <p:cNvPr id="34" name="Text 32"/>
           <p:cNvSpPr/>
           <p:nvPr/>
         </p:nvSpPr>
@@ -8727,13 +8947,13 @@
             <a:r>
               <a:rPr lang="en-US" sz="1200" dirty="0">
                 <a:solidFill>
-                  <a:srgbClr val="1A2233"/>
-                </a:solidFill>
-                <a:latin typeface="Calibri" pitchFamily="34" charset="0"/>
-                <a:ea typeface="Calibri" pitchFamily="34" charset="-122"/>
-                <a:cs typeface="Calibri" pitchFamily="34" charset="-120"/>
-              </a:rPr>
-              <a:t>Genereaza si descarca documentul Word, editabil</a:t>
+                  <a:srgbClr val="1F2D45"/>
+                </a:solidFill>
+                <a:latin typeface="Segoe UI" pitchFamily="34" charset="0"/>
+                <a:ea typeface="Segoe UI" pitchFamily="34" charset="-122"/>
+                <a:cs typeface="Segoe UI" pitchFamily="34" charset="-120"/>
+              </a:rPr>
+              <a:t>Generează și descarcă documentul Word, editabil</a:t>
             </a:r>
             <a:endParaRPr lang="en-US" sz="1200" dirty="0"/>
           </a:p>
@@ -8741,7 +8961,46 @@
       </p:sp>
       <p:sp>
         <p:nvSpPr>
-          <p:cNvPr id="34" name="Text 32"/>
+          <p:cNvPr id="35" name="Text 33"/>
+          <p:cNvSpPr/>
+          <p:nvPr/>
+        </p:nvSpPr>
+        <p:spPr>
+          <a:xfrm>
+            <a:off x="777240" y="5486400"/>
+            <a:ext cx="10607040" cy="365760"/>
+          </a:xfrm>
+          <a:prstGeom prst="rect">
+            <a:avLst/>
+          </a:prstGeom>
+          <a:noFill/>
+          <a:ln/>
+        </p:spPr>
+        <p:txBody>
+          <a:bodyPr wrap="square" lIns="0" tIns="0" rIns="0" bIns="0" rtlCol="0" anchor="ctr"/>
+          <a:lstStyle/>
+          <a:p>
+            <a:pPr indent="0" marL="0">
+              <a:buNone/>
+            </a:pPr>
+            <a:r>
+              <a:rPr lang="en-US" sz="1300" i="1" dirty="0">
+                <a:solidFill>
+                  <a:srgbClr val="5A6270"/>
+                </a:solidFill>
+                <a:latin typeface="Segoe UI" pitchFamily="34" charset="0"/>
+                <a:ea typeface="Segoe UI" pitchFamily="34" charset="-122"/>
+                <a:cs typeface="Segoe UI" pitchFamily="34" charset="-120"/>
+              </a:rPr>
+              <a:t>Stepper clickabil + panou „Date dosar” cu recapitulare live · interfață în stil registru cadastral.</a:t>
+            </a:r>
+            <a:endParaRPr lang="en-US" sz="1300" dirty="0"/>
+          </a:p>
+        </p:txBody>
+      </p:sp>
+      <p:sp>
+        <p:nvSpPr>
+          <p:cNvPr id="36" name="Text 34"/>
           <p:cNvSpPr/>
           <p:nvPr/>
         </p:nvSpPr>
@@ -8766,13 +9025,13 @@
             <a:r>
               <a:rPr lang="en-US" sz="900" dirty="0">
                 <a:solidFill>
-                  <a:srgbClr val="5C6679"/>
-                </a:solidFill>
-                <a:latin typeface="Calibri" pitchFamily="34" charset="0"/>
-                <a:ea typeface="Calibri" pitchFamily="34" charset="-122"/>
-                <a:cs typeface="Calibri" pitchFamily="34" charset="-120"/>
-              </a:rPr>
-              <a:t>Aplicatie de asistenta la evaluare  ·  casa + teren  ·  document pentru review</a:t>
+                  <a:srgbClr val="5A6270"/>
+                </a:solidFill>
+                <a:latin typeface="Segoe UI" pitchFamily="34" charset="0"/>
+                <a:ea typeface="Segoe UI" pitchFamily="34" charset="-122"/>
+                <a:cs typeface="Segoe UI" pitchFamily="34" charset="-120"/>
+              </a:rPr>
+              <a:t>Registru de evaluare ANEVAR  ·  aplicație locală offline  ·  document pentru review</a:t>
             </a:r>
             <a:endParaRPr lang="en-US" sz="900" dirty="0"/>
           </a:p>
@@ -8780,7 +9039,7 @@
       </p:sp>
       <p:sp>
         <p:nvSpPr>
-          <p:cNvPr id="35" name="Text 33"/>
+          <p:cNvPr id="37" name="Text 35"/>
           <p:cNvSpPr/>
           <p:nvPr/>
         </p:nvSpPr>
@@ -8805,11 +9064,11 @@
             <a:r>
               <a:rPr lang="en-US" sz="900" dirty="0">
                 <a:solidFill>
-                  <a:srgbClr val="5C6679"/>
-                </a:solidFill>
-                <a:latin typeface="Calibri" pitchFamily="34" charset="0"/>
-                <a:ea typeface="Calibri" pitchFamily="34" charset="-122"/>
-                <a:cs typeface="Calibri" pitchFamily="34" charset="-120"/>
+                  <a:srgbClr val="5A6270"/>
+                </a:solidFill>
+                <a:latin typeface="Segoe UI" pitchFamily="34" charset="0"/>
+                <a:ea typeface="Segoe UI" pitchFamily="34" charset="-122"/>
+                <a:cs typeface="Segoe UI" pitchFamily="34" charset="-120"/>
               </a:rPr>
               <a:t>7</a:t>
             </a:r>
@@ -8831,7 +9090,7 @@
     <p:bg>
       <p:bgPr>
         <a:solidFill>
-          <a:srgbClr val="F5F7FB"/>
+          <a:srgbClr val="F2EEE2"/>
         </a:solidFill>
       </p:bgPr>
     </p:bg>
@@ -8864,7 +9123,7 @@
             <a:avLst/>
           </a:prstGeom>
           <a:solidFill>
-            <a:srgbClr val="D9A227"/>
+            <a:srgbClr val="9D4A25"/>
           </a:solidFill>
           <a:ln/>
         </p:spPr>
@@ -8896,11 +9155,11 @@
             <a:r>
               <a:rPr lang="en-US" sz="1200" b="1" spc="300" kern="0" dirty="0">
                 <a:solidFill>
-                  <a:srgbClr val="D9A227"/>
-                </a:solidFill>
-                <a:latin typeface="Calibri" pitchFamily="34" charset="0"/>
-                <a:ea typeface="Calibri" pitchFamily="34" charset="-122"/>
-                <a:cs typeface="Calibri" pitchFamily="34" charset="-120"/>
+                  <a:srgbClr val="9D4A25"/>
+                </a:solidFill>
+                <a:latin typeface="Segoe UI" pitchFamily="34" charset="0"/>
+                <a:ea typeface="Segoe UI" pitchFamily="34" charset="-122"/>
+                <a:cs typeface="Segoe UI" pitchFamily="34" charset="-120"/>
               </a:rPr>
               <a:t>DATE EXTERNE</a:t>
             </a:r>
@@ -8935,13 +9194,13 @@
             <a:r>
               <a:rPr lang="en-US" sz="3000" b="1" dirty="0">
                 <a:solidFill>
-                  <a:srgbClr val="152A4E"/>
+                  <a:srgbClr val="16263D"/>
                 </a:solidFill>
                 <a:latin typeface="Georgia" pitchFamily="34" charset="0"/>
                 <a:ea typeface="Georgia" pitchFamily="34" charset="-122"/>
                 <a:cs typeface="Georgia" pitchFamily="34" charset="-120"/>
               </a:rPr>
-              <a:t>Descoperirea automata de comparabile</a:t>
+              <a:t>Descoperirea automată de comparabile</a:t>
             </a:r>
             <a:endParaRPr lang="en-US" sz="3000" dirty="0"/>
           </a:p>
@@ -8950,6 +9209,26 @@
       <p:sp>
         <p:nvSpPr>
           <p:cNvPr id="5" name="Shape 3"/>
+          <p:cNvSpPr/>
+          <p:nvPr/>
+        </p:nvSpPr>
+        <p:spPr>
+          <a:xfrm>
+            <a:off x="777240" y="1335024"/>
+            <a:ext cx="10607040" cy="22860"/>
+          </a:xfrm>
+          <a:prstGeom prst="rect">
+            <a:avLst/>
+          </a:prstGeom>
+          <a:solidFill>
+            <a:srgbClr val="B08D57"/>
+          </a:solidFill>
+          <a:ln/>
+        </p:spPr>
+      </p:sp>
+      <p:sp>
+        <p:nvSpPr>
+          <p:cNvPr id="6" name="Shape 4"/>
           <p:cNvSpPr/>
           <p:nvPr/>
         </p:nvSpPr>
@@ -8962,18 +9241,18 @@
             <a:avLst/>
           </a:prstGeom>
           <a:solidFill>
-            <a:srgbClr val="FFFFFF"/>
+            <a:srgbClr val="FBF8F0"/>
           </a:solidFill>
           <a:ln w="12700">
             <a:solidFill>
-              <a:srgbClr val="DDE3EE"/>
+              <a:srgbClr val="D7CDB4"/>
             </a:solidFill>
             <a:prstDash val="solid"/>
           </a:ln>
           <a:effectLst>
             <a:outerShdw sx="100000" sy="100000" kx="0" ky="0" algn="bl" rotWithShape="0" blurRad="88900" dist="38100" dir="8100000">
-              <a:srgbClr val="000000">
-                <a:alpha val="13000"/>
+              <a:srgbClr val="16263D">
+                <a:alpha val="12000"/>
               </a:srgbClr>
             </a:outerShdw>
           </a:effectLst>
@@ -8981,7 +9260,7 @@
       </p:sp>
       <p:sp>
         <p:nvSpPr>
-          <p:cNvPr id="6" name="Shape 4"/>
+          <p:cNvPr id="7" name="Shape 5"/>
           <p:cNvSpPr/>
           <p:nvPr/>
         </p:nvSpPr>
@@ -8994,14 +9273,14 @@
             <a:avLst/>
           </a:prstGeom>
           <a:solidFill>
-            <a:srgbClr val="2A9D8F"/>
-          </a:solidFill>
-          <a:ln/>
-        </p:spPr>
-      </p:sp>
-      <p:sp>
-        <p:nvSpPr>
-          <p:cNvPr id="7" name="Text 5"/>
+            <a:srgbClr val="2F6B4F"/>
+          </a:solidFill>
+          <a:ln/>
+        </p:spPr>
+      </p:sp>
+      <p:sp>
+        <p:nvSpPr>
+          <p:cNvPr id="8" name="Text 6"/>
           <p:cNvSpPr/>
           <p:nvPr/>
         </p:nvSpPr>
@@ -9040,7 +9319,7 @@
       </p:sp>
       <p:sp>
         <p:nvSpPr>
-          <p:cNvPr id="8" name="Text 6"/>
+          <p:cNvPr id="9" name="Text 7"/>
           <p:cNvSpPr/>
           <p:nvPr/>
         </p:nvSpPr>
@@ -9065,13 +9344,13 @@
             <a:r>
               <a:rPr lang="en-US" sz="1700" b="1" dirty="0">
                 <a:solidFill>
-                  <a:srgbClr val="152A4E"/>
+                  <a:srgbClr val="16263D"/>
                 </a:solidFill>
                 <a:latin typeface="Georgia" pitchFamily="34" charset="0"/>
                 <a:ea typeface="Georgia" pitchFamily="34" charset="-122"/>
                 <a:cs typeface="Georgia" pitchFamily="34" charset="-120"/>
               </a:rPr>
-              <a:t>Cauta</a:t>
+              <a:t>Caută</a:t>
             </a:r>
             <a:endParaRPr lang="en-US" sz="1700" dirty="0"/>
           </a:p>
@@ -9079,7 +9358,7 @@
       </p:sp>
       <p:sp>
         <p:nvSpPr>
-          <p:cNvPr id="9" name="Text 7"/>
+          <p:cNvPr id="10" name="Text 8"/>
           <p:cNvSpPr/>
           <p:nvPr/>
         </p:nvSpPr>
@@ -9104,13 +9383,13 @@
             <a:r>
               <a:rPr lang="en-US" sz="1300" dirty="0">
                 <a:solidFill>
-                  <a:srgbClr val="1A2233"/>
-                </a:solidFill>
-                <a:latin typeface="Calibri" pitchFamily="34" charset="0"/>
-                <a:ea typeface="Calibri" pitchFamily="34" charset="-122"/>
-                <a:cs typeface="Calibri" pitchFamily="34" charset="-120"/>
-              </a:rPr>
-              <a:t>Anunturi pe portaluri imobiliare, in zona aleasa</a:t>
+                  <a:srgbClr val="1F2D45"/>
+                </a:solidFill>
+                <a:latin typeface="Segoe UI" pitchFamily="34" charset="0"/>
+                <a:ea typeface="Segoe UI" pitchFamily="34" charset="-122"/>
+                <a:cs typeface="Segoe UI" pitchFamily="34" charset="-120"/>
+              </a:rPr>
+              <a:t>Anunțuri pe portaluri imobiliare, în zona aleasă</a:t>
             </a:r>
             <a:endParaRPr lang="en-US" sz="1300" dirty="0"/>
           </a:p>
@@ -9118,7 +9397,7 @@
       </p:sp>
       <p:sp>
         <p:nvSpPr>
-          <p:cNvPr id="10" name="Shape 8"/>
+          <p:cNvPr id="11" name="Shape 9"/>
           <p:cNvSpPr/>
           <p:nvPr/>
         </p:nvSpPr>
@@ -9131,18 +9410,18 @@
             <a:avLst/>
           </a:prstGeom>
           <a:solidFill>
-            <a:srgbClr val="FFFFFF"/>
+            <a:srgbClr val="FBF8F0"/>
           </a:solidFill>
           <a:ln w="12700">
             <a:solidFill>
-              <a:srgbClr val="DDE3EE"/>
+              <a:srgbClr val="D7CDB4"/>
             </a:solidFill>
             <a:prstDash val="solid"/>
           </a:ln>
           <a:effectLst>
             <a:outerShdw sx="100000" sy="100000" kx="0" ky="0" algn="bl" rotWithShape="0" blurRad="88900" dist="38100" dir="8100000">
-              <a:srgbClr val="000000">
-                <a:alpha val="13000"/>
+              <a:srgbClr val="16263D">
+                <a:alpha val="12000"/>
               </a:srgbClr>
             </a:outerShdw>
           </a:effectLst>
@@ -9150,7 +9429,7 @@
       </p:sp>
       <p:sp>
         <p:nvSpPr>
-          <p:cNvPr id="11" name="Shape 9"/>
+          <p:cNvPr id="12" name="Shape 10"/>
           <p:cNvSpPr/>
           <p:nvPr/>
         </p:nvSpPr>
@@ -9163,14 +9442,14 @@
             <a:avLst/>
           </a:prstGeom>
           <a:solidFill>
-            <a:srgbClr val="2A9D8F"/>
-          </a:solidFill>
-          <a:ln/>
-        </p:spPr>
-      </p:sp>
-      <p:sp>
-        <p:nvSpPr>
-          <p:cNvPr id="12" name="Text 10"/>
+            <a:srgbClr val="2F6B4F"/>
+          </a:solidFill>
+          <a:ln/>
+        </p:spPr>
+      </p:sp>
+      <p:sp>
+        <p:nvSpPr>
+          <p:cNvPr id="13" name="Text 11"/>
           <p:cNvSpPr/>
           <p:nvPr/>
         </p:nvSpPr>
@@ -9209,7 +9488,7 @@
       </p:sp>
       <p:sp>
         <p:nvSpPr>
-          <p:cNvPr id="13" name="Text 11"/>
+          <p:cNvPr id="14" name="Text 12"/>
           <p:cNvSpPr/>
           <p:nvPr/>
         </p:nvSpPr>
@@ -9234,13 +9513,13 @@
             <a:r>
               <a:rPr lang="en-US" sz="1700" b="1" dirty="0">
                 <a:solidFill>
-                  <a:srgbClr val="152A4E"/>
+                  <a:srgbClr val="16263D"/>
                 </a:solidFill>
                 <a:latin typeface="Georgia" pitchFamily="34" charset="0"/>
                 <a:ea typeface="Georgia" pitchFamily="34" charset="-122"/>
                 <a:cs typeface="Georgia" pitchFamily="34" charset="-120"/>
               </a:rPr>
-              <a:t>Citeste</a:t>
+              <a:t>Citește</a:t>
             </a:r>
             <a:endParaRPr lang="en-US" sz="1700" dirty="0"/>
           </a:p>
@@ -9248,7 +9527,7 @@
       </p:sp>
       <p:sp>
         <p:nvSpPr>
-          <p:cNvPr id="14" name="Text 12"/>
+          <p:cNvPr id="15" name="Text 13"/>
           <p:cNvSpPr/>
           <p:nvPr/>
         </p:nvSpPr>
@@ -9273,13 +9552,13 @@
             <a:r>
               <a:rPr lang="en-US" sz="1300" dirty="0">
                 <a:solidFill>
-                  <a:srgbClr val="1A2233"/>
-                </a:solidFill>
-                <a:latin typeface="Calibri" pitchFamily="34" charset="0"/>
-                <a:ea typeface="Calibri" pitchFamily="34" charset="-122"/>
-                <a:cs typeface="Calibri" pitchFamily="34" charset="-120"/>
-              </a:rPr>
-              <a:t>Extrage atributele din descriere (an, stare, finisaj, incalzire, suprafete)</a:t>
+                  <a:srgbClr val="1F2D45"/>
+                </a:solidFill>
+                <a:latin typeface="Segoe UI" pitchFamily="34" charset="0"/>
+                <a:ea typeface="Segoe UI" pitchFamily="34" charset="-122"/>
+                <a:cs typeface="Segoe UI" pitchFamily="34" charset="-120"/>
+              </a:rPr>
+              <a:t>Extrage atributele din descriere (an, stare, finisaj, încălzire, suprafețe)</a:t>
             </a:r>
             <a:endParaRPr lang="en-US" sz="1300" dirty="0"/>
           </a:p>
@@ -9287,7 +9566,7 @@
       </p:sp>
       <p:sp>
         <p:nvSpPr>
-          <p:cNvPr id="15" name="Shape 13"/>
+          <p:cNvPr id="16" name="Shape 14"/>
           <p:cNvSpPr/>
           <p:nvPr/>
         </p:nvSpPr>
@@ -9300,18 +9579,18 @@
             <a:avLst/>
           </a:prstGeom>
           <a:solidFill>
-            <a:srgbClr val="FFFFFF"/>
+            <a:srgbClr val="FBF8F0"/>
           </a:solidFill>
           <a:ln w="12700">
             <a:solidFill>
-              <a:srgbClr val="DDE3EE"/>
+              <a:srgbClr val="D7CDB4"/>
             </a:solidFill>
             <a:prstDash val="solid"/>
           </a:ln>
           <a:effectLst>
             <a:outerShdw sx="100000" sy="100000" kx="0" ky="0" algn="bl" rotWithShape="0" blurRad="88900" dist="38100" dir="8100000">
-              <a:srgbClr val="000000">
-                <a:alpha val="13000"/>
+              <a:srgbClr val="16263D">
+                <a:alpha val="12000"/>
               </a:srgbClr>
             </a:outerShdw>
           </a:effectLst>
@@ -9319,7 +9598,7 @@
       </p:sp>
       <p:sp>
         <p:nvSpPr>
-          <p:cNvPr id="16" name="Shape 14"/>
+          <p:cNvPr id="17" name="Shape 15"/>
           <p:cNvSpPr/>
           <p:nvPr/>
         </p:nvSpPr>
@@ -9332,14 +9611,14 @@
             <a:avLst/>
           </a:prstGeom>
           <a:solidFill>
-            <a:srgbClr val="2A9D8F"/>
-          </a:solidFill>
-          <a:ln/>
-        </p:spPr>
-      </p:sp>
-      <p:sp>
-        <p:nvSpPr>
-          <p:cNvPr id="17" name="Text 15"/>
+            <a:srgbClr val="2F6B4F"/>
+          </a:solidFill>
+          <a:ln/>
+        </p:spPr>
+      </p:sp>
+      <p:sp>
+        <p:nvSpPr>
+          <p:cNvPr id="18" name="Text 16"/>
           <p:cNvSpPr/>
           <p:nvPr/>
         </p:nvSpPr>
@@ -9378,7 +9657,7 @@
       </p:sp>
       <p:sp>
         <p:nvSpPr>
-          <p:cNvPr id="18" name="Text 16"/>
+          <p:cNvPr id="19" name="Text 17"/>
           <p:cNvSpPr/>
           <p:nvPr/>
         </p:nvSpPr>
@@ -9403,13 +9682,13 @@
             <a:r>
               <a:rPr lang="en-US" sz="1700" b="1" dirty="0">
                 <a:solidFill>
-                  <a:srgbClr val="152A4E"/>
+                  <a:srgbClr val="16263D"/>
                 </a:solidFill>
                 <a:latin typeface="Georgia" pitchFamily="34" charset="0"/>
                 <a:ea typeface="Georgia" pitchFamily="34" charset="-122"/>
                 <a:cs typeface="Georgia" pitchFamily="34" charset="-120"/>
               </a:rPr>
-              <a:t>Puncteaza</a:t>
+              <a:t>Punctează</a:t>
             </a:r>
             <a:endParaRPr lang="en-US" sz="1700" dirty="0"/>
           </a:p>
@@ -9417,7 +9696,7 @@
       </p:sp>
       <p:sp>
         <p:nvSpPr>
-          <p:cNvPr id="19" name="Text 17"/>
+          <p:cNvPr id="20" name="Text 18"/>
           <p:cNvSpPr/>
           <p:nvPr/>
         </p:nvSpPr>
@@ -9442,13 +9721,13 @@
             <a:r>
               <a:rPr lang="en-US" sz="1300" dirty="0">
                 <a:solidFill>
-                  <a:srgbClr val="1A2233"/>
-                </a:solidFill>
-                <a:latin typeface="Calibri" pitchFamily="34" charset="0"/>
-                <a:ea typeface="Calibri" pitchFamily="34" charset="-122"/>
-                <a:cs typeface="Calibri" pitchFamily="34" charset="-120"/>
-              </a:rPr>
-              <a:t>Similaritate dupa 6 criterii ponderate fata de subiect</a:t>
+                  <a:srgbClr val="1F2D45"/>
+                </a:solidFill>
+                <a:latin typeface="Segoe UI" pitchFamily="34" charset="0"/>
+                <a:ea typeface="Segoe UI" pitchFamily="34" charset="-122"/>
+                <a:cs typeface="Segoe UI" pitchFamily="34" charset="-120"/>
+              </a:rPr>
+              <a:t>Similaritate după 6 criterii ponderate față de subiect</a:t>
             </a:r>
             <a:endParaRPr lang="en-US" sz="1300" dirty="0"/>
           </a:p>
@@ -9456,7 +9735,7 @@
       </p:sp>
       <p:sp>
         <p:nvSpPr>
-          <p:cNvPr id="20" name="Shape 18"/>
+          <p:cNvPr id="21" name="Shape 19"/>
           <p:cNvSpPr/>
           <p:nvPr/>
         </p:nvSpPr>
@@ -9469,18 +9748,18 @@
             <a:avLst/>
           </a:prstGeom>
           <a:solidFill>
-            <a:srgbClr val="FFFFFF"/>
+            <a:srgbClr val="FBF8F0"/>
           </a:solidFill>
           <a:ln w="12700">
             <a:solidFill>
-              <a:srgbClr val="DDE3EE"/>
+              <a:srgbClr val="D7CDB4"/>
             </a:solidFill>
             <a:prstDash val="solid"/>
           </a:ln>
           <a:effectLst>
             <a:outerShdw sx="100000" sy="100000" kx="0" ky="0" algn="bl" rotWithShape="0" blurRad="88900" dist="38100" dir="8100000">
-              <a:srgbClr val="000000">
-                <a:alpha val="13000"/>
+              <a:srgbClr val="16263D">
+                <a:alpha val="12000"/>
               </a:srgbClr>
             </a:outerShdw>
           </a:effectLst>
@@ -9488,7 +9767,7 @@
       </p:sp>
       <p:sp>
         <p:nvSpPr>
-          <p:cNvPr id="21" name="Shape 19"/>
+          <p:cNvPr id="22" name="Shape 20"/>
           <p:cNvSpPr/>
           <p:nvPr/>
         </p:nvSpPr>
@@ -9501,14 +9780,14 @@
             <a:avLst/>
           </a:prstGeom>
           <a:solidFill>
-            <a:srgbClr val="2A9D8F"/>
-          </a:solidFill>
-          <a:ln/>
-        </p:spPr>
-      </p:sp>
-      <p:sp>
-        <p:nvSpPr>
-          <p:cNvPr id="22" name="Text 20"/>
+            <a:srgbClr val="2F6B4F"/>
+          </a:solidFill>
+          <a:ln/>
+        </p:spPr>
+      </p:sp>
+      <p:sp>
+        <p:nvSpPr>
+          <p:cNvPr id="23" name="Text 21"/>
           <p:cNvSpPr/>
           <p:nvPr/>
         </p:nvSpPr>
@@ -9547,7 +9826,7 @@
       </p:sp>
       <p:sp>
         <p:nvSpPr>
-          <p:cNvPr id="23" name="Text 21"/>
+          <p:cNvPr id="24" name="Text 22"/>
           <p:cNvSpPr/>
           <p:nvPr/>
         </p:nvSpPr>
@@ -9572,13 +9851,13 @@
             <a:r>
               <a:rPr lang="en-US" sz="1700" b="1" dirty="0">
                 <a:solidFill>
-                  <a:srgbClr val="152A4E"/>
+                  <a:srgbClr val="16263D"/>
                 </a:solidFill>
                 <a:latin typeface="Georgia" pitchFamily="34" charset="0"/>
                 <a:ea typeface="Georgia" pitchFamily="34" charset="-122"/>
                 <a:cs typeface="Georgia" pitchFamily="34" charset="-120"/>
               </a:rPr>
-              <a:t>Explica</a:t>
+              <a:t>Explică</a:t>
             </a:r>
             <a:endParaRPr lang="en-US" sz="1700" dirty="0"/>
           </a:p>
@@ -9586,7 +9865,7 @@
       </p:sp>
       <p:sp>
         <p:nvSpPr>
-          <p:cNvPr id="24" name="Text 22"/>
+          <p:cNvPr id="25" name="Text 23"/>
           <p:cNvSpPr/>
           <p:nvPr/>
         </p:nvSpPr>
@@ -9611,13 +9890,13 @@
             <a:r>
               <a:rPr lang="en-US" sz="1300" dirty="0">
                 <a:solidFill>
-                  <a:srgbClr val="1A2233"/>
-                </a:solidFill>
-                <a:latin typeface="Calibri" pitchFamily="34" charset="0"/>
-                <a:ea typeface="Calibri" pitchFamily="34" charset="-122"/>
-                <a:cs typeface="Calibri" pitchFamily="34" charset="-120"/>
-              </a:rPr>
-              <a:t>Pentru fiecare criteriu: referinta, gasit, diferenta, pondere</a:t>
+                  <a:srgbClr val="1F2D45"/>
+                </a:solidFill>
+                <a:latin typeface="Segoe UI" pitchFamily="34" charset="0"/>
+                <a:ea typeface="Segoe UI" pitchFamily="34" charset="-122"/>
+                <a:cs typeface="Segoe UI" pitchFamily="34" charset="-120"/>
+              </a:rPr>
+              <a:t>Pentru fiecare criteriu: referință, găsit, diferență, pondere</a:t>
             </a:r>
             <a:endParaRPr lang="en-US" sz="1300" dirty="0"/>
           </a:p>
@@ -9625,7 +9904,7 @@
       </p:sp>
       <p:sp>
         <p:nvSpPr>
-          <p:cNvPr id="25" name="Shape 23"/>
+          <p:cNvPr id="26" name="Shape 24"/>
           <p:cNvSpPr/>
           <p:nvPr/>
         </p:nvSpPr>
@@ -9638,18 +9917,18 @@
             <a:avLst/>
           </a:prstGeom>
           <a:solidFill>
-            <a:srgbClr val="152A4E"/>
+            <a:srgbClr val="16263D"/>
           </a:solidFill>
           <a:ln w="12700">
             <a:solidFill>
-              <a:srgbClr val="DDE3EE"/>
+              <a:srgbClr val="D7CDB4"/>
             </a:solidFill>
             <a:prstDash val="solid"/>
           </a:ln>
           <a:effectLst>
             <a:outerShdw sx="100000" sy="100000" kx="0" ky="0" algn="bl" rotWithShape="0" blurRad="88900" dist="38100" dir="8100000">
-              <a:srgbClr val="000000">
-                <a:alpha val="13000"/>
+              <a:srgbClr val="16263D">
+                <a:alpha val="12000"/>
               </a:srgbClr>
             </a:outerShdw>
           </a:effectLst>
@@ -9657,7 +9936,7 @@
       </p:sp>
       <p:sp>
         <p:nvSpPr>
-          <p:cNvPr id="26" name="Text 24"/>
+          <p:cNvPr id="27" name="Text 25"/>
           <p:cNvSpPr/>
           <p:nvPr/>
         </p:nvSpPr>
@@ -9682,13 +9961,13 @@
             <a:r>
               <a:rPr lang="en-US" sz="1700" b="1" dirty="0">
                 <a:solidFill>
-                  <a:srgbClr val="D9A227"/>
+                  <a:srgbClr val="D9C08A"/>
                 </a:solidFill>
                 <a:latin typeface="Georgia" pitchFamily="34" charset="0"/>
                 <a:ea typeface="Georgia" pitchFamily="34" charset="-122"/>
                 <a:cs typeface="Georgia" pitchFamily="34" charset="-120"/>
               </a:rPr>
-              <a:t>De ce conteaza</a:t>
+              <a:t>De ce contează</a:t>
             </a:r>
             <a:endParaRPr lang="en-US" sz="1700" dirty="0"/>
           </a:p>
@@ -9696,7 +9975,7 @@
       </p:sp>
       <p:sp>
         <p:nvSpPr>
-          <p:cNvPr id="27" name="Text 25"/>
+          <p:cNvPr id="28" name="Text 26"/>
           <p:cNvSpPr/>
           <p:nvPr/>
         </p:nvSpPr>
@@ -9721,13 +10000,13 @@
             <a:r>
               <a:rPr lang="en-US" sz="1400" dirty="0">
                 <a:solidFill>
-                  <a:srgbClr val="CFE0F5"/>
-                </a:solidFill>
-                <a:latin typeface="Calibri" pitchFamily="34" charset="0"/>
-                <a:ea typeface="Calibri" pitchFamily="34" charset="-122"/>
-                <a:cs typeface="Calibri" pitchFamily="34" charset="-120"/>
-              </a:rPr>
-              <a:t>Evaluatorul intelege DE CE un anunt e mai relevant decat altul — fara sa acceseze documentatia tehnica. Comparabilele alese pot popula direct grila; ajustarile le pune evaluatorul.</a:t>
+                  <a:srgbClr val="E9E0CC"/>
+                </a:solidFill>
+                <a:latin typeface="Segoe UI" pitchFamily="34" charset="0"/>
+                <a:ea typeface="Segoe UI" pitchFamily="34" charset="-122"/>
+                <a:cs typeface="Segoe UI" pitchFamily="34" charset="-120"/>
+              </a:rPr>
+              <a:t>Evaluatorul înțelege DE CE un anunț e mai relevant decât altul — fără să acceseze documentația tehnică. Comparabilele alese pot popula direct grila; ajustările le pune evaluatorul.</a:t>
             </a:r>
             <a:endParaRPr lang="en-US" sz="1400" dirty="0"/>
           </a:p>
@@ -9735,7 +10014,7 @@
       </p:sp>
       <p:sp>
         <p:nvSpPr>
-          <p:cNvPr id="28" name="Text 26"/>
+          <p:cNvPr id="29" name="Text 27"/>
           <p:cNvSpPr/>
           <p:nvPr/>
         </p:nvSpPr>
@@ -9760,13 +10039,13 @@
             <a:r>
               <a:rPr lang="en-US" sz="900" dirty="0">
                 <a:solidFill>
-                  <a:srgbClr val="5C6679"/>
-                </a:solidFill>
-                <a:latin typeface="Calibri" pitchFamily="34" charset="0"/>
-                <a:ea typeface="Calibri" pitchFamily="34" charset="-122"/>
-                <a:cs typeface="Calibri" pitchFamily="34" charset="-120"/>
-              </a:rPr>
-              <a:t>Aplicatie de asistenta la evaluare  ·  casa + teren  ·  document pentru review</a:t>
+                  <a:srgbClr val="5A6270"/>
+                </a:solidFill>
+                <a:latin typeface="Segoe UI" pitchFamily="34" charset="0"/>
+                <a:ea typeface="Segoe UI" pitchFamily="34" charset="-122"/>
+                <a:cs typeface="Segoe UI" pitchFamily="34" charset="-120"/>
+              </a:rPr>
+              <a:t>Registru de evaluare ANEVAR  ·  aplicație locală offline  ·  document pentru review</a:t>
             </a:r>
             <a:endParaRPr lang="en-US" sz="900" dirty="0"/>
           </a:p>
@@ -9774,7 +10053,7 @@
       </p:sp>
       <p:sp>
         <p:nvSpPr>
-          <p:cNvPr id="29" name="Text 27"/>
+          <p:cNvPr id="30" name="Text 28"/>
           <p:cNvSpPr/>
           <p:nvPr/>
         </p:nvSpPr>
@@ -9799,11 +10078,11 @@
             <a:r>
               <a:rPr lang="en-US" sz="900" dirty="0">
                 <a:solidFill>
-                  <a:srgbClr val="5C6679"/>
-                </a:solidFill>
-                <a:latin typeface="Calibri" pitchFamily="34" charset="0"/>
-                <a:ea typeface="Calibri" pitchFamily="34" charset="-122"/>
-                <a:cs typeface="Calibri" pitchFamily="34" charset="-120"/>
+                  <a:srgbClr val="5A6270"/>
+                </a:solidFill>
+                <a:latin typeface="Segoe UI" pitchFamily="34" charset="0"/>
+                <a:ea typeface="Segoe UI" pitchFamily="34" charset="-122"/>
+                <a:cs typeface="Segoe UI" pitchFamily="34" charset="-120"/>
               </a:rPr>
               <a:t>8</a:t>
             </a:r>
@@ -9825,7 +10104,7 @@
     <p:bg>
       <p:bgPr>
         <a:solidFill>
-          <a:srgbClr val="F5F7FB"/>
+          <a:srgbClr val="F2EEE2"/>
         </a:solidFill>
       </p:bgPr>
     </p:bg>
@@ -9858,7 +10137,7 @@
             <a:avLst/>
           </a:prstGeom>
           <a:solidFill>
-            <a:srgbClr val="D9A227"/>
+            <a:srgbClr val="9D4A25"/>
           </a:solidFill>
           <a:ln/>
         </p:spPr>
@@ -9890,11 +10169,11 @@
             <a:r>
               <a:rPr lang="en-US" sz="1200" b="1" spc="300" kern="0" dirty="0">
                 <a:solidFill>
-                  <a:srgbClr val="D9A227"/>
-                </a:solidFill>
-                <a:latin typeface="Calibri" pitchFamily="34" charset="0"/>
-                <a:ea typeface="Calibri" pitchFamily="34" charset="-122"/>
-                <a:cs typeface="Calibri" pitchFamily="34" charset="-120"/>
+                  <a:srgbClr val="9D4A25"/>
+                </a:solidFill>
+                <a:latin typeface="Segoe UI" pitchFamily="34" charset="0"/>
+                <a:ea typeface="Segoe UI" pitchFamily="34" charset="-122"/>
+                <a:cs typeface="Segoe UI" pitchFamily="34" charset="-120"/>
               </a:rPr>
               <a:t>REZULTATUL</a:t>
             </a:r>
@@ -9929,7 +10208,7 @@
             <a:r>
               <a:rPr lang="en-US" sz="3000" b="1" dirty="0">
                 <a:solidFill>
-                  <a:srgbClr val="152A4E"/>
+                  <a:srgbClr val="16263D"/>
                 </a:solidFill>
                 <a:latin typeface="Georgia" pitchFamily="34" charset="0"/>
                 <a:ea typeface="Georgia" pitchFamily="34" charset="-122"/>
@@ -9943,7 +10222,27 @@
       </p:sp>
       <p:sp>
         <p:nvSpPr>
-          <p:cNvPr id="5" name="Text 3"/>
+          <p:cNvPr id="5" name="Shape 3"/>
+          <p:cNvSpPr/>
+          <p:nvPr/>
+        </p:nvSpPr>
+        <p:spPr>
+          <a:xfrm>
+            <a:off x="777240" y="1335024"/>
+            <a:ext cx="10607040" cy="22860"/>
+          </a:xfrm>
+          <a:prstGeom prst="rect">
+            <a:avLst/>
+          </a:prstGeom>
+          <a:solidFill>
+            <a:srgbClr val="B08D57"/>
+          </a:solidFill>
+          <a:ln/>
+        </p:spPr>
+      </p:sp>
+      <p:sp>
+        <p:nvSpPr>
+          <p:cNvPr id="6" name="Text 4"/>
           <p:cNvSpPr/>
           <p:nvPr/>
         </p:nvSpPr>
@@ -9972,13 +10271,13 @@
             <a:r>
               <a:rPr lang="en-US" sz="1500" dirty="0">
                 <a:solidFill>
-                  <a:srgbClr val="1A2233"/>
-                </a:solidFill>
-                <a:latin typeface="Calibri" pitchFamily="34" charset="0"/>
-                <a:ea typeface="Calibri" pitchFamily="34" charset="-122"/>
-                <a:cs typeface="Calibri" pitchFamily="34" charset="-120"/>
-              </a:rPr>
-              <a:t>Coperta, scrisoare de transmitere</a:t>
+                  <a:srgbClr val="1F2D45"/>
+                </a:solidFill>
+                <a:latin typeface="Segoe UI" pitchFamily="34" charset="0"/>
+                <a:ea typeface="Segoe UI" pitchFamily="34" charset="-122"/>
+                <a:cs typeface="Segoe UI" pitchFamily="34" charset="-120"/>
+              </a:rPr>
+              <a:t>Copertă, scrisoare de transmitere</a:t>
             </a:r>
             <a:endParaRPr lang="en-US" sz="1500" dirty="0"/>
           </a:p>
@@ -9993,13 +10292,13 @@
             <a:r>
               <a:rPr lang="en-US" sz="1500" dirty="0">
                 <a:solidFill>
-                  <a:srgbClr val="1A2233"/>
-                </a:solidFill>
-                <a:latin typeface="Calibri" pitchFamily="34" charset="0"/>
-                <a:ea typeface="Calibri" pitchFamily="34" charset="-122"/>
-                <a:cs typeface="Calibri" pitchFamily="34" charset="-120"/>
-              </a:rPr>
-              <a:t>Declaratie de conformitate si certificare</a:t>
+                  <a:srgbClr val="1F2D45"/>
+                </a:solidFill>
+                <a:latin typeface="Segoe UI" pitchFamily="34" charset="0"/>
+                <a:ea typeface="Segoe UI" pitchFamily="34" charset="-122"/>
+                <a:cs typeface="Segoe UI" pitchFamily="34" charset="-120"/>
+              </a:rPr>
+              <a:t>Declarație de conformitate și certificare</a:t>
             </a:r>
             <a:endParaRPr lang="en-US" sz="1500" dirty="0"/>
           </a:p>
@@ -10014,13 +10313,13 @@
             <a:r>
               <a:rPr lang="en-US" sz="1500" dirty="0">
                 <a:solidFill>
-                  <a:srgbClr val="1A2233"/>
-                </a:solidFill>
-                <a:latin typeface="Calibri" pitchFamily="34" charset="0"/>
-                <a:ea typeface="Calibri" pitchFamily="34" charset="-122"/>
-                <a:cs typeface="Calibri" pitchFamily="34" charset="-120"/>
-              </a:rPr>
-              <a:t>Termeni de referinta</a:t>
+                  <a:srgbClr val="1F2D45"/>
+                </a:solidFill>
+                <a:latin typeface="Segoe UI" pitchFamily="34" charset="0"/>
+                <a:ea typeface="Segoe UI" pitchFamily="34" charset="-122"/>
+                <a:cs typeface="Segoe UI" pitchFamily="34" charset="-120"/>
+              </a:rPr>
+              <a:t>Termeni de referință (SEV 101)</a:t>
             </a:r>
             <a:endParaRPr lang="en-US" sz="1500" dirty="0"/>
           </a:p>
@@ -10035,13 +10334,13 @@
             <a:r>
               <a:rPr lang="en-US" sz="1500" dirty="0">
                 <a:solidFill>
-                  <a:srgbClr val="1A2233"/>
-                </a:solidFill>
-                <a:latin typeface="Calibri" pitchFamily="34" charset="0"/>
-                <a:ea typeface="Calibri" pitchFamily="34" charset="-122"/>
-                <a:cs typeface="Calibri" pitchFamily="34" charset="-120"/>
-              </a:rPr>
-              <a:t>7 capitole de analiza (cu grilele de calcul)</a:t>
+                  <a:srgbClr val="1F2D45"/>
+                </a:solidFill>
+                <a:latin typeface="Segoe UI" pitchFamily="34" charset="0"/>
+                <a:ea typeface="Segoe UI" pitchFamily="34" charset="-122"/>
+                <a:cs typeface="Segoe UI" pitchFamily="34" charset="-120"/>
+              </a:rPr>
+              <a:t>7 capitole de analiză (cu grilele de calcul, SEV 106)</a:t>
             </a:r>
             <a:endParaRPr lang="en-US" sz="1500" dirty="0"/>
           </a:p>
@@ -10056,11 +10355,11 @@
             <a:r>
               <a:rPr lang="en-US" sz="1500" dirty="0">
                 <a:solidFill>
-                  <a:srgbClr val="1A2233"/>
-                </a:solidFill>
-                <a:latin typeface="Calibri" pitchFamily="34" charset="0"/>
-                <a:ea typeface="Calibri" pitchFamily="34" charset="-122"/>
-                <a:cs typeface="Calibri" pitchFamily="34" charset="-120"/>
+                  <a:srgbClr val="1F2D45"/>
+                </a:solidFill>
+                <a:latin typeface="Segoe UI" pitchFamily="34" charset="0"/>
+                <a:ea typeface="Segoe UI" pitchFamily="34" charset="-122"/>
+                <a:cs typeface="Segoe UI" pitchFamily="34" charset="-120"/>
               </a:rPr>
               <a:t>Alocarea valorii</a:t>
             </a:r>
@@ -10077,13 +10376,13 @@
             <a:r>
               <a:rPr lang="en-US" sz="1500" dirty="0">
                 <a:solidFill>
-                  <a:srgbClr val="1A2233"/>
-                </a:solidFill>
-                <a:latin typeface="Calibri" pitchFamily="34" charset="0"/>
-                <a:ea typeface="Calibri" pitchFamily="34" charset="-122"/>
-                <a:cs typeface="Calibri" pitchFamily="34" charset="-120"/>
-              </a:rPr>
-              <a:t>Riscul asociat garantiei (GEV 520)</a:t>
+                  <a:srgbClr val="1F2D45"/>
+                </a:solidFill>
+                <a:latin typeface="Segoe UI" pitchFamily="34" charset="0"/>
+                <a:ea typeface="Segoe UI" pitchFamily="34" charset="-122"/>
+                <a:cs typeface="Segoe UI" pitchFamily="34" charset="-120"/>
+              </a:rPr>
+              <a:t>Riscul asociat garanției (GEV 520)</a:t>
             </a:r>
             <a:endParaRPr lang="en-US" sz="1500" dirty="0"/>
           </a:p>
@@ -10098,11 +10397,11 @@
             <a:r>
               <a:rPr lang="en-US" sz="1500" dirty="0">
                 <a:solidFill>
-                  <a:srgbClr val="1A2233"/>
-                </a:solidFill>
-                <a:latin typeface="Calibri" pitchFamily="34" charset="0"/>
-                <a:ea typeface="Calibri" pitchFamily="34" charset="-122"/>
-                <a:cs typeface="Calibri" pitchFamily="34" charset="-120"/>
+                  <a:srgbClr val="1F2D45"/>
+                </a:solidFill>
+                <a:latin typeface="Segoe UI" pitchFamily="34" charset="0"/>
+                <a:ea typeface="Segoe UI" pitchFamily="34" charset="-122"/>
+                <a:cs typeface="Segoe UI" pitchFamily="34" charset="-120"/>
               </a:rPr>
               <a:t>Anexe: surse comparabile + fotografii</a:t>
             </a:r>
@@ -10119,13 +10418,13 @@
             <a:r>
               <a:rPr lang="en-US" sz="1500" dirty="0">
                 <a:solidFill>
-                  <a:srgbClr val="1A2233"/>
-                </a:solidFill>
-                <a:latin typeface="Calibri" pitchFamily="34" charset="0"/>
-                <a:ea typeface="Calibri" pitchFamily="34" charset="-122"/>
-                <a:cs typeface="Calibri" pitchFamily="34" charset="-120"/>
-              </a:rPr>
-              <a:t>Caseta de semnatura</a:t>
+                  <a:srgbClr val="1F2D45"/>
+                </a:solidFill>
+                <a:latin typeface="Segoe UI" pitchFamily="34" charset="0"/>
+                <a:ea typeface="Segoe UI" pitchFamily="34" charset="-122"/>
+                <a:cs typeface="Segoe UI" pitchFamily="34" charset="-120"/>
+              </a:rPr>
+              <a:t>Casetă de semnătură</a:t>
             </a:r>
             <a:endParaRPr lang="en-US" sz="1500" dirty="0"/>
           </a:p>
@@ -10133,7 +10432,7 @@
       </p:sp>
       <p:sp>
         <p:nvSpPr>
-          <p:cNvPr id="6" name="Shape 4"/>
+          <p:cNvPr id="7" name="Shape 5"/>
           <p:cNvSpPr/>
           <p:nvPr/>
         </p:nvSpPr>
@@ -10146,18 +10445,18 @@
             <a:avLst/>
           </a:prstGeom>
           <a:solidFill>
-            <a:srgbClr val="FFFFFF"/>
+            <a:srgbClr val="FBF8F0"/>
           </a:solidFill>
           <a:ln w="12700">
             <a:solidFill>
-              <a:srgbClr val="DDE3EE"/>
+              <a:srgbClr val="D7CDB4"/>
             </a:solidFill>
             <a:prstDash val="solid"/>
           </a:ln>
           <a:effectLst>
             <a:outerShdw sx="100000" sy="100000" kx="0" ky="0" algn="bl" rotWithShape="0" blurRad="88900" dist="38100" dir="8100000">
-              <a:srgbClr val="000000">
-                <a:alpha val="13000"/>
+              <a:srgbClr val="16263D">
+                <a:alpha val="12000"/>
               </a:srgbClr>
             </a:outerShdw>
           </a:effectLst>
@@ -10165,7 +10464,7 @@
       </p:sp>
       <p:pic>
         <p:nvPicPr>
-          <p:cNvPr id="7" name="Image 0" descr="C:\Users\adyse\AppData\Local\Temp\demo\fata.png">    </p:cNvPr>
+          <p:cNvPr id="8" name="Image 0" descr="C:\Users\adyse\AppData\Local\Temp\demo\fata.png">    </p:cNvPr>
           <p:cNvPicPr>
             <a:picLocks noChangeAspect="1"/>
           </p:cNvPicPr>
@@ -10188,7 +10487,7 @@
       </p:pic>
       <p:pic>
         <p:nvPicPr>
-          <p:cNvPr id="8" name="Image 1" descr="C:\Users\adyse\AppData\Local\Temp\demo\curte.png">    </p:cNvPr>
+          <p:cNvPr id="9" name="Image 1" descr="C:\Users\adyse\AppData\Local\Temp\demo\curte.png">    </p:cNvPr>
           <p:cNvPicPr>
             <a:picLocks noChangeAspect="1"/>
           </p:cNvPicPr>
@@ -10211,7 +10510,7 @@
       </p:pic>
       <p:sp>
         <p:nvSpPr>
-          <p:cNvPr id="9" name="Text 5"/>
+          <p:cNvPr id="10" name="Text 6"/>
           <p:cNvSpPr/>
           <p:nvPr/>
         </p:nvSpPr>
@@ -10236,13 +10535,13 @@
             <a:r>
               <a:rPr lang="en-US" sz="1100" i="1" dirty="0">
                 <a:solidFill>
-                  <a:srgbClr val="5C6679"/>
-                </a:solidFill>
-                <a:latin typeface="Calibri" pitchFamily="34" charset="0"/>
-                <a:ea typeface="Calibri" pitchFamily="34" charset="-122"/>
-                <a:cs typeface="Calibri" pitchFamily="34" charset="-120"/>
-              </a:rPr>
-              <a:t>Anexa foto — pozele intra direct in raport</a:t>
+                  <a:srgbClr val="5A6270"/>
+                </a:solidFill>
+                <a:latin typeface="Segoe UI" pitchFamily="34" charset="0"/>
+                <a:ea typeface="Segoe UI" pitchFamily="34" charset="-122"/>
+                <a:cs typeface="Segoe UI" pitchFamily="34" charset="-120"/>
+              </a:rPr>
+              <a:t>Anexa foto — pozele intră direct în raport</a:t>
             </a:r>
             <a:endParaRPr lang="en-US" sz="1100" dirty="0"/>
           </a:p>
@@ -10250,7 +10549,7 @@
       </p:sp>
       <p:sp>
         <p:nvSpPr>
-          <p:cNvPr id="10" name="Shape 6"/>
+          <p:cNvPr id="11" name="Shape 7"/>
           <p:cNvSpPr/>
           <p:nvPr/>
         </p:nvSpPr>
@@ -10267,14 +10566,14 @@
           </a:solidFill>
           <a:ln w="12700">
             <a:solidFill>
-              <a:srgbClr val="DDE3EE"/>
+              <a:srgbClr val="D7CDB4"/>
             </a:solidFill>
             <a:prstDash val="solid"/>
           </a:ln>
           <a:effectLst>
             <a:outerShdw sx="100000" sy="100000" kx="0" ky="0" algn="bl" rotWithShape="0" blurRad="88900" dist="38100" dir="8100000">
-              <a:srgbClr val="000000">
-                <a:alpha val="13000"/>
+              <a:srgbClr val="16263D">
+                <a:alpha val="12000"/>
               </a:srgbClr>
             </a:outerShdw>
           </a:effectLst>
@@ -10282,7 +10581,7 @@
       </p:sp>
       <p:sp>
         <p:nvSpPr>
-          <p:cNvPr id="11" name="Text 7"/>
+          <p:cNvPr id="12" name="Text 8"/>
           <p:cNvSpPr/>
           <p:nvPr/>
         </p:nvSpPr>
@@ -10307,13 +10606,13 @@
             <a:r>
               <a:rPr lang="en-US" sz="1250" dirty="0">
                 <a:solidFill>
-                  <a:srgbClr val="1A2233"/>
-                </a:solidFill>
-                <a:latin typeface="Calibri" pitchFamily="34" charset="0"/>
-                <a:ea typeface="Calibri" pitchFamily="34" charset="-122"/>
-                <a:cs typeface="Calibri" pitchFamily="34" charset="-120"/>
-              </a:rPr>
-              <a:t>Textul de analiza e redactat cu AI pe baza cifrelor — evaluatorul revizuieste.</a:t>
+                  <a:srgbClr val="1F2D45"/>
+                </a:solidFill>
+                <a:latin typeface="Segoe UI" pitchFamily="34" charset="0"/>
+                <a:ea typeface="Segoe UI" pitchFamily="34" charset="-122"/>
+                <a:cs typeface="Segoe UI" pitchFamily="34" charset="-120"/>
+              </a:rPr>
+              <a:t>Textul de analiză e redactat cu AI pe baza cifrelor — evaluatorul revizuiește.</a:t>
             </a:r>
             <a:endParaRPr lang="en-US" sz="1250" dirty="0"/>
           </a:p>
@@ -10321,7 +10620,7 @@
       </p:sp>
       <p:sp>
         <p:nvSpPr>
-          <p:cNvPr id="12" name="Text 8"/>
+          <p:cNvPr id="13" name="Text 9"/>
           <p:cNvSpPr/>
           <p:nvPr/>
         </p:nvSpPr>
@@ -10346,13 +10645,13 @@
             <a:r>
               <a:rPr lang="en-US" sz="900" dirty="0">
                 <a:solidFill>
-                  <a:srgbClr val="5C6679"/>
-                </a:solidFill>
-                <a:latin typeface="Calibri" pitchFamily="34" charset="0"/>
-                <a:ea typeface="Calibri" pitchFamily="34" charset="-122"/>
-                <a:cs typeface="Calibri" pitchFamily="34" charset="-120"/>
-              </a:rPr>
-              <a:t>Aplicatie de asistenta la evaluare  ·  casa + teren  ·  document pentru review</a:t>
+                  <a:srgbClr val="5A6270"/>
+                </a:solidFill>
+                <a:latin typeface="Segoe UI" pitchFamily="34" charset="0"/>
+                <a:ea typeface="Segoe UI" pitchFamily="34" charset="-122"/>
+                <a:cs typeface="Segoe UI" pitchFamily="34" charset="-120"/>
+              </a:rPr>
+              <a:t>Registru de evaluare ANEVAR  ·  aplicație locală offline  ·  document pentru review</a:t>
             </a:r>
             <a:endParaRPr lang="en-US" sz="900" dirty="0"/>
           </a:p>
@@ -10360,7 +10659,7 @@
       </p:sp>
       <p:sp>
         <p:nvSpPr>
-          <p:cNvPr id="13" name="Text 9"/>
+          <p:cNvPr id="14" name="Text 10"/>
           <p:cNvSpPr/>
           <p:nvPr/>
         </p:nvSpPr>
@@ -10385,11 +10684,11 @@
             <a:r>
               <a:rPr lang="en-US" sz="900" dirty="0">
                 <a:solidFill>
-                  <a:srgbClr val="5C6679"/>
-                </a:solidFill>
-                <a:latin typeface="Calibri" pitchFamily="34" charset="0"/>
-                <a:ea typeface="Calibri" pitchFamily="34" charset="-122"/>
-                <a:cs typeface="Calibri" pitchFamily="34" charset="-120"/>
+                  <a:srgbClr val="5A6270"/>
+                </a:solidFill>
+                <a:latin typeface="Segoe UI" pitchFamily="34" charset="0"/>
+                <a:ea typeface="Segoe UI" pitchFamily="34" charset="-122"/>
+                <a:cs typeface="Segoe UI" pitchFamily="34" charset="-120"/>
               </a:rPr>
               <a:t>9</a:t>
             </a:r>

--- a/docs/prezentare-aplicatie.pptx
+++ b/docs/prezentare-aplicatie.pptx
@@ -9943,7 +9943,7 @@
         <p:spPr>
           <a:xfrm>
             <a:off x="8046720" y="1920240"/>
-            <a:ext cx="3108960" cy="365760"/>
+            <a:ext cx="3108960" cy="640080"/>
           </a:xfrm>
           <a:prstGeom prst="rect">
             <a:avLst/>
@@ -9959,7 +9959,7 @@
               <a:buNone/>
             </a:pPr>
             <a:r>
-              <a:rPr lang="en-US" sz="1700" b="1" dirty="0">
+              <a:rPr lang="en-US" sz="1600" b="1" dirty="0">
                 <a:solidFill>
                   <a:srgbClr val="D9C08A"/>
                 </a:solidFill>
@@ -9967,9 +9967,9 @@
                 <a:ea typeface="Georgia" pitchFamily="34" charset="-122"/>
                 <a:cs typeface="Georgia" pitchFamily="34" charset="-120"/>
               </a:rPr>
-              <a:t>De ce contează</a:t>
-            </a:r>
-            <a:endParaRPr lang="en-US" sz="1700" dirty="0"/>
+              <a:t>Import prin extensie de browser</a:t>
+            </a:r>
+            <a:endParaRPr lang="en-US" sz="1600" dirty="0"/>
           </a:p>
         </p:txBody>
       </p:sp>
@@ -9981,8 +9981,8 @@
         </p:nvSpPr>
         <p:spPr>
           <a:xfrm>
-            <a:off x="8046720" y="2377440"/>
-            <a:ext cx="3154680" cy="3108960"/>
+            <a:off x="8046720" y="2606040"/>
+            <a:ext cx="3154680" cy="3017520"/>
           </a:xfrm>
           <a:prstGeom prst="rect">
             <a:avLst/>
@@ -9995,10 +9995,13 @@
           <a:lstStyle/>
           <a:p>
             <a:pPr indent="0" marL="0">
-              <a:buNone/>
-            </a:pPr>
-            <a:r>
-              <a:rPr lang="en-US" sz="1400" dirty="0">
+              <a:spcAft>
+                <a:spcPts val="800"/>
+              </a:spcAft>
+              <a:buNone/>
+            </a:pPr>
+            <a:r>
+              <a:rPr lang="en-US" sz="1300" dirty="0">
                 <a:solidFill>
                   <a:srgbClr val="E9E0CC"/>
                 </a:solidFill>
@@ -10006,9 +10009,26 @@
                 <a:ea typeface="Segoe UI" pitchFamily="34" charset="-122"/>
                 <a:cs typeface="Segoe UI" pitchFamily="34" charset="-120"/>
               </a:rPr>
-              <a:t>Evaluatorul înțelege DE CE un anunț e mai relevant decât altul — fără să acceseze documentația tehnică. Comparabilele alese pot popula direct grila; ajustările le pune evaluatorul.</a:t>
-            </a:r>
-            <a:endParaRPr lang="en-US" sz="1400" dirty="0"/>
+              <a:t>Evaluatorul deschide MANUAL un anunț pe storia.ro / imobiliare.ro și apasă un buton — extensia trimite pagina în aplicație. Fără scraping automat, fără anti-bot.</a:t>
+            </a:r>
+            <a:endParaRPr lang="en-US" sz="1300" dirty="0"/>
+          </a:p>
+          <a:p>
+            <a:pPr indent="0" marL="0">
+              <a:buNone/>
+            </a:pPr>
+            <a:r>
+              <a:rPr lang="en-US" sz="1300" dirty="0">
+                <a:solidFill>
+                  <a:srgbClr val="E9E0CC"/>
+                </a:solidFill>
+                <a:latin typeface="Segoe UI" pitchFamily="34" charset="0"/>
+                <a:ea typeface="Segoe UI" pitchFamily="34" charset="-122"/>
+                <a:cs typeface="Segoe UI" pitchFamily="34" charset="-120"/>
+              </a:rPr>
+              <a:t>Anunțurile intră într-o coadă persistentă; din ele populează direct grila. Prețurile sunt din OFERTE — ajustarea ofertă→tranzacție o pune evaluatorul.</a:t>
+            </a:r>
+            <a:endParaRPr lang="en-US" sz="1300" dirty="0"/>
           </a:p>
         </p:txBody>
       </p:sp>
